--- a/Documentacao/ModelagemSistema_TemplateInicial.pptx
+++ b/Documentacao/ModelagemSistema_TemplateInicial.pptx
@@ -5,7 +5,7 @@
     <p:sldMasterId id="2147483660" r:id="rId1"/>
   </p:sldMasterIdLst>
   <p:notesMasterIdLst>
-    <p:notesMasterId r:id="rId21"/>
+    <p:notesMasterId r:id="rId23"/>
   </p:notesMasterIdLst>
   <p:sldIdLst>
     <p:sldId id="2561" r:id="rId2"/>
@@ -23,10 +23,12 @@
     <p:sldId id="2583" r:id="rId14"/>
     <p:sldId id="2585" r:id="rId15"/>
     <p:sldId id="2584" r:id="rId16"/>
-    <p:sldId id="2567" r:id="rId17"/>
-    <p:sldId id="2568" r:id="rId18"/>
-    <p:sldId id="2586" r:id="rId19"/>
-    <p:sldId id="2569" r:id="rId20"/>
+    <p:sldId id="2589" r:id="rId17"/>
+    <p:sldId id="2588" r:id="rId18"/>
+    <p:sldId id="2567" r:id="rId19"/>
+    <p:sldId id="2568" r:id="rId20"/>
+    <p:sldId id="2586" r:id="rId21"/>
+    <p:sldId id="2569" r:id="rId22"/>
   </p:sldIdLst>
   <p:sldSz cx="12192000" cy="6858000"/>
   <p:notesSz cx="6858000" cy="9144000"/>
@@ -215,7 +217,7 @@
           <a:p>
             <a:fld id="{93DDA81E-B6DD-4CA0-9C2D-B0C27B95DC2C}" type="datetimeFigureOut">
               <a:rPr lang="pt-BR" smtClean="0"/>
-              <a:t>22/01/2025</a:t>
+              <a:t>27/01/2025</a:t>
             </a:fld>
             <a:endParaRPr lang="pt-BR"/>
           </a:p>
@@ -1219,7 +1221,13 @@
   <p:cSld>
     <p:spTree>
       <p:nvGrpSpPr>
-        <p:cNvPr id="1" name=""/>
+        <p:cNvPr id="1" name="">
+          <a:extLst>
+            <a:ext uri="{FF2B5EF4-FFF2-40B4-BE49-F238E27FC236}">
+              <a16:creationId xmlns:a16="http://schemas.microsoft.com/office/drawing/2014/main" id="{5E758249-486C-768F-A9A2-E1C45FF9A004}"/>
+            </a:ext>
+          </a:extLst>
+        </p:cNvPr>
         <p:cNvGrpSpPr/>
         <p:nvPr/>
       </p:nvGrpSpPr>
@@ -1233,7 +1241,13 @@
       </p:grpSpPr>
       <p:sp>
         <p:nvSpPr>
-          <p:cNvPr id="2" name="Espaço Reservado para Imagem de Slide 1"/>
+          <p:cNvPr id="2" name="Espaço Reservado para Imagem de Slide 1">
+            <a:extLst>
+              <a:ext uri="{FF2B5EF4-FFF2-40B4-BE49-F238E27FC236}">
+                <a16:creationId xmlns:a16="http://schemas.microsoft.com/office/drawing/2014/main" id="{893D3064-37E2-A08B-B67E-D0BDF678B537}"/>
+              </a:ext>
+            </a:extLst>
+          </p:cNvPr>
           <p:cNvSpPr>
             <a:spLocks noGrp="1" noRot="1" noChangeAspect="1"/>
           </p:cNvSpPr>
@@ -1245,7 +1259,13 @@
       </p:sp>
       <p:sp>
         <p:nvSpPr>
-          <p:cNvPr id="3" name="Espaço Reservado para Anotações 2"/>
+          <p:cNvPr id="3" name="Espaço Reservado para Anotações 2">
+            <a:extLst>
+              <a:ext uri="{FF2B5EF4-FFF2-40B4-BE49-F238E27FC236}">
+                <a16:creationId xmlns:a16="http://schemas.microsoft.com/office/drawing/2014/main" id="{509255BE-D866-6F4C-1785-B44C4C921F5A}"/>
+              </a:ext>
+            </a:extLst>
+          </p:cNvPr>
           <p:cNvSpPr>
             <a:spLocks noGrp="1"/>
           </p:cNvSpPr>
@@ -1260,14 +1280,20 @@
           <a:p>
             <a:r>
               <a:rPr lang="pt-BR"/>
-              <a:t>Os requisitos funcionais definem as ações que o sistema deve ser capaz de realizar. Neste slide, listaremos os principais requisitos funcionais, incluindo funções como cadastro de usuários, geração de relatórios e consulta de dados.</a:t>
-            </a:r>
-          </a:p>
-        </p:txBody>
-      </p:sp>
-      <p:sp>
-        <p:nvSpPr>
-          <p:cNvPr id="4" name="Espaço Reservado para Número de Slide 3"/>
+              <a:t>O Diagrama Entidade-Relacionamento (DER) é uma ferramenta visual que descreve a estrutura do banco de dados do sistema. Ele ilustra as principais entidades, seus atributos e os relacionamentos entre elas, ajudando a entender a lógica do banco de dados.</a:t>
+            </a:r>
+          </a:p>
+        </p:txBody>
+      </p:sp>
+      <p:sp>
+        <p:nvSpPr>
+          <p:cNvPr id="4" name="Espaço Reservado para Número de Slide 3">
+            <a:extLst>
+              <a:ext uri="{FF2B5EF4-FFF2-40B4-BE49-F238E27FC236}">
+                <a16:creationId xmlns:a16="http://schemas.microsoft.com/office/drawing/2014/main" id="{9733254D-078E-0492-BCD8-F2990DC2CCFA}"/>
+              </a:ext>
+            </a:extLst>
+          </p:cNvPr>
           <p:cNvSpPr>
             <a:spLocks noGrp="1"/>
           </p:cNvSpPr>
@@ -1291,7 +1317,7 @@
     </p:spTree>
     <p:extLst>
       <p:ext uri="{BB962C8B-B14F-4D97-AF65-F5344CB8AC3E}">
-        <p14:creationId xmlns:p14="http://schemas.microsoft.com/office/powerpoint/2010/main" val="3164768469"/>
+        <p14:creationId xmlns:p14="http://schemas.microsoft.com/office/powerpoint/2010/main" val="1722152450"/>
       </p:ext>
     </p:extLst>
   </p:cSld>
@@ -1306,7 +1332,13 @@
   <p:cSld>
     <p:spTree>
       <p:nvGrpSpPr>
-        <p:cNvPr id="1" name=""/>
+        <p:cNvPr id="1" name="">
+          <a:extLst>
+            <a:ext uri="{FF2B5EF4-FFF2-40B4-BE49-F238E27FC236}">
+              <a16:creationId xmlns:a16="http://schemas.microsoft.com/office/drawing/2014/main" id="{5E758249-486C-768F-A9A2-E1C45FF9A004}"/>
+            </a:ext>
+          </a:extLst>
+        </p:cNvPr>
         <p:cNvGrpSpPr/>
         <p:nvPr/>
       </p:nvGrpSpPr>
@@ -1320,7 +1352,13 @@
       </p:grpSpPr>
       <p:sp>
         <p:nvSpPr>
-          <p:cNvPr id="2" name="Espaço Reservado para Imagem de Slide 1"/>
+          <p:cNvPr id="2" name="Espaço Reservado para Imagem de Slide 1">
+            <a:extLst>
+              <a:ext uri="{FF2B5EF4-FFF2-40B4-BE49-F238E27FC236}">
+                <a16:creationId xmlns:a16="http://schemas.microsoft.com/office/drawing/2014/main" id="{893D3064-37E2-A08B-B67E-D0BDF678B537}"/>
+              </a:ext>
+            </a:extLst>
+          </p:cNvPr>
           <p:cNvSpPr>
             <a:spLocks noGrp="1" noRot="1" noChangeAspect="1"/>
           </p:cNvSpPr>
@@ -1332,7 +1370,13 @@
       </p:sp>
       <p:sp>
         <p:nvSpPr>
-          <p:cNvPr id="3" name="Espaço Reservado para Anotações 2"/>
+          <p:cNvPr id="3" name="Espaço Reservado para Anotações 2">
+            <a:extLst>
+              <a:ext uri="{FF2B5EF4-FFF2-40B4-BE49-F238E27FC236}">
+                <a16:creationId xmlns:a16="http://schemas.microsoft.com/office/drawing/2014/main" id="{509255BE-D866-6F4C-1785-B44C4C921F5A}"/>
+              </a:ext>
+            </a:extLst>
+          </p:cNvPr>
           <p:cNvSpPr>
             <a:spLocks noGrp="1"/>
           </p:cNvSpPr>
@@ -1347,14 +1391,20 @@
           <a:p>
             <a:r>
               <a:rPr lang="pt-BR"/>
-              <a:t>Aqui, detalharemos alguns exemplos de requisitos funcionais, como 'O sistema deve permitir que o usuário faça login com credenciais válidas' e 'O sistema deve gerar relatórios mensais de vendas'. Estes requisitos são cruciais para orientar o desenvolvimento do sistema.</a:t>
-            </a:r>
-          </a:p>
-        </p:txBody>
-      </p:sp>
-      <p:sp>
-        <p:nvSpPr>
-          <p:cNvPr id="4" name="Espaço Reservado para Número de Slide 3"/>
+              <a:t>O Diagrama Entidade-Relacionamento (DER) é uma ferramenta visual que descreve a estrutura do banco de dados do sistema. Ele ilustra as principais entidades, seus atributos e os relacionamentos entre elas, ajudando a entender a lógica do banco de dados.</a:t>
+            </a:r>
+          </a:p>
+        </p:txBody>
+      </p:sp>
+      <p:sp>
+        <p:nvSpPr>
+          <p:cNvPr id="4" name="Espaço Reservado para Número de Slide 3">
+            <a:extLst>
+              <a:ext uri="{FF2B5EF4-FFF2-40B4-BE49-F238E27FC236}">
+                <a16:creationId xmlns:a16="http://schemas.microsoft.com/office/drawing/2014/main" id="{9733254D-078E-0492-BCD8-F2990DC2CCFA}"/>
+              </a:ext>
+            </a:extLst>
+          </p:cNvPr>
           <p:cNvSpPr>
             <a:spLocks noGrp="1"/>
           </p:cNvSpPr>
@@ -1378,7 +1428,7 @@
     </p:spTree>
     <p:extLst>
       <p:ext uri="{BB962C8B-B14F-4D97-AF65-F5344CB8AC3E}">
-        <p14:creationId xmlns:p14="http://schemas.microsoft.com/office/powerpoint/2010/main" val="3441075504"/>
+        <p14:creationId xmlns:p14="http://schemas.microsoft.com/office/powerpoint/2010/main" val="3456966241"/>
       </p:ext>
     </p:extLst>
   </p:cSld>
@@ -1434,7 +1484,7 @@
           <a:p>
             <a:r>
               <a:rPr lang="pt-BR"/>
-              <a:t>Aqui, detalharemos alguns exemplos de requisitos funcionais, como 'O sistema deve permitir que o usuário faça login com credenciais válidas' e 'O sistema deve gerar relatórios mensais de vendas'. Estes requisitos são cruciais para orientar o desenvolvimento do sistema.</a:t>
+              <a:t>Os requisitos funcionais definem as ações que o sistema deve ser capaz de realizar. Neste slide, listaremos os principais requisitos funcionais, incluindo funções como cadastro de usuários, geração de relatórios e consulta de dados.</a:t>
             </a:r>
           </a:p>
         </p:txBody>
@@ -1465,7 +1515,7 @@
     </p:spTree>
     <p:extLst>
       <p:ext uri="{BB962C8B-B14F-4D97-AF65-F5344CB8AC3E}">
-        <p14:creationId xmlns:p14="http://schemas.microsoft.com/office/powerpoint/2010/main" val="1244176758"/>
+        <p14:creationId xmlns:p14="http://schemas.microsoft.com/office/powerpoint/2010/main" val="3164768469"/>
       </p:ext>
     </p:extLst>
   </p:cSld>
@@ -1521,7 +1571,7 @@
           <a:p>
             <a:r>
               <a:rPr lang="pt-BR"/>
-              <a:t>Os requisitos não funcionais definem as características do sistema, como desempenho, segurança e usabilidade. Neste slide, discutiremos os principais requisitos não funcionais que o sistema deve atender.</a:t>
+              <a:t>Aqui, detalharemos alguns exemplos de requisitos funcionais, como 'O sistema deve permitir que o usuário faça login com credenciais válidas' e 'O sistema deve gerar relatórios mensais de vendas'. Estes requisitos são cruciais para orientar o desenvolvimento do sistema.</a:t>
             </a:r>
           </a:p>
         </p:txBody>
@@ -1552,7 +1602,7 @@
     </p:spTree>
     <p:extLst>
       <p:ext uri="{BB962C8B-B14F-4D97-AF65-F5344CB8AC3E}">
-        <p14:creationId xmlns:p14="http://schemas.microsoft.com/office/powerpoint/2010/main" val="3553580278"/>
+        <p14:creationId xmlns:p14="http://schemas.microsoft.com/office/powerpoint/2010/main" val="3441075504"/>
       </p:ext>
     </p:extLst>
   </p:cSld>
@@ -1640,6 +1690,180 @@
     <p:extLst>
       <p:ext uri="{BB962C8B-B14F-4D97-AF65-F5344CB8AC3E}">
         <p14:creationId xmlns:p14="http://schemas.microsoft.com/office/powerpoint/2010/main" val="1972842961"/>
+      </p:ext>
+    </p:extLst>
+  </p:cSld>
+  <p:clrMapOvr>
+    <a:masterClrMapping/>
+  </p:clrMapOvr>
+</p:notes>
+</file>
+
+<file path=ppt/notesSlides/notesSlide20.xml><?xml version="1.0" encoding="utf-8"?>
+<p:notes xmlns:a="http://schemas.openxmlformats.org/drawingml/2006/main" xmlns:r="http://schemas.openxmlformats.org/officeDocument/2006/relationships" xmlns:p="http://schemas.openxmlformats.org/presentationml/2006/main">
+  <p:cSld>
+    <p:spTree>
+      <p:nvGrpSpPr>
+        <p:cNvPr id="1" name=""/>
+        <p:cNvGrpSpPr/>
+        <p:nvPr/>
+      </p:nvGrpSpPr>
+      <p:grpSpPr>
+        <a:xfrm>
+          <a:off x="0" y="0"/>
+          <a:ext cx="0" cy="0"/>
+          <a:chOff x="0" y="0"/>
+          <a:chExt cx="0" cy="0"/>
+        </a:xfrm>
+      </p:grpSpPr>
+      <p:sp>
+        <p:nvSpPr>
+          <p:cNvPr id="2" name="Espaço Reservado para Imagem de Slide 1"/>
+          <p:cNvSpPr>
+            <a:spLocks noGrp="1" noRot="1" noChangeAspect="1"/>
+          </p:cNvSpPr>
+          <p:nvPr>
+            <p:ph type="sldImg"/>
+          </p:nvPr>
+        </p:nvSpPr>
+        <p:spPr/>
+      </p:sp>
+      <p:sp>
+        <p:nvSpPr>
+          <p:cNvPr id="3" name="Espaço Reservado para Anotações 2"/>
+          <p:cNvSpPr>
+            <a:spLocks noGrp="1"/>
+          </p:cNvSpPr>
+          <p:nvPr>
+            <p:ph type="body" idx="1"/>
+          </p:nvPr>
+        </p:nvSpPr>
+        <p:spPr/>
+        <p:txBody>
+          <a:bodyPr/>
+          <a:lstStyle/>
+          <a:p>
+            <a:r>
+              <a:rPr lang="pt-BR"/>
+              <a:t>Aqui, detalharemos alguns exemplos de requisitos funcionais, como 'O sistema deve permitir que o usuário faça login com credenciais válidas' e 'O sistema deve gerar relatórios mensais de vendas'. Estes requisitos são cruciais para orientar o desenvolvimento do sistema.</a:t>
+            </a:r>
+          </a:p>
+        </p:txBody>
+      </p:sp>
+      <p:sp>
+        <p:nvSpPr>
+          <p:cNvPr id="4" name="Espaço Reservado para Número de Slide 3"/>
+          <p:cNvSpPr>
+            <a:spLocks noGrp="1"/>
+          </p:cNvSpPr>
+          <p:nvPr>
+            <p:ph type="sldNum" sz="quarter" idx="5"/>
+          </p:nvPr>
+        </p:nvSpPr>
+        <p:spPr/>
+        <p:txBody>
+          <a:bodyPr/>
+          <a:lstStyle/>
+          <a:p>
+            <a:fld id="{92E3E85D-1FC8-4645-A278-0F485466CD94}" type="slidenum">
+              <a:rPr lang="pt-BR" smtClean="0"/>
+              <a:t>20</a:t>
+            </a:fld>
+            <a:endParaRPr lang="pt-BR"/>
+          </a:p>
+        </p:txBody>
+      </p:sp>
+    </p:spTree>
+    <p:extLst>
+      <p:ext uri="{BB962C8B-B14F-4D97-AF65-F5344CB8AC3E}">
+        <p14:creationId xmlns:p14="http://schemas.microsoft.com/office/powerpoint/2010/main" val="1244176758"/>
+      </p:ext>
+    </p:extLst>
+  </p:cSld>
+  <p:clrMapOvr>
+    <a:masterClrMapping/>
+  </p:clrMapOvr>
+</p:notes>
+</file>
+
+<file path=ppt/notesSlides/notesSlide21.xml><?xml version="1.0" encoding="utf-8"?>
+<p:notes xmlns:a="http://schemas.openxmlformats.org/drawingml/2006/main" xmlns:r="http://schemas.openxmlformats.org/officeDocument/2006/relationships" xmlns:p="http://schemas.openxmlformats.org/presentationml/2006/main">
+  <p:cSld>
+    <p:spTree>
+      <p:nvGrpSpPr>
+        <p:cNvPr id="1" name=""/>
+        <p:cNvGrpSpPr/>
+        <p:nvPr/>
+      </p:nvGrpSpPr>
+      <p:grpSpPr>
+        <a:xfrm>
+          <a:off x="0" y="0"/>
+          <a:ext cx="0" cy="0"/>
+          <a:chOff x="0" y="0"/>
+          <a:chExt cx="0" cy="0"/>
+        </a:xfrm>
+      </p:grpSpPr>
+      <p:sp>
+        <p:nvSpPr>
+          <p:cNvPr id="2" name="Espaço Reservado para Imagem de Slide 1"/>
+          <p:cNvSpPr>
+            <a:spLocks noGrp="1" noRot="1" noChangeAspect="1"/>
+          </p:cNvSpPr>
+          <p:nvPr>
+            <p:ph type="sldImg"/>
+          </p:nvPr>
+        </p:nvSpPr>
+        <p:spPr/>
+      </p:sp>
+      <p:sp>
+        <p:nvSpPr>
+          <p:cNvPr id="3" name="Espaço Reservado para Anotações 2"/>
+          <p:cNvSpPr>
+            <a:spLocks noGrp="1"/>
+          </p:cNvSpPr>
+          <p:nvPr>
+            <p:ph type="body" idx="1"/>
+          </p:nvPr>
+        </p:nvSpPr>
+        <p:spPr/>
+        <p:txBody>
+          <a:bodyPr/>
+          <a:lstStyle/>
+          <a:p>
+            <a:r>
+              <a:rPr lang="pt-BR"/>
+              <a:t>Os requisitos não funcionais definem as características do sistema, como desempenho, segurança e usabilidade. Neste slide, discutiremos os principais requisitos não funcionais que o sistema deve atender.</a:t>
+            </a:r>
+          </a:p>
+        </p:txBody>
+      </p:sp>
+      <p:sp>
+        <p:nvSpPr>
+          <p:cNvPr id="4" name="Espaço Reservado para Número de Slide 3"/>
+          <p:cNvSpPr>
+            <a:spLocks noGrp="1"/>
+          </p:cNvSpPr>
+          <p:nvPr>
+            <p:ph type="sldNum" sz="quarter" idx="5"/>
+          </p:nvPr>
+        </p:nvSpPr>
+        <p:spPr/>
+        <p:txBody>
+          <a:bodyPr/>
+          <a:lstStyle/>
+          <a:p>
+            <a:fld id="{92E3E85D-1FC8-4645-A278-0F485466CD94}" type="slidenum">
+              <a:rPr lang="pt-BR" smtClean="0"/>
+              <a:t>21</a:t>
+            </a:fld>
+            <a:endParaRPr lang="pt-BR"/>
+          </a:p>
+        </p:txBody>
+      </p:sp>
+    </p:spTree>
+    <p:extLst>
+      <p:ext uri="{BB962C8B-B14F-4D97-AF65-F5344CB8AC3E}">
+        <p14:creationId xmlns:p14="http://schemas.microsoft.com/office/powerpoint/2010/main" val="3553580278"/>
       </p:ext>
     </p:extLst>
   </p:cSld>
@@ -2555,7 +2779,7 @@
           <a:p>
             <a:fld id="{C128FA71-3A18-48C0-980F-4B68F7F63042}" type="datetime1">
               <a:rPr lang="en-US" smtClean="0"/>
-              <a:t>1/22/2025</a:t>
+              <a:t>1/27/2025</a:t>
             </a:fld>
             <a:endParaRPr lang="en-US"/>
           </a:p>
@@ -2763,7 +2987,7 @@
           <a:p>
             <a:fld id="{7104EDB3-C0E8-45F8-9E1D-1B6C8D1880C0}" type="datetime1">
               <a:rPr lang="en-US" smtClean="0"/>
-              <a:t>1/22/2025</a:t>
+              <a:t>1/27/2025</a:t>
             </a:fld>
             <a:endParaRPr lang="en-US"/>
           </a:p>
@@ -2973,7 +3197,7 @@
           <a:p>
             <a:fld id="{9CF0EC4B-54ED-4041-B552-9BA760FA3DBA}" type="datetime1">
               <a:rPr lang="en-US" smtClean="0"/>
-              <a:t>1/22/2025</a:t>
+              <a:t>1/27/2025</a:t>
             </a:fld>
             <a:endParaRPr lang="en-US"/>
           </a:p>
@@ -3171,7 +3395,7 @@
           <a:p>
             <a:fld id="{51C1210E-201E-4473-82AC-2466F5386C38}" type="datetime1">
               <a:rPr lang="en-US" smtClean="0"/>
-              <a:t>1/22/2025</a:t>
+              <a:t>1/27/2025</a:t>
             </a:fld>
             <a:endParaRPr lang="en-US"/>
           </a:p>
@@ -3449,7 +3673,7 @@
           <a:p>
             <a:fld id="{B01EA198-6CAB-4B8F-B93F-1F9C8C4B6CE7}" type="datetime1">
               <a:rPr lang="en-US" smtClean="0"/>
-              <a:t>1/22/2025</a:t>
+              <a:t>1/27/2025</a:t>
             </a:fld>
             <a:endParaRPr lang="en-US"/>
           </a:p>
@@ -3721,7 +3945,7 @@
           <a:p>
             <a:fld id="{CA06041F-4525-44D5-AA4F-332294BF1F56}" type="datetime1">
               <a:rPr lang="en-US" smtClean="0"/>
-              <a:t>1/22/2025</a:t>
+              <a:t>1/27/2025</a:t>
             </a:fld>
             <a:endParaRPr lang="en-US"/>
           </a:p>
@@ -4145,7 +4369,7 @@
           <a:p>
             <a:fld id="{F9557091-BBDF-4EB9-BA6B-2BB67AC4FC0F}" type="datetime1">
               <a:rPr lang="en-US" smtClean="0"/>
-              <a:t>1/22/2025</a:t>
+              <a:t>1/27/2025</a:t>
             </a:fld>
             <a:endParaRPr lang="en-US"/>
           </a:p>
@@ -4286,7 +4510,7 @@
           <a:p>
             <a:fld id="{2D6B226B-77A6-410C-9796-083F278E0125}" type="datetime1">
               <a:rPr lang="en-US" smtClean="0"/>
-              <a:t>1/22/2025</a:t>
+              <a:t>1/27/2025</a:t>
             </a:fld>
             <a:endParaRPr lang="en-US"/>
           </a:p>
@@ -4399,7 +4623,7 @@
           <a:p>
             <a:fld id="{A23A578B-D289-4C40-8593-3D356C49DA58}" type="datetime1">
               <a:rPr lang="en-US" smtClean="0"/>
-              <a:t>1/22/2025</a:t>
+              <a:t>1/27/2025</a:t>
             </a:fld>
             <a:endParaRPr lang="en-US"/>
           </a:p>
@@ -4718,7 +4942,7 @@
           <a:p>
             <a:fld id="{713DFAE3-14DB-48A7-A80F-80DDB072CE3D}" type="datetime1">
               <a:rPr lang="en-US" smtClean="0"/>
-              <a:t>1/22/2025</a:t>
+              <a:t>1/27/2025</a:t>
             </a:fld>
             <a:endParaRPr lang="en-US"/>
           </a:p>
@@ -5012,7 +5236,7 @@
           <a:p>
             <a:fld id="{92C5EAEF-6478-4102-8F5D-A5FE9FC97ACB}" type="datetime1">
               <a:rPr lang="en-US" smtClean="0"/>
-              <a:t>1/22/2025</a:t>
+              <a:t>1/27/2025</a:t>
             </a:fld>
             <a:endParaRPr lang="en-US"/>
           </a:p>
@@ -5253,7 +5477,7 @@
           <a:p>
             <a:fld id="{67F45AC6-C491-4585-A584-9CE2AF7D5500}" type="datetime1">
               <a:rPr lang="en-US" smtClean="0"/>
-              <a:t>1/22/2025</a:t>
+              <a:t>1/27/2025</a:t>
             </a:fld>
             <a:endParaRPr lang="en-US"/>
           </a:p>
@@ -5683,7 +5907,7 @@
                 <a16:creationId xmlns:a16="http://schemas.microsoft.com/office/drawing/2014/main" id="{6E448DB1-4196-18A6-15DA-C72635C1B11E}"/>
               </a:ext>
               <a:ext uri="{C183D7F6-B498-43B3-948B-1728B52AA6E4}">
-                <adec:decorative xmlns="" xmlns:adec="http://schemas.microsoft.com/office/drawing/2017/decorative" val="1"/>
+                <adec:decorative xmlns:adec="http://schemas.microsoft.com/office/drawing/2017/decorative" xmlns="" val="1"/>
               </a:ext>
             </a:extLst>
           </p:cNvPr>
@@ -5791,7 +6015,7 @@
                 <a16:creationId xmlns:a16="http://schemas.microsoft.com/office/drawing/2014/main" id="{76A10D8F-D463-70E5-239B-17AD65EF433D}"/>
               </a:ext>
               <a:ext uri="{C183D7F6-B498-43B3-948B-1728B52AA6E4}">
-                <adec:decorative xmlns="" xmlns:adec="http://schemas.microsoft.com/office/drawing/2017/decorative" val="1"/>
+                <adec:decorative xmlns:adec="http://schemas.microsoft.com/office/drawing/2017/decorative" xmlns="" val="1"/>
               </a:ext>
             </a:extLst>
           </p:cNvPr>
@@ -6252,7 +6476,7 @@
                 <a16:creationId xmlns:a16="http://schemas.microsoft.com/office/drawing/2014/main" id="{74EA76C7-8C08-E029-0E79-750B71C94A62}"/>
               </a:ext>
               <a:ext uri="{C183D7F6-B498-43B3-948B-1728B52AA6E4}">
-                <adec:decorative xmlns="" xmlns:adec="http://schemas.microsoft.com/office/drawing/2017/decorative" val="1"/>
+                <adec:decorative xmlns:adec="http://schemas.microsoft.com/office/drawing/2017/decorative" xmlns="" val="1"/>
               </a:ext>
             </a:extLst>
           </p:cNvPr>
@@ -6391,7 +6615,7 @@
             <p:ph sz="half" idx="2"/>
             <p:extLst>
               <p:ext uri="{E7BDC344-281C-4309-B0C6-D0EE65EED2A8}">
-                <p202:designPr xmlns="" xmlns:p202="http://schemas.microsoft.com/office/powerpoint/2020/02/main">
+                <p202:designPr xmlns:p202="http://schemas.microsoft.com/office/powerpoint/2020/02/main" xmlns="">
                   <p202:designTagLst>
                     <p202:designTag name="ARCH:1:CLS" val="InformationBlock"/>
                     <p202:designTag name="ARCH:1:VSVAR" val="TitledTextBox"/>
@@ -6687,7 +6911,7 @@
                 <a16:creationId xmlns:a16="http://schemas.microsoft.com/office/drawing/2014/main" id="{74EA76C7-8C08-E029-0E79-750B71C94A62}"/>
               </a:ext>
               <a:ext uri="{C183D7F6-B498-43B3-948B-1728B52AA6E4}">
-                <adec:decorative xmlns="" xmlns:adec="http://schemas.microsoft.com/office/drawing/2017/decorative" val="1"/>
+                <adec:decorative xmlns:adec="http://schemas.microsoft.com/office/drawing/2017/decorative" xmlns="" val="1"/>
               </a:ext>
             </a:extLst>
           </p:cNvPr>
@@ -7364,7 +7588,7 @@
                 <a16:creationId xmlns:a16="http://schemas.microsoft.com/office/drawing/2014/main" id="{5E8D3B17-7638-DFD3-18E4-8A6D611749CF}"/>
               </a:ext>
               <a:ext uri="{C183D7F6-B498-43B3-948B-1728B52AA6E4}">
-                <adec:decorative xmlns="" xmlns:adec="http://schemas.microsoft.com/office/drawing/2017/decorative" val="1"/>
+                <adec:decorative xmlns:adec="http://schemas.microsoft.com/office/drawing/2017/decorative" xmlns="" val="1"/>
               </a:ext>
             </a:extLst>
           </p:cNvPr>
@@ -7799,7 +8023,7 @@
                 <a16:creationId xmlns:a16="http://schemas.microsoft.com/office/drawing/2014/main" id="{B8ADE68D-5E75-5D63-4B8C-6BEFCE9D06E3}"/>
               </a:ext>
               <a:ext uri="{C183D7F6-B498-43B3-948B-1728B52AA6E4}">
-                <adec:decorative xmlns="" xmlns:adec="http://schemas.microsoft.com/office/drawing/2017/decorative" val="1"/>
+                <adec:decorative xmlns:adec="http://schemas.microsoft.com/office/drawing/2017/decorative" xmlns="" val="1"/>
               </a:ext>
             </a:extLst>
           </p:cNvPr>
@@ -7885,7 +8109,7 @@
         </p:nvSpPr>
         <p:spPr>
           <a:xfrm>
-            <a:off x="468503" y="-214884"/>
+            <a:off x="0" y="-977157"/>
             <a:ext cx="10517176" cy="1527048"/>
           </a:xfrm>
         </p:spPr>
@@ -7915,299 +8139,1097 @@
           </a:p>
         </p:txBody>
       </p:sp>
-      <p:sp>
-        <p:nvSpPr>
-          <p:cNvPr id="6" name="Retângulo 5">
-            <a:extLst>
-              <a:ext uri="{FF2B5EF4-FFF2-40B4-BE49-F238E27FC236}">
-                <a16:creationId xmlns:a16="http://schemas.microsoft.com/office/drawing/2014/main" id="{39E8B432-F54E-ED48-B2A1-9E05B0A0AC60}"/>
-              </a:ext>
-            </a:extLst>
-          </p:cNvPr>
-          <p:cNvSpPr/>
+      <p:grpSp>
+        <p:nvGrpSpPr>
+          <p:cNvPr id="50" name="Agrupar 49"/>
+          <p:cNvGrpSpPr/>
           <p:nvPr/>
-        </p:nvSpPr>
-        <p:spPr>
+        </p:nvGrpSpPr>
+        <p:grpSpPr>
           <a:xfrm>
-            <a:off x="3442951" y="4073931"/>
-            <a:ext cx="1687133" cy="888642"/>
+            <a:off x="137979" y="1218152"/>
+            <a:ext cx="11783131" cy="5202581"/>
+            <a:chOff x="111346" y="729880"/>
+            <a:chExt cx="11783131" cy="5202581"/>
           </a:xfrm>
-          <a:prstGeom prst="rect">
-            <a:avLst/>
-          </a:prstGeom>
-        </p:spPr>
-        <p:style>
-          <a:lnRef idx="2">
-            <a:schemeClr val="accent1">
-              <a:shade val="15000"/>
-            </a:schemeClr>
-          </a:lnRef>
-          <a:fillRef idx="1">
-            <a:schemeClr val="accent1"/>
-          </a:fillRef>
-          <a:effectRef idx="0">
-            <a:schemeClr val="accent1"/>
-          </a:effectRef>
-          <a:fontRef idx="minor">
-            <a:schemeClr val="lt1"/>
-          </a:fontRef>
-        </p:style>
-        <p:txBody>
-          <a:bodyPr rtlCol="0" anchor="ctr"/>
-          <a:lstStyle/>
-          <a:p>
-            <a:pPr algn="ctr"/>
-            <a:r>
-              <a:rPr lang="pt-BR" dirty="0"/>
-              <a:t>PRODUTO</a:t>
-            </a:r>
-          </a:p>
-        </p:txBody>
-      </p:sp>
-      <p:sp>
-        <p:nvSpPr>
-          <p:cNvPr id="7" name="Retângulo 6">
-            <a:extLst>
-              <a:ext uri="{FF2B5EF4-FFF2-40B4-BE49-F238E27FC236}">
-                <a16:creationId xmlns:a16="http://schemas.microsoft.com/office/drawing/2014/main" id="{D6DFE2EF-772F-35BA-4CA6-6616D0425D5D}"/>
-              </a:ext>
-            </a:extLst>
-          </p:cNvPr>
-          <p:cNvSpPr/>
-          <p:nvPr/>
-        </p:nvSpPr>
-        <p:spPr>
-          <a:xfrm>
-            <a:off x="1229932" y="1804037"/>
-            <a:ext cx="1687133" cy="888642"/>
-          </a:xfrm>
-          <a:prstGeom prst="rect">
-            <a:avLst/>
-          </a:prstGeom>
-        </p:spPr>
-        <p:style>
-          <a:lnRef idx="2">
-            <a:schemeClr val="accent1">
-              <a:shade val="15000"/>
-            </a:schemeClr>
-          </a:lnRef>
-          <a:fillRef idx="1">
-            <a:schemeClr val="accent1"/>
-          </a:fillRef>
-          <a:effectRef idx="0">
-            <a:schemeClr val="accent1"/>
-          </a:effectRef>
-          <a:fontRef idx="minor">
-            <a:schemeClr val="lt1"/>
-          </a:fontRef>
-        </p:style>
-        <p:txBody>
-          <a:bodyPr rtlCol="0" anchor="ctr"/>
-          <a:lstStyle/>
-          <a:p>
-            <a:pPr algn="ctr"/>
-            <a:r>
-              <a:rPr lang="pt-BR" dirty="0"/>
-              <a:t>CATEGORIA</a:t>
-            </a:r>
-          </a:p>
-        </p:txBody>
-      </p:sp>
-      <p:sp>
-        <p:nvSpPr>
-          <p:cNvPr id="9" name="Losango 8">
-            <a:extLst>
-              <a:ext uri="{FF2B5EF4-FFF2-40B4-BE49-F238E27FC236}">
-                <a16:creationId xmlns:a16="http://schemas.microsoft.com/office/drawing/2014/main" id="{A0589B58-71D4-387F-B6FD-C4BBFC5DFE56}"/>
-              </a:ext>
-            </a:extLst>
-          </p:cNvPr>
-          <p:cNvSpPr/>
-          <p:nvPr/>
-        </p:nvSpPr>
-        <p:spPr>
-          <a:xfrm>
-            <a:off x="1658156" y="4194300"/>
-            <a:ext cx="785611" cy="647904"/>
-          </a:xfrm>
-          <a:prstGeom prst="diamond">
-            <a:avLst/>
-          </a:prstGeom>
-        </p:spPr>
-        <p:style>
-          <a:lnRef idx="2">
-            <a:schemeClr val="accent1">
-              <a:shade val="15000"/>
-            </a:schemeClr>
-          </a:lnRef>
-          <a:fillRef idx="1">
-            <a:schemeClr val="accent1"/>
-          </a:fillRef>
-          <a:effectRef idx="0">
-            <a:schemeClr val="accent1"/>
-          </a:effectRef>
-          <a:fontRef idx="minor">
-            <a:schemeClr val="lt1"/>
-          </a:fontRef>
-        </p:style>
-        <p:txBody>
-          <a:bodyPr rtlCol="0" anchor="ctr"/>
-          <a:lstStyle/>
-          <a:p>
-            <a:pPr algn="ctr"/>
-            <a:endParaRPr lang="pt-BR" dirty="0"/>
-          </a:p>
-        </p:txBody>
-      </p:sp>
-      <p:cxnSp>
-        <p:nvCxnSpPr>
-          <p:cNvPr id="18" name="Conector de Seta Reta 17">
-            <a:extLst>
-              <a:ext uri="{FF2B5EF4-FFF2-40B4-BE49-F238E27FC236}">
-                <a16:creationId xmlns:a16="http://schemas.microsoft.com/office/drawing/2014/main" id="{C99F8BAD-9514-0635-F42A-11BDC57F2DF8}"/>
-              </a:ext>
-            </a:extLst>
-          </p:cNvPr>
-          <p:cNvCxnSpPr>
-            <a:stCxn id="9" idx="3"/>
-            <a:endCxn id="6" idx="1"/>
-          </p:cNvCxnSpPr>
-          <p:nvPr/>
-        </p:nvCxnSpPr>
-        <p:spPr>
-          <a:xfrm>
-            <a:off x="2443767" y="4518252"/>
-            <a:ext cx="999184" cy="0"/>
-          </a:xfrm>
-          <a:prstGeom prst="straightConnector1">
-            <a:avLst/>
-          </a:prstGeom>
-          <a:ln>
-            <a:tailEnd type="triangle"/>
-          </a:ln>
-        </p:spPr>
-        <p:style>
-          <a:lnRef idx="1">
-            <a:schemeClr val="accent1"/>
-          </a:lnRef>
-          <a:fillRef idx="0">
-            <a:schemeClr val="accent1"/>
-          </a:fillRef>
-          <a:effectRef idx="0">
-            <a:schemeClr val="accent1"/>
-          </a:effectRef>
-          <a:fontRef idx="minor">
-            <a:schemeClr val="tx1"/>
-          </a:fontRef>
-        </p:style>
-      </p:cxnSp>
-      <p:cxnSp>
-        <p:nvCxnSpPr>
-          <p:cNvPr id="19" name="Conector reto 18">
-            <a:extLst>
-              <a:ext uri="{FF2B5EF4-FFF2-40B4-BE49-F238E27FC236}">
-                <a16:creationId xmlns:a16="http://schemas.microsoft.com/office/drawing/2014/main" id="{6BF6B5B1-6280-4467-738C-9F23631C322C}"/>
-              </a:ext>
-            </a:extLst>
-          </p:cNvPr>
-          <p:cNvCxnSpPr/>
-          <p:nvPr/>
-        </p:nvCxnSpPr>
-        <p:spPr>
-          <a:xfrm flipH="1" flipV="1">
-            <a:off x="2050960" y="2678189"/>
-            <a:ext cx="1" cy="1501621"/>
-          </a:xfrm>
-          <a:prstGeom prst="line">
-            <a:avLst/>
-          </a:prstGeom>
-        </p:spPr>
-        <p:style>
-          <a:lnRef idx="1">
-            <a:schemeClr val="accent1"/>
-          </a:lnRef>
-          <a:fillRef idx="0">
-            <a:schemeClr val="accent1"/>
-          </a:fillRef>
-          <a:effectRef idx="0">
-            <a:schemeClr val="accent1"/>
-          </a:effectRef>
-          <a:fontRef idx="minor">
-            <a:schemeClr val="tx1"/>
-          </a:fontRef>
-        </p:style>
-      </p:cxnSp>
-      <p:sp>
-        <p:nvSpPr>
-          <p:cNvPr id="17" name="CaixaDeTexto 16">
-            <a:extLst>
-              <a:ext uri="{FF2B5EF4-FFF2-40B4-BE49-F238E27FC236}">
-                <a16:creationId xmlns:a16="http://schemas.microsoft.com/office/drawing/2014/main" id="{0B3999CC-C262-EF20-322E-845F60C54B47}"/>
-              </a:ext>
-            </a:extLst>
-          </p:cNvPr>
-          <p:cNvSpPr txBox="1"/>
-          <p:nvPr/>
-        </p:nvSpPr>
-        <p:spPr>
-          <a:xfrm>
-            <a:off x="1267494" y="2722897"/>
-            <a:ext cx="1931832" cy="369332"/>
-          </a:xfrm>
-          <a:prstGeom prst="rect">
-            <a:avLst/>
-          </a:prstGeom>
-          <a:noFill/>
-        </p:spPr>
-        <p:txBody>
-          <a:bodyPr wrap="square">
-            <a:spAutoFit/>
-          </a:bodyPr>
-          <a:lstStyle/>
-          <a:p>
-            <a:r>
-              <a:rPr lang="pt-BR" dirty="0" smtClean="0"/>
-              <a:t>1</a:t>
-            </a:r>
-            <a:endParaRPr lang="pt-BR" dirty="0"/>
-          </a:p>
-        </p:txBody>
-      </p:sp>
-      <p:sp>
-        <p:nvSpPr>
-          <p:cNvPr id="20" name="CaixaDeTexto 19">
-            <a:extLst>
-              <a:ext uri="{FF2B5EF4-FFF2-40B4-BE49-F238E27FC236}">
-                <a16:creationId xmlns:a16="http://schemas.microsoft.com/office/drawing/2014/main" id="{0B3999CC-C262-EF20-322E-845F60C54B47}"/>
-              </a:ext>
-            </a:extLst>
-          </p:cNvPr>
-          <p:cNvSpPr txBox="1"/>
-          <p:nvPr/>
-        </p:nvSpPr>
-        <p:spPr>
-          <a:xfrm>
-            <a:off x="2807056" y="4657538"/>
-            <a:ext cx="1931832" cy="369332"/>
-          </a:xfrm>
-          <a:prstGeom prst="rect">
-            <a:avLst/>
-          </a:prstGeom>
-          <a:noFill/>
-        </p:spPr>
-        <p:txBody>
-          <a:bodyPr wrap="square">
-            <a:spAutoFit/>
-          </a:bodyPr>
-          <a:lstStyle/>
-          <a:p>
-            <a:r>
-              <a:rPr lang="pt-BR" dirty="0"/>
-              <a:t>N</a:t>
-            </a:r>
-          </a:p>
-        </p:txBody>
-      </p:sp>
+        </p:grpSpPr>
+        <p:grpSp>
+          <p:nvGrpSpPr>
+            <p:cNvPr id="5" name="Agrupar 4"/>
+            <p:cNvGrpSpPr/>
+            <p:nvPr/>
+          </p:nvGrpSpPr>
+          <p:grpSpPr>
+            <a:xfrm>
+              <a:off x="111346" y="738717"/>
+              <a:ext cx="3802498" cy="3158536"/>
+              <a:chOff x="1229932" y="1804037"/>
+              <a:chExt cx="3802498" cy="3158536"/>
+            </a:xfrm>
+          </p:grpSpPr>
+          <p:sp>
+            <p:nvSpPr>
+              <p:cNvPr id="6" name="Retângulo 5">
+                <a:extLst>
+                  <a:ext uri="{FF2B5EF4-FFF2-40B4-BE49-F238E27FC236}">
+                    <a16:creationId xmlns:a16="http://schemas.microsoft.com/office/drawing/2014/main" id="{39E8B432-F54E-ED48-B2A1-9E05B0A0AC60}"/>
+                  </a:ext>
+                </a:extLst>
+              </p:cNvPr>
+              <p:cNvSpPr/>
+              <p:nvPr/>
+            </p:nvSpPr>
+            <p:spPr>
+              <a:xfrm>
+                <a:off x="3345297" y="4073931"/>
+                <a:ext cx="1687133" cy="888642"/>
+              </a:xfrm>
+              <a:prstGeom prst="rect">
+                <a:avLst/>
+              </a:prstGeom>
+            </p:spPr>
+            <p:style>
+              <a:lnRef idx="2">
+                <a:schemeClr val="accent1">
+                  <a:shade val="15000"/>
+                </a:schemeClr>
+              </a:lnRef>
+              <a:fillRef idx="1">
+                <a:schemeClr val="accent1"/>
+              </a:fillRef>
+              <a:effectRef idx="0">
+                <a:schemeClr val="accent1"/>
+              </a:effectRef>
+              <a:fontRef idx="minor">
+                <a:schemeClr val="lt1"/>
+              </a:fontRef>
+            </p:style>
+            <p:txBody>
+              <a:bodyPr rtlCol="0" anchor="ctr"/>
+              <a:lstStyle/>
+              <a:p>
+                <a:pPr algn="ctr"/>
+                <a:r>
+                  <a:rPr lang="pt-BR" dirty="0"/>
+                  <a:t>PRODUTO</a:t>
+                </a:r>
+              </a:p>
+            </p:txBody>
+          </p:sp>
+          <p:sp>
+            <p:nvSpPr>
+              <p:cNvPr id="7" name="Retângulo 6">
+                <a:extLst>
+                  <a:ext uri="{FF2B5EF4-FFF2-40B4-BE49-F238E27FC236}">
+                    <a16:creationId xmlns:a16="http://schemas.microsoft.com/office/drawing/2014/main" id="{D6DFE2EF-772F-35BA-4CA6-6616D0425D5D}"/>
+                  </a:ext>
+                </a:extLst>
+              </p:cNvPr>
+              <p:cNvSpPr/>
+              <p:nvPr/>
+            </p:nvSpPr>
+            <p:spPr>
+              <a:xfrm>
+                <a:off x="1229932" y="1804037"/>
+                <a:ext cx="1687133" cy="888642"/>
+              </a:xfrm>
+              <a:prstGeom prst="rect">
+                <a:avLst/>
+              </a:prstGeom>
+            </p:spPr>
+            <p:style>
+              <a:lnRef idx="2">
+                <a:schemeClr val="accent1">
+                  <a:shade val="15000"/>
+                </a:schemeClr>
+              </a:lnRef>
+              <a:fillRef idx="1">
+                <a:schemeClr val="accent1"/>
+              </a:fillRef>
+              <a:effectRef idx="0">
+                <a:schemeClr val="accent1"/>
+              </a:effectRef>
+              <a:fontRef idx="minor">
+                <a:schemeClr val="lt1"/>
+              </a:fontRef>
+            </p:style>
+            <p:txBody>
+              <a:bodyPr rtlCol="0" anchor="ctr"/>
+              <a:lstStyle/>
+              <a:p>
+                <a:pPr algn="ctr"/>
+                <a:r>
+                  <a:rPr lang="pt-BR" dirty="0"/>
+                  <a:t>CATEGORIA</a:t>
+                </a:r>
+              </a:p>
+            </p:txBody>
+          </p:sp>
+          <p:sp>
+            <p:nvSpPr>
+              <p:cNvPr id="9" name="Losango 8">
+                <a:extLst>
+                  <a:ext uri="{FF2B5EF4-FFF2-40B4-BE49-F238E27FC236}">
+                    <a16:creationId xmlns:a16="http://schemas.microsoft.com/office/drawing/2014/main" id="{A0589B58-71D4-387F-B6FD-C4BBFC5DFE56}"/>
+                  </a:ext>
+                </a:extLst>
+              </p:cNvPr>
+              <p:cNvSpPr/>
+              <p:nvPr/>
+            </p:nvSpPr>
+            <p:spPr>
+              <a:xfrm>
+                <a:off x="1658156" y="4194300"/>
+                <a:ext cx="785611" cy="647904"/>
+              </a:xfrm>
+              <a:prstGeom prst="diamond">
+                <a:avLst/>
+              </a:prstGeom>
+            </p:spPr>
+            <p:style>
+              <a:lnRef idx="2">
+                <a:schemeClr val="accent1">
+                  <a:shade val="15000"/>
+                </a:schemeClr>
+              </a:lnRef>
+              <a:fillRef idx="1">
+                <a:schemeClr val="accent1"/>
+              </a:fillRef>
+              <a:effectRef idx="0">
+                <a:schemeClr val="accent1"/>
+              </a:effectRef>
+              <a:fontRef idx="minor">
+                <a:schemeClr val="lt1"/>
+              </a:fontRef>
+            </p:style>
+            <p:txBody>
+              <a:bodyPr rtlCol="0" anchor="ctr"/>
+              <a:lstStyle/>
+              <a:p>
+                <a:pPr algn="ctr"/>
+                <a:endParaRPr lang="pt-BR" dirty="0"/>
+              </a:p>
+            </p:txBody>
+          </p:sp>
+          <p:cxnSp>
+            <p:nvCxnSpPr>
+              <p:cNvPr id="18" name="Conector de Seta Reta 17">
+                <a:extLst>
+                  <a:ext uri="{FF2B5EF4-FFF2-40B4-BE49-F238E27FC236}">
+                    <a16:creationId xmlns:a16="http://schemas.microsoft.com/office/drawing/2014/main" id="{C99F8BAD-9514-0635-F42A-11BDC57F2DF8}"/>
+                  </a:ext>
+                </a:extLst>
+              </p:cNvPr>
+              <p:cNvCxnSpPr>
+                <a:stCxn id="9" idx="3"/>
+                <a:endCxn id="6" idx="1"/>
+              </p:cNvCxnSpPr>
+              <p:nvPr/>
+            </p:nvCxnSpPr>
+            <p:spPr>
+              <a:xfrm>
+                <a:off x="2443767" y="4518252"/>
+                <a:ext cx="901530" cy="0"/>
+              </a:xfrm>
+              <a:prstGeom prst="straightConnector1">
+                <a:avLst/>
+              </a:prstGeom>
+              <a:ln>
+                <a:tailEnd type="triangle"/>
+              </a:ln>
+            </p:spPr>
+            <p:style>
+              <a:lnRef idx="1">
+                <a:schemeClr val="accent1"/>
+              </a:lnRef>
+              <a:fillRef idx="0">
+                <a:schemeClr val="accent1"/>
+              </a:fillRef>
+              <a:effectRef idx="0">
+                <a:schemeClr val="accent1"/>
+              </a:effectRef>
+              <a:fontRef idx="minor">
+                <a:schemeClr val="tx1"/>
+              </a:fontRef>
+            </p:style>
+          </p:cxnSp>
+          <p:cxnSp>
+            <p:nvCxnSpPr>
+              <p:cNvPr id="19" name="Conector reto 18">
+                <a:extLst>
+                  <a:ext uri="{FF2B5EF4-FFF2-40B4-BE49-F238E27FC236}">
+                    <a16:creationId xmlns:a16="http://schemas.microsoft.com/office/drawing/2014/main" id="{6BF6B5B1-6280-4467-738C-9F23631C322C}"/>
+                  </a:ext>
+                </a:extLst>
+              </p:cNvPr>
+              <p:cNvCxnSpPr/>
+              <p:nvPr/>
+            </p:nvCxnSpPr>
+            <p:spPr>
+              <a:xfrm flipH="1" flipV="1">
+                <a:off x="2050960" y="2678189"/>
+                <a:ext cx="1" cy="1501621"/>
+              </a:xfrm>
+              <a:prstGeom prst="line">
+                <a:avLst/>
+              </a:prstGeom>
+            </p:spPr>
+            <p:style>
+              <a:lnRef idx="1">
+                <a:schemeClr val="accent1"/>
+              </a:lnRef>
+              <a:fillRef idx="0">
+                <a:schemeClr val="accent1"/>
+              </a:fillRef>
+              <a:effectRef idx="0">
+                <a:schemeClr val="accent1"/>
+              </a:effectRef>
+              <a:fontRef idx="minor">
+                <a:schemeClr val="tx1"/>
+              </a:fontRef>
+            </p:style>
+          </p:cxnSp>
+          <p:sp>
+            <p:nvSpPr>
+              <p:cNvPr id="17" name="CaixaDeTexto 16">
+                <a:extLst>
+                  <a:ext uri="{FF2B5EF4-FFF2-40B4-BE49-F238E27FC236}">
+                    <a16:creationId xmlns:a16="http://schemas.microsoft.com/office/drawing/2014/main" id="{0B3999CC-C262-EF20-322E-845F60C54B47}"/>
+                  </a:ext>
+                </a:extLst>
+              </p:cNvPr>
+              <p:cNvSpPr txBox="1"/>
+              <p:nvPr/>
+            </p:nvSpPr>
+            <p:spPr>
+              <a:xfrm>
+                <a:off x="1267494" y="2722897"/>
+                <a:ext cx="1931832" cy="369332"/>
+              </a:xfrm>
+              <a:prstGeom prst="rect">
+                <a:avLst/>
+              </a:prstGeom>
+              <a:noFill/>
+            </p:spPr>
+            <p:txBody>
+              <a:bodyPr wrap="square">
+                <a:spAutoFit/>
+              </a:bodyPr>
+              <a:lstStyle/>
+              <a:p>
+                <a:r>
+                  <a:rPr lang="pt-BR" dirty="0" smtClean="0"/>
+                  <a:t>1</a:t>
+                </a:r>
+                <a:endParaRPr lang="pt-BR" dirty="0"/>
+              </a:p>
+            </p:txBody>
+          </p:sp>
+          <p:sp>
+            <p:nvSpPr>
+              <p:cNvPr id="20" name="CaixaDeTexto 19">
+                <a:extLst>
+                  <a:ext uri="{FF2B5EF4-FFF2-40B4-BE49-F238E27FC236}">
+                    <a16:creationId xmlns:a16="http://schemas.microsoft.com/office/drawing/2014/main" id="{0B3999CC-C262-EF20-322E-845F60C54B47}"/>
+                  </a:ext>
+                </a:extLst>
+              </p:cNvPr>
+              <p:cNvSpPr txBox="1"/>
+              <p:nvPr/>
+            </p:nvSpPr>
+            <p:spPr>
+              <a:xfrm>
+                <a:off x="2915480" y="4570551"/>
+                <a:ext cx="1931832" cy="369332"/>
+              </a:xfrm>
+              <a:prstGeom prst="rect">
+                <a:avLst/>
+              </a:prstGeom>
+              <a:noFill/>
+            </p:spPr>
+            <p:txBody>
+              <a:bodyPr wrap="square">
+                <a:spAutoFit/>
+              </a:bodyPr>
+              <a:lstStyle/>
+              <a:p>
+                <a:r>
+                  <a:rPr lang="pt-BR" dirty="0"/>
+                  <a:t>N</a:t>
+                </a:r>
+              </a:p>
+            </p:txBody>
+          </p:sp>
+        </p:grpSp>
+        <p:sp>
+          <p:nvSpPr>
+            <p:cNvPr id="8" name="Retângulo 7"/>
+            <p:cNvSpPr/>
+            <p:nvPr/>
+          </p:nvSpPr>
+          <p:spPr>
+            <a:xfrm>
+              <a:off x="2059905" y="729880"/>
+              <a:ext cx="2020743" cy="896170"/>
+            </a:xfrm>
+            <a:prstGeom prst="rect">
+              <a:avLst/>
+            </a:prstGeom>
+          </p:spPr>
+          <p:style>
+            <a:lnRef idx="2">
+              <a:schemeClr val="accent1">
+                <a:shade val="50000"/>
+              </a:schemeClr>
+            </a:lnRef>
+            <a:fillRef idx="1">
+              <a:schemeClr val="accent1"/>
+            </a:fillRef>
+            <a:effectRef idx="0">
+              <a:schemeClr val="accent1"/>
+            </a:effectRef>
+            <a:fontRef idx="minor">
+              <a:schemeClr val="lt1"/>
+            </a:fontRef>
+          </p:style>
+          <p:txBody>
+            <a:bodyPr rtlCol="0" anchor="ctr"/>
+            <a:lstStyle/>
+            <a:p>
+              <a:pPr algn="ctr"/>
+              <a:r>
+                <a:rPr lang="pt-BR" dirty="0" smtClean="0"/>
+                <a:t>ITENSENTRADA</a:t>
+              </a:r>
+              <a:endParaRPr lang="pt-BR" dirty="0"/>
+            </a:p>
+          </p:txBody>
+        </p:sp>
+        <p:sp>
+          <p:nvSpPr>
+            <p:cNvPr id="23" name="Retângulo 22"/>
+            <p:cNvSpPr/>
+            <p:nvPr/>
+          </p:nvSpPr>
+          <p:spPr>
+            <a:xfrm>
+              <a:off x="2059904" y="5036291"/>
+              <a:ext cx="2020743" cy="896170"/>
+            </a:xfrm>
+            <a:prstGeom prst="rect">
+              <a:avLst/>
+            </a:prstGeom>
+          </p:spPr>
+          <p:style>
+            <a:lnRef idx="2">
+              <a:schemeClr val="accent1">
+                <a:shade val="50000"/>
+              </a:schemeClr>
+            </a:lnRef>
+            <a:fillRef idx="1">
+              <a:schemeClr val="accent1"/>
+            </a:fillRef>
+            <a:effectRef idx="0">
+              <a:schemeClr val="accent1"/>
+            </a:effectRef>
+            <a:fontRef idx="minor">
+              <a:schemeClr val="lt1"/>
+            </a:fontRef>
+          </p:style>
+          <p:txBody>
+            <a:bodyPr rtlCol="0" anchor="ctr"/>
+            <a:lstStyle/>
+            <a:p>
+              <a:pPr algn="ctr"/>
+              <a:r>
+                <a:rPr lang="pt-BR" dirty="0" smtClean="0"/>
+                <a:t>ITENSSAIDA</a:t>
+              </a:r>
+              <a:endParaRPr lang="pt-BR" dirty="0"/>
+            </a:p>
+          </p:txBody>
+        </p:sp>
+        <p:sp>
+          <p:nvSpPr>
+            <p:cNvPr id="24" name="Losango 23">
+              <a:extLst>
+                <a:ext uri="{FF2B5EF4-FFF2-40B4-BE49-F238E27FC236}">
+                  <a16:creationId xmlns:a16="http://schemas.microsoft.com/office/drawing/2014/main" id="{A0589B58-71D4-387F-B6FD-C4BBFC5DFE56}"/>
+                </a:ext>
+              </a:extLst>
+            </p:cNvPr>
+            <p:cNvSpPr/>
+            <p:nvPr/>
+          </p:nvSpPr>
+          <p:spPr>
+            <a:xfrm>
+              <a:off x="2677469" y="1963856"/>
+              <a:ext cx="785611" cy="647904"/>
+            </a:xfrm>
+            <a:prstGeom prst="diamond">
+              <a:avLst/>
+            </a:prstGeom>
+          </p:spPr>
+          <p:style>
+            <a:lnRef idx="2">
+              <a:schemeClr val="accent1">
+                <a:shade val="15000"/>
+              </a:schemeClr>
+            </a:lnRef>
+            <a:fillRef idx="1">
+              <a:schemeClr val="accent1"/>
+            </a:fillRef>
+            <a:effectRef idx="0">
+              <a:schemeClr val="accent1"/>
+            </a:effectRef>
+            <a:fontRef idx="minor">
+              <a:schemeClr val="lt1"/>
+            </a:fontRef>
+          </p:style>
+          <p:txBody>
+            <a:bodyPr rtlCol="0" anchor="ctr"/>
+            <a:lstStyle/>
+            <a:p>
+              <a:pPr algn="ctr"/>
+              <a:endParaRPr lang="pt-BR" dirty="0"/>
+            </a:p>
+          </p:txBody>
+        </p:sp>
+        <p:sp>
+          <p:nvSpPr>
+            <p:cNvPr id="27" name="Losango 26">
+              <a:extLst>
+                <a:ext uri="{FF2B5EF4-FFF2-40B4-BE49-F238E27FC236}">
+                  <a16:creationId xmlns:a16="http://schemas.microsoft.com/office/drawing/2014/main" id="{A0589B58-71D4-387F-B6FD-C4BBFC5DFE56}"/>
+                </a:ext>
+              </a:extLst>
+            </p:cNvPr>
+            <p:cNvSpPr/>
+            <p:nvPr/>
+          </p:nvSpPr>
+          <p:spPr>
+            <a:xfrm>
+              <a:off x="2677468" y="4154165"/>
+              <a:ext cx="785611" cy="647904"/>
+            </a:xfrm>
+            <a:prstGeom prst="diamond">
+              <a:avLst/>
+            </a:prstGeom>
+          </p:spPr>
+          <p:style>
+            <a:lnRef idx="2">
+              <a:schemeClr val="accent1">
+                <a:shade val="15000"/>
+              </a:schemeClr>
+            </a:lnRef>
+            <a:fillRef idx="1">
+              <a:schemeClr val="accent1"/>
+            </a:fillRef>
+            <a:effectRef idx="0">
+              <a:schemeClr val="accent1"/>
+            </a:effectRef>
+            <a:fontRef idx="minor">
+              <a:schemeClr val="lt1"/>
+            </a:fontRef>
+          </p:style>
+          <p:txBody>
+            <a:bodyPr rtlCol="0" anchor="ctr"/>
+            <a:lstStyle/>
+            <a:p>
+              <a:pPr algn="ctr"/>
+              <a:endParaRPr lang="pt-BR" dirty="0"/>
+            </a:p>
+          </p:txBody>
+        </p:sp>
+        <p:sp>
+          <p:nvSpPr>
+            <p:cNvPr id="28" name="Retângulo 27">
+              <a:extLst>
+                <a:ext uri="{FF2B5EF4-FFF2-40B4-BE49-F238E27FC236}">
+                  <a16:creationId xmlns:a16="http://schemas.microsoft.com/office/drawing/2014/main" id="{39E8B432-F54E-ED48-B2A1-9E05B0A0AC60}"/>
+                </a:ext>
+              </a:extLst>
+            </p:cNvPr>
+            <p:cNvSpPr/>
+            <p:nvPr/>
+          </p:nvSpPr>
+          <p:spPr>
+            <a:xfrm>
+              <a:off x="6140551" y="5036291"/>
+              <a:ext cx="1687133" cy="896170"/>
+            </a:xfrm>
+            <a:prstGeom prst="rect">
+              <a:avLst/>
+            </a:prstGeom>
+          </p:spPr>
+          <p:style>
+            <a:lnRef idx="2">
+              <a:schemeClr val="accent1">
+                <a:shade val="15000"/>
+              </a:schemeClr>
+            </a:lnRef>
+            <a:fillRef idx="1">
+              <a:schemeClr val="accent1"/>
+            </a:fillRef>
+            <a:effectRef idx="0">
+              <a:schemeClr val="accent1"/>
+            </a:effectRef>
+            <a:fontRef idx="minor">
+              <a:schemeClr val="lt1"/>
+            </a:fontRef>
+          </p:style>
+          <p:txBody>
+            <a:bodyPr rtlCol="0" anchor="ctr"/>
+            <a:lstStyle/>
+            <a:p>
+              <a:pPr algn="ctr"/>
+              <a:r>
+                <a:rPr lang="pt-BR" dirty="0" smtClean="0"/>
+                <a:t>SAIDA</a:t>
+              </a:r>
+              <a:endParaRPr lang="pt-BR" dirty="0"/>
+            </a:p>
+          </p:txBody>
+        </p:sp>
+        <p:sp>
+          <p:nvSpPr>
+            <p:cNvPr id="29" name="Retângulo 28">
+              <a:extLst>
+                <a:ext uri="{FF2B5EF4-FFF2-40B4-BE49-F238E27FC236}">
+                  <a16:creationId xmlns:a16="http://schemas.microsoft.com/office/drawing/2014/main" id="{39E8B432-F54E-ED48-B2A1-9E05B0A0AC60}"/>
+                </a:ext>
+              </a:extLst>
+            </p:cNvPr>
+            <p:cNvSpPr/>
+            <p:nvPr/>
+          </p:nvSpPr>
+          <p:spPr>
+            <a:xfrm>
+              <a:off x="6055784" y="729880"/>
+              <a:ext cx="1687133" cy="896170"/>
+            </a:xfrm>
+            <a:prstGeom prst="rect">
+              <a:avLst/>
+            </a:prstGeom>
+          </p:spPr>
+          <p:style>
+            <a:lnRef idx="2">
+              <a:schemeClr val="accent1">
+                <a:shade val="15000"/>
+              </a:schemeClr>
+            </a:lnRef>
+            <a:fillRef idx="1">
+              <a:schemeClr val="accent1"/>
+            </a:fillRef>
+            <a:effectRef idx="0">
+              <a:schemeClr val="accent1"/>
+            </a:effectRef>
+            <a:fontRef idx="minor">
+              <a:schemeClr val="lt1"/>
+            </a:fontRef>
+          </p:style>
+          <p:txBody>
+            <a:bodyPr rtlCol="0" anchor="ctr"/>
+            <a:lstStyle/>
+            <a:p>
+              <a:pPr algn="ctr"/>
+              <a:r>
+                <a:rPr lang="pt-BR" dirty="0" smtClean="0"/>
+                <a:t>ENTRADA</a:t>
+              </a:r>
+              <a:endParaRPr lang="pt-BR" dirty="0"/>
+            </a:p>
+          </p:txBody>
+        </p:sp>
+        <p:sp>
+          <p:nvSpPr>
+            <p:cNvPr id="30" name="Losango 29">
+              <a:extLst>
+                <a:ext uri="{FF2B5EF4-FFF2-40B4-BE49-F238E27FC236}">
+                  <a16:creationId xmlns:a16="http://schemas.microsoft.com/office/drawing/2014/main" id="{A0589B58-71D4-387F-B6FD-C4BBFC5DFE56}"/>
+                </a:ext>
+              </a:extLst>
+            </p:cNvPr>
+            <p:cNvSpPr/>
+            <p:nvPr/>
+          </p:nvSpPr>
+          <p:spPr>
+            <a:xfrm>
+              <a:off x="4702872" y="850249"/>
+              <a:ext cx="785611" cy="647904"/>
+            </a:xfrm>
+            <a:prstGeom prst="diamond">
+              <a:avLst/>
+            </a:prstGeom>
+          </p:spPr>
+          <p:style>
+            <a:lnRef idx="2">
+              <a:schemeClr val="accent1">
+                <a:shade val="15000"/>
+              </a:schemeClr>
+            </a:lnRef>
+            <a:fillRef idx="1">
+              <a:schemeClr val="accent1"/>
+            </a:fillRef>
+            <a:effectRef idx="0">
+              <a:schemeClr val="accent1"/>
+            </a:effectRef>
+            <a:fontRef idx="minor">
+              <a:schemeClr val="lt1"/>
+            </a:fontRef>
+          </p:style>
+          <p:txBody>
+            <a:bodyPr rtlCol="0" anchor="ctr"/>
+            <a:lstStyle/>
+            <a:p>
+              <a:pPr algn="ctr"/>
+              <a:endParaRPr lang="pt-BR" dirty="0"/>
+            </a:p>
+          </p:txBody>
+        </p:sp>
+        <p:sp>
+          <p:nvSpPr>
+            <p:cNvPr id="31" name="Losango 30">
+              <a:extLst>
+                <a:ext uri="{FF2B5EF4-FFF2-40B4-BE49-F238E27FC236}">
+                  <a16:creationId xmlns:a16="http://schemas.microsoft.com/office/drawing/2014/main" id="{A0589B58-71D4-387F-B6FD-C4BBFC5DFE56}"/>
+                </a:ext>
+              </a:extLst>
+            </p:cNvPr>
+            <p:cNvSpPr/>
+            <p:nvPr/>
+          </p:nvSpPr>
+          <p:spPr>
+            <a:xfrm>
+              <a:off x="4702871" y="5160424"/>
+              <a:ext cx="785611" cy="647904"/>
+            </a:xfrm>
+            <a:prstGeom prst="diamond">
+              <a:avLst/>
+            </a:prstGeom>
+          </p:spPr>
+          <p:style>
+            <a:lnRef idx="2">
+              <a:schemeClr val="accent1">
+                <a:shade val="15000"/>
+              </a:schemeClr>
+            </a:lnRef>
+            <a:fillRef idx="1">
+              <a:schemeClr val="accent1"/>
+            </a:fillRef>
+            <a:effectRef idx="0">
+              <a:schemeClr val="accent1"/>
+            </a:effectRef>
+            <a:fontRef idx="minor">
+              <a:schemeClr val="lt1"/>
+            </a:fontRef>
+          </p:style>
+          <p:txBody>
+            <a:bodyPr rtlCol="0" anchor="ctr"/>
+            <a:lstStyle/>
+            <a:p>
+              <a:pPr algn="ctr"/>
+              <a:endParaRPr lang="pt-BR" dirty="0"/>
+            </a:p>
+          </p:txBody>
+        </p:sp>
+        <p:sp>
+          <p:nvSpPr>
+            <p:cNvPr id="32" name="Retângulo 31"/>
+            <p:cNvSpPr/>
+            <p:nvPr/>
+          </p:nvSpPr>
+          <p:spPr>
+            <a:xfrm>
+              <a:off x="9873734" y="729880"/>
+              <a:ext cx="2020743" cy="896170"/>
+            </a:xfrm>
+            <a:prstGeom prst="rect">
+              <a:avLst/>
+            </a:prstGeom>
+          </p:spPr>
+          <p:style>
+            <a:lnRef idx="2">
+              <a:schemeClr val="accent1">
+                <a:shade val="50000"/>
+              </a:schemeClr>
+            </a:lnRef>
+            <a:fillRef idx="1">
+              <a:schemeClr val="accent1"/>
+            </a:fillRef>
+            <a:effectRef idx="0">
+              <a:schemeClr val="accent1"/>
+            </a:effectRef>
+            <a:fontRef idx="minor">
+              <a:schemeClr val="lt1"/>
+            </a:fontRef>
+          </p:style>
+          <p:txBody>
+            <a:bodyPr rtlCol="0" anchor="ctr"/>
+            <a:lstStyle/>
+            <a:p>
+              <a:pPr algn="ctr"/>
+              <a:r>
+                <a:rPr lang="pt-BR" dirty="0" smtClean="0"/>
+                <a:t>FORNECEDOR</a:t>
+              </a:r>
+              <a:endParaRPr lang="pt-BR" dirty="0"/>
+            </a:p>
+          </p:txBody>
+        </p:sp>
+        <p:sp>
+          <p:nvSpPr>
+            <p:cNvPr id="33" name="Retângulo 32"/>
+            <p:cNvSpPr/>
+            <p:nvPr/>
+          </p:nvSpPr>
+          <p:spPr>
+            <a:xfrm>
+              <a:off x="9870438" y="5036291"/>
+              <a:ext cx="2020743" cy="896170"/>
+            </a:xfrm>
+            <a:prstGeom prst="rect">
+              <a:avLst/>
+            </a:prstGeom>
+          </p:spPr>
+          <p:style>
+            <a:lnRef idx="2">
+              <a:schemeClr val="accent1">
+                <a:shade val="50000"/>
+              </a:schemeClr>
+            </a:lnRef>
+            <a:fillRef idx="1">
+              <a:schemeClr val="accent1"/>
+            </a:fillRef>
+            <a:effectRef idx="0">
+              <a:schemeClr val="accent1"/>
+            </a:effectRef>
+            <a:fontRef idx="minor">
+              <a:schemeClr val="lt1"/>
+            </a:fontRef>
+          </p:style>
+          <p:txBody>
+            <a:bodyPr rtlCol="0" anchor="ctr"/>
+            <a:lstStyle/>
+            <a:p>
+              <a:pPr algn="ctr"/>
+              <a:r>
+                <a:rPr lang="pt-BR" dirty="0" smtClean="0"/>
+                <a:t>SECRETARIA</a:t>
+              </a:r>
+              <a:endParaRPr lang="pt-BR" dirty="0"/>
+            </a:p>
+          </p:txBody>
+        </p:sp>
+        <p:sp>
+          <p:nvSpPr>
+            <p:cNvPr id="34" name="Losango 33">
+              <a:extLst>
+                <a:ext uri="{FF2B5EF4-FFF2-40B4-BE49-F238E27FC236}">
+                  <a16:creationId xmlns:a16="http://schemas.microsoft.com/office/drawing/2014/main" id="{A0589B58-71D4-387F-B6FD-C4BBFC5DFE56}"/>
+                </a:ext>
+              </a:extLst>
+            </p:cNvPr>
+            <p:cNvSpPr/>
+            <p:nvPr/>
+          </p:nvSpPr>
+          <p:spPr>
+            <a:xfrm>
+              <a:off x="8610526" y="859086"/>
+              <a:ext cx="785611" cy="647904"/>
+            </a:xfrm>
+            <a:prstGeom prst="diamond">
+              <a:avLst/>
+            </a:prstGeom>
+          </p:spPr>
+          <p:style>
+            <a:lnRef idx="2">
+              <a:schemeClr val="accent1">
+                <a:shade val="15000"/>
+              </a:schemeClr>
+            </a:lnRef>
+            <a:fillRef idx="1">
+              <a:schemeClr val="accent1"/>
+            </a:fillRef>
+            <a:effectRef idx="0">
+              <a:schemeClr val="accent1"/>
+            </a:effectRef>
+            <a:fontRef idx="minor">
+              <a:schemeClr val="lt1"/>
+            </a:fontRef>
+          </p:style>
+          <p:txBody>
+            <a:bodyPr rtlCol="0" anchor="ctr"/>
+            <a:lstStyle/>
+            <a:p>
+              <a:pPr algn="ctr"/>
+              <a:endParaRPr lang="pt-BR" dirty="0"/>
+            </a:p>
+          </p:txBody>
+        </p:sp>
+        <p:sp>
+          <p:nvSpPr>
+            <p:cNvPr id="35" name="Losango 34">
+              <a:extLst>
+                <a:ext uri="{FF2B5EF4-FFF2-40B4-BE49-F238E27FC236}">
+                  <a16:creationId xmlns:a16="http://schemas.microsoft.com/office/drawing/2014/main" id="{A0589B58-71D4-387F-B6FD-C4BBFC5DFE56}"/>
+                </a:ext>
+              </a:extLst>
+            </p:cNvPr>
+            <p:cNvSpPr/>
+            <p:nvPr/>
+          </p:nvSpPr>
+          <p:spPr>
+            <a:xfrm>
+              <a:off x="8610525" y="5160424"/>
+              <a:ext cx="785611" cy="647904"/>
+            </a:xfrm>
+            <a:prstGeom prst="diamond">
+              <a:avLst/>
+            </a:prstGeom>
+          </p:spPr>
+          <p:style>
+            <a:lnRef idx="2">
+              <a:schemeClr val="accent1">
+                <a:shade val="15000"/>
+              </a:schemeClr>
+            </a:lnRef>
+            <a:fillRef idx="1">
+              <a:schemeClr val="accent1"/>
+            </a:fillRef>
+            <a:effectRef idx="0">
+              <a:schemeClr val="accent1"/>
+            </a:effectRef>
+            <a:fontRef idx="minor">
+              <a:schemeClr val="lt1"/>
+            </a:fontRef>
+          </p:style>
+          <p:txBody>
+            <a:bodyPr rtlCol="0" anchor="ctr"/>
+            <a:lstStyle/>
+            <a:p>
+              <a:pPr algn="ctr"/>
+              <a:endParaRPr lang="pt-BR" dirty="0"/>
+            </a:p>
+          </p:txBody>
+        </p:sp>
+        <p:cxnSp>
+          <p:nvCxnSpPr>
+            <p:cNvPr id="36" name="Conector de Seta Reta 35"/>
+            <p:cNvCxnSpPr>
+              <a:stCxn id="8" idx="2"/>
+              <a:endCxn id="6" idx="0"/>
+            </p:cNvCxnSpPr>
+            <p:nvPr/>
+          </p:nvCxnSpPr>
+          <p:spPr>
+            <a:xfrm>
+              <a:off x="3070277" y="1626050"/>
+              <a:ext cx="1" cy="1382561"/>
+            </a:xfrm>
+            <a:prstGeom prst="straightConnector1">
+              <a:avLst/>
+            </a:prstGeom>
+            <a:ln>
+              <a:tailEnd type="triangle"/>
+            </a:ln>
+          </p:spPr>
+          <p:style>
+            <a:lnRef idx="1">
+              <a:schemeClr val="accent1"/>
+            </a:lnRef>
+            <a:fillRef idx="0">
+              <a:schemeClr val="accent1"/>
+            </a:fillRef>
+            <a:effectRef idx="0">
+              <a:schemeClr val="accent1"/>
+            </a:effectRef>
+            <a:fontRef idx="minor">
+              <a:schemeClr val="tx1"/>
+            </a:fontRef>
+          </p:style>
+        </p:cxnSp>
+        <p:cxnSp>
+          <p:nvCxnSpPr>
+            <p:cNvPr id="38" name="Conector de Seta Reta 37"/>
+            <p:cNvCxnSpPr>
+              <a:stCxn id="6" idx="2"/>
+              <a:endCxn id="23" idx="0"/>
+            </p:cNvCxnSpPr>
+            <p:nvPr/>
+          </p:nvCxnSpPr>
+          <p:spPr>
+            <a:xfrm flipH="1">
+              <a:off x="3070276" y="3897253"/>
+              <a:ext cx="2" cy="1139038"/>
+            </a:xfrm>
+            <a:prstGeom prst="straightConnector1">
+              <a:avLst/>
+            </a:prstGeom>
+            <a:ln>
+              <a:tailEnd type="triangle"/>
+            </a:ln>
+          </p:spPr>
+          <p:style>
+            <a:lnRef idx="1">
+              <a:schemeClr val="accent1"/>
+            </a:lnRef>
+            <a:fillRef idx="0">
+              <a:schemeClr val="accent1"/>
+            </a:fillRef>
+            <a:effectRef idx="0">
+              <a:schemeClr val="accent1"/>
+            </a:effectRef>
+            <a:fontRef idx="minor">
+              <a:schemeClr val="tx1"/>
+            </a:fontRef>
+          </p:style>
+        </p:cxnSp>
+        <p:cxnSp>
+          <p:nvCxnSpPr>
+            <p:cNvPr id="40" name="Conector de Seta Reta 39"/>
+            <p:cNvCxnSpPr>
+              <a:stCxn id="8" idx="3"/>
+              <a:endCxn id="29" idx="1"/>
+            </p:cNvCxnSpPr>
+            <p:nvPr/>
+          </p:nvCxnSpPr>
+          <p:spPr>
+            <a:xfrm>
+              <a:off x="4080648" y="1177965"/>
+              <a:ext cx="1975136" cy="0"/>
+            </a:xfrm>
+            <a:prstGeom prst="straightConnector1">
+              <a:avLst/>
+            </a:prstGeom>
+            <a:ln>
+              <a:tailEnd type="triangle"/>
+            </a:ln>
+          </p:spPr>
+          <p:style>
+            <a:lnRef idx="1">
+              <a:schemeClr val="accent1"/>
+            </a:lnRef>
+            <a:fillRef idx="0">
+              <a:schemeClr val="accent1"/>
+            </a:fillRef>
+            <a:effectRef idx="0">
+              <a:schemeClr val="accent1"/>
+            </a:effectRef>
+            <a:fontRef idx="minor">
+              <a:schemeClr val="tx1"/>
+            </a:fontRef>
+          </p:style>
+        </p:cxnSp>
+        <p:cxnSp>
+          <p:nvCxnSpPr>
+            <p:cNvPr id="42" name="Conector de Seta Reta 41"/>
+            <p:cNvCxnSpPr>
+              <a:stCxn id="23" idx="3"/>
+              <a:endCxn id="28" idx="1"/>
+            </p:cNvCxnSpPr>
+            <p:nvPr/>
+          </p:nvCxnSpPr>
+          <p:spPr>
+            <a:xfrm>
+              <a:off x="4080647" y="5484376"/>
+              <a:ext cx="2059904" cy="0"/>
+            </a:xfrm>
+            <a:prstGeom prst="straightConnector1">
+              <a:avLst/>
+            </a:prstGeom>
+            <a:ln>
+              <a:tailEnd type="triangle"/>
+            </a:ln>
+          </p:spPr>
+          <p:style>
+            <a:lnRef idx="1">
+              <a:schemeClr val="accent1"/>
+            </a:lnRef>
+            <a:fillRef idx="0">
+              <a:schemeClr val="accent1"/>
+            </a:fillRef>
+            <a:effectRef idx="0">
+              <a:schemeClr val="accent1"/>
+            </a:effectRef>
+            <a:fontRef idx="minor">
+              <a:schemeClr val="tx1"/>
+            </a:fontRef>
+          </p:style>
+        </p:cxnSp>
+        <p:cxnSp>
+          <p:nvCxnSpPr>
+            <p:cNvPr id="44" name="Conector de Seta Reta 43"/>
+            <p:cNvCxnSpPr>
+              <a:stCxn id="29" idx="3"/>
+              <a:endCxn id="32" idx="1"/>
+            </p:cNvCxnSpPr>
+            <p:nvPr/>
+          </p:nvCxnSpPr>
+          <p:spPr>
+            <a:xfrm>
+              <a:off x="7742917" y="1177965"/>
+              <a:ext cx="2130817" cy="0"/>
+            </a:xfrm>
+            <a:prstGeom prst="straightConnector1">
+              <a:avLst/>
+            </a:prstGeom>
+            <a:ln>
+              <a:tailEnd type="triangle"/>
+            </a:ln>
+          </p:spPr>
+          <p:style>
+            <a:lnRef idx="1">
+              <a:schemeClr val="accent1"/>
+            </a:lnRef>
+            <a:fillRef idx="0">
+              <a:schemeClr val="accent1"/>
+            </a:fillRef>
+            <a:effectRef idx="0">
+              <a:schemeClr val="accent1"/>
+            </a:effectRef>
+            <a:fontRef idx="minor">
+              <a:schemeClr val="tx1"/>
+            </a:fontRef>
+          </p:style>
+        </p:cxnSp>
+        <p:cxnSp>
+          <p:nvCxnSpPr>
+            <p:cNvPr id="46" name="Conector de Seta Reta 45"/>
+            <p:cNvCxnSpPr>
+              <a:stCxn id="28" idx="3"/>
+              <a:endCxn id="33" idx="1"/>
+            </p:cNvCxnSpPr>
+            <p:nvPr/>
+          </p:nvCxnSpPr>
+          <p:spPr>
+            <a:xfrm>
+              <a:off x="7827684" y="5484376"/>
+              <a:ext cx="2042754" cy="0"/>
+            </a:xfrm>
+            <a:prstGeom prst="straightConnector1">
+              <a:avLst/>
+            </a:prstGeom>
+            <a:ln>
+              <a:tailEnd type="triangle"/>
+            </a:ln>
+          </p:spPr>
+          <p:style>
+            <a:lnRef idx="1">
+              <a:schemeClr val="accent1"/>
+            </a:lnRef>
+            <a:fillRef idx="0">
+              <a:schemeClr val="accent1"/>
+            </a:fillRef>
+            <a:effectRef idx="0">
+              <a:schemeClr val="accent1"/>
+            </a:effectRef>
+            <a:fontRef idx="minor">
+              <a:schemeClr val="tx1"/>
+            </a:fontRef>
+          </p:style>
+        </p:cxnSp>
+      </p:grpSp>
     </p:spTree>
     <p:extLst>
       <p:ext uri="{BB962C8B-B14F-4D97-AF65-F5344CB8AC3E}">
@@ -8270,7 +9292,7 @@
                 <a16:creationId xmlns:a16="http://schemas.microsoft.com/office/drawing/2014/main" id="{8450EF29-A29A-9417-2B09-074C04064425}"/>
               </a:ext>
               <a:ext uri="{C183D7F6-B498-43B3-948B-1728B52AA6E4}">
-                <adec:decorative xmlns="" xmlns:adec="http://schemas.microsoft.com/office/drawing/2017/decorative" val="1"/>
+                <adec:decorative xmlns:adec="http://schemas.microsoft.com/office/drawing/2017/decorative" xmlns="" val="1"/>
               </a:ext>
             </a:extLst>
           </p:cNvPr>
@@ -8962,7 +9984,7 @@
                 <a16:creationId xmlns:a16="http://schemas.microsoft.com/office/drawing/2014/main" id="{8450EF29-A29A-9417-2B09-074C04064425}"/>
               </a:ext>
               <a:ext uri="{C183D7F6-B498-43B3-948B-1728B52AA6E4}">
-                <adec:decorative xmlns="" xmlns:adec="http://schemas.microsoft.com/office/drawing/2017/decorative" val="1"/>
+                <adec:decorative xmlns:adec="http://schemas.microsoft.com/office/drawing/2017/decorative" xmlns="" val="1"/>
               </a:ext>
             </a:extLst>
           </p:cNvPr>
@@ -9593,7 +10615,13 @@
     </p:bg>
     <p:spTree>
       <p:nvGrpSpPr>
-        <p:cNvPr id="1" name=""/>
+        <p:cNvPr id="1" name="">
+          <a:extLst>
+            <a:ext uri="{FF2B5EF4-FFF2-40B4-BE49-F238E27FC236}">
+              <a16:creationId xmlns:a16="http://schemas.microsoft.com/office/drawing/2014/main" id="{ABC8E265-4279-B925-FBC6-668AF72F0DCF}"/>
+            </a:ext>
+          </a:extLst>
+        </p:cNvPr>
         <p:cNvGrpSpPr/>
         <p:nvPr/>
       </p:nvGrpSpPr>
@@ -9610,10 +10638,10 @@
           <p:cNvPr id="10" name="Rectangle 9">
             <a:extLst>
               <a:ext uri="{FF2B5EF4-FFF2-40B4-BE49-F238E27FC236}">
-                <a16:creationId xmlns:a16="http://schemas.microsoft.com/office/drawing/2014/main" id="{5E8D3B17-7638-DFD3-18E4-8A6D611749CF}"/>
+                <a16:creationId xmlns:a16="http://schemas.microsoft.com/office/drawing/2014/main" id="{8450EF29-A29A-9417-2B09-074C04064425}"/>
               </a:ext>
               <a:ext uri="{C183D7F6-B498-43B3-948B-1728B52AA6E4}">
-                <adec:decorative xmlns="" xmlns:adec="http://schemas.microsoft.com/office/drawing/2017/decorative" val="1"/>
+                <adec:decorative xmlns:adec="http://schemas.microsoft.com/office/drawing/2017/decorative" xmlns="" val="1"/>
               </a:ext>
             </a:extLst>
           </p:cNvPr>
@@ -9686,7 +10714,7 @@
           <p:cNvPr id="2" name="Título 1">
             <a:extLst>
               <a:ext uri="{FF2B5EF4-FFF2-40B4-BE49-F238E27FC236}">
-                <a16:creationId xmlns:a16="http://schemas.microsoft.com/office/drawing/2014/main" id="{D4CDB794-FD66-B57C-5DB2-D14CF7301A4E}"/>
+                <a16:creationId xmlns:a16="http://schemas.microsoft.com/office/drawing/2014/main" id="{4088EF13-93E0-2A25-DAC4-430EED1B9C18}"/>
               </a:ext>
             </a:extLst>
           </p:cNvPr>
@@ -9699,8 +10727,8 @@
         </p:nvSpPr>
         <p:spPr>
           <a:xfrm>
-            <a:off x="1022295" y="2665927"/>
-            <a:ext cx="5916168" cy="919938"/>
+            <a:off x="468503" y="0"/>
+            <a:ext cx="10517176" cy="1527048"/>
           </a:xfrm>
         </p:spPr>
         <p:txBody>
@@ -9709,17 +10737,501 @@
           </a:bodyPr>
           <a:lstStyle/>
           <a:p>
-            <a:r>
-              <a:rPr lang="en-US" dirty="0"/>
-              <a:t>Wireframe</a:t>
-            </a:r>
-            <a:endParaRPr lang="en-US" b="1" kern="1200" dirty="0">
-              <a:solidFill>
-                <a:schemeClr val="tx1"/>
-              </a:solidFill>
-              <a:latin typeface="+mj-lt"/>
-              <a:ea typeface="+mj-ea"/>
-              <a:cs typeface="+mj-cs"/>
+            <a:pPr>
+              <a:spcBef>
+                <a:spcPts val="2500"/>
+              </a:spcBef>
+            </a:pPr>
+            <a:r>
+              <a:rPr lang="pt-BR" dirty="0">
+                <a:latin typeface="Arial" panose="020B0604020202020204" pitchFamily="34" charset="0"/>
+                <a:cs typeface="Arial" panose="020B0604020202020204" pitchFamily="34" charset="0"/>
+              </a:rPr>
+              <a:t>DICIONÁRIO DE </a:t>
+            </a:r>
+            <a:r>
+              <a:rPr lang="pt-BR" dirty="0" smtClean="0">
+                <a:latin typeface="Arial" panose="020B0604020202020204" pitchFamily="34" charset="0"/>
+                <a:cs typeface="Arial" panose="020B0604020202020204" pitchFamily="34" charset="0"/>
+              </a:rPr>
+              <a:t>DADOS </a:t>
+            </a:r>
+            <a:r>
+              <a:rPr lang="pt-BR" dirty="0">
+                <a:latin typeface="Arial" panose="020B0604020202020204" pitchFamily="34" charset="0"/>
+                <a:cs typeface="Arial" panose="020B0604020202020204" pitchFamily="34" charset="0"/>
+              </a:rPr>
+              <a:t>[</a:t>
+            </a:r>
+            <a:r>
+              <a:rPr lang="pt-BR" dirty="0" smtClean="0">
+                <a:latin typeface="Arial" panose="020B0604020202020204" pitchFamily="34" charset="0"/>
+                <a:cs typeface="Arial" panose="020B0604020202020204" pitchFamily="34" charset="0"/>
+              </a:rPr>
+              <a:t>R01]</a:t>
+            </a:r>
+            <a:endParaRPr lang="pt-BR" sz="3600" dirty="0">
+              <a:latin typeface="Arial" panose="020B0604020202020204" pitchFamily="34" charset="0"/>
+              <a:cs typeface="Arial" panose="020B0604020202020204" pitchFamily="34" charset="0"/>
+            </a:endParaRPr>
+          </a:p>
+        </p:txBody>
+      </p:sp>
+      <p:graphicFrame>
+        <p:nvGraphicFramePr>
+          <p:cNvPr id="9" name="Espaço Reservado para Conteúdo 8">
+            <a:extLst>
+              <a:ext uri="{FF2B5EF4-FFF2-40B4-BE49-F238E27FC236}">
+                <a16:creationId xmlns:a16="http://schemas.microsoft.com/office/drawing/2014/main" id="{AE6A2ECC-39B2-D582-178A-3B96D8FBBBF5}"/>
+              </a:ext>
+            </a:extLst>
+          </p:cNvPr>
+          <p:cNvGraphicFramePr>
+            <a:graphicFrameLocks noGrp="1"/>
+          </p:cNvGraphicFramePr>
+          <p:nvPr>
+            <p:ph sz="half" idx="2"/>
+            <p:extLst>
+              <p:ext uri="{D42A27DB-BD31-4B8C-83A1-F6EECF244321}">
+                <p14:modId xmlns:p14="http://schemas.microsoft.com/office/powerpoint/2010/main" val="1741179312"/>
+              </p:ext>
+            </p:extLst>
+          </p:nvPr>
+        </p:nvGraphicFramePr>
+        <p:xfrm>
+          <a:off x="566670" y="2250628"/>
+          <a:ext cx="10071279" cy="2966720"/>
+        </p:xfrm>
+        <a:graphic>
+          <a:graphicData uri="http://schemas.openxmlformats.org/drawingml/2006/table">
+            <a:tbl>
+              <a:tblPr firstRow="1" bandRow="1">
+                <a:tableStyleId>{5C22544A-7EE6-4342-B048-85BDC9FD1C3A}</a:tableStyleId>
+              </a:tblPr>
+              <a:tblGrid>
+                <a:gridCol w="3357093">
+                  <a:extLst>
+                    <a:ext uri="{9D8B030D-6E8A-4147-A177-3AD203B41FA5}">
+                      <a16:colId xmlns:a16="http://schemas.microsoft.com/office/drawing/2014/main" val="1759235190"/>
+                    </a:ext>
+                  </a:extLst>
+                </a:gridCol>
+                <a:gridCol w="3357093">
+                  <a:extLst>
+                    <a:ext uri="{9D8B030D-6E8A-4147-A177-3AD203B41FA5}">
+                      <a16:colId xmlns:a16="http://schemas.microsoft.com/office/drawing/2014/main" val="2611790632"/>
+                    </a:ext>
+                  </a:extLst>
+                </a:gridCol>
+                <a:gridCol w="3357093">
+                  <a:extLst>
+                    <a:ext uri="{9D8B030D-6E8A-4147-A177-3AD203B41FA5}">
+                      <a16:colId xmlns:a16="http://schemas.microsoft.com/office/drawing/2014/main" val="2783851260"/>
+                    </a:ext>
+                  </a:extLst>
+                </a:gridCol>
+              </a:tblGrid>
+              <a:tr h="370840">
+                <a:tc>
+                  <a:txBody>
+                    <a:bodyPr/>
+                    <a:lstStyle/>
+                    <a:p>
+                      <a:r>
+                        <a:rPr lang="pt-BR" dirty="0"/>
+                        <a:t>Campo</a:t>
+                      </a:r>
+                    </a:p>
+                  </a:txBody>
+                  <a:tcPr/>
+                </a:tc>
+                <a:tc>
+                  <a:txBody>
+                    <a:bodyPr/>
+                    <a:lstStyle/>
+                    <a:p>
+                      <a:r>
+                        <a:rPr lang="pt-BR" dirty="0"/>
+                        <a:t>Tipo de Dados</a:t>
+                      </a:r>
+                    </a:p>
+                  </a:txBody>
+                  <a:tcPr/>
+                </a:tc>
+                <a:tc>
+                  <a:txBody>
+                    <a:bodyPr/>
+                    <a:lstStyle/>
+                    <a:p>
+                      <a:r>
+                        <a:rPr lang="pt-BR" dirty="0"/>
+                        <a:t>OBS</a:t>
+                      </a:r>
+                    </a:p>
+                  </a:txBody>
+                  <a:tcPr/>
+                </a:tc>
+                <a:extLst>
+                  <a:ext uri="{0D108BD9-81ED-4DB2-BD59-A6C34878D82A}">
+                    <a16:rowId xmlns:a16="http://schemas.microsoft.com/office/drawing/2014/main" val="996086151"/>
+                  </a:ext>
+                </a:extLst>
+              </a:tr>
+              <a:tr h="370840">
+                <a:tc>
+                  <a:txBody>
+                    <a:bodyPr/>
+                    <a:lstStyle/>
+                    <a:p>
+                      <a:r>
+                        <a:rPr lang="pt-BR" dirty="0" err="1" smtClean="0"/>
+                        <a:t>Codigo</a:t>
+                      </a:r>
+                      <a:endParaRPr lang="pt-BR" dirty="0"/>
+                    </a:p>
+                  </a:txBody>
+                  <a:tcPr/>
+                </a:tc>
+                <a:tc>
+                  <a:txBody>
+                    <a:bodyPr/>
+                    <a:lstStyle/>
+                    <a:p>
+                      <a:r>
+                        <a:rPr lang="pt-BR" dirty="0" err="1"/>
+                        <a:t>Int</a:t>
+                      </a:r>
+                      <a:endParaRPr lang="pt-BR" dirty="0"/>
+                    </a:p>
+                  </a:txBody>
+                  <a:tcPr/>
+                </a:tc>
+                <a:tc>
+                  <a:txBody>
+                    <a:bodyPr/>
+                    <a:lstStyle/>
+                    <a:p>
+                      <a:r>
+                        <a:rPr lang="pt-BR" dirty="0"/>
+                        <a:t>Chave Primária</a:t>
+                      </a:r>
+                    </a:p>
+                  </a:txBody>
+                  <a:tcPr/>
+                </a:tc>
+                <a:extLst>
+                  <a:ext uri="{0D108BD9-81ED-4DB2-BD59-A6C34878D82A}">
+                    <a16:rowId xmlns:a16="http://schemas.microsoft.com/office/drawing/2014/main" val="1004326904"/>
+                  </a:ext>
+                </a:extLst>
+              </a:tr>
+              <a:tr h="370840">
+                <a:tc>
+                  <a:txBody>
+                    <a:bodyPr/>
+                    <a:lstStyle/>
+                    <a:p>
+                      <a:r>
+                        <a:rPr lang="pt-BR" dirty="0" smtClean="0"/>
+                        <a:t>Nome </a:t>
+                      </a:r>
+                      <a:endParaRPr lang="pt-BR" dirty="0"/>
+                    </a:p>
+                  </a:txBody>
+                  <a:tcPr/>
+                </a:tc>
+                <a:tc>
+                  <a:txBody>
+                    <a:bodyPr/>
+                    <a:lstStyle/>
+                    <a:p>
+                      <a:r>
+                        <a:rPr lang="pt-BR" dirty="0" err="1" smtClean="0"/>
+                        <a:t>Varchar</a:t>
+                      </a:r>
+                      <a:r>
+                        <a:rPr lang="pt-BR" dirty="0" smtClean="0"/>
+                        <a:t>(100)</a:t>
+                      </a:r>
+                      <a:endParaRPr lang="pt-BR" dirty="0"/>
+                    </a:p>
+                  </a:txBody>
+                  <a:tcPr/>
+                </a:tc>
+                <a:tc>
+                  <a:txBody>
+                    <a:bodyPr/>
+                    <a:lstStyle/>
+                    <a:p>
+                      <a:endParaRPr lang="pt-BR" dirty="0"/>
+                    </a:p>
+                  </a:txBody>
+                  <a:tcPr/>
+                </a:tc>
+                <a:extLst>
+                  <a:ext uri="{0D108BD9-81ED-4DB2-BD59-A6C34878D82A}">
+                    <a16:rowId xmlns:a16="http://schemas.microsoft.com/office/drawing/2014/main" val="1354368322"/>
+                  </a:ext>
+                </a:extLst>
+              </a:tr>
+              <a:tr h="370840">
+                <a:tc>
+                  <a:txBody>
+                    <a:bodyPr/>
+                    <a:lstStyle/>
+                    <a:p>
+                      <a:endParaRPr lang="pt-BR" dirty="0"/>
+                    </a:p>
+                  </a:txBody>
+                  <a:tcPr/>
+                </a:tc>
+                <a:tc>
+                  <a:txBody>
+                    <a:bodyPr/>
+                    <a:lstStyle/>
+                    <a:p>
+                      <a:endParaRPr lang="pt-BR" dirty="0"/>
+                    </a:p>
+                  </a:txBody>
+                  <a:tcPr/>
+                </a:tc>
+                <a:tc>
+                  <a:txBody>
+                    <a:bodyPr/>
+                    <a:lstStyle/>
+                    <a:p>
+                      <a:endParaRPr lang="pt-BR" dirty="0"/>
+                    </a:p>
+                  </a:txBody>
+                  <a:tcPr/>
+                </a:tc>
+                <a:extLst>
+                  <a:ext uri="{0D108BD9-81ED-4DB2-BD59-A6C34878D82A}">
+                    <a16:rowId xmlns:a16="http://schemas.microsoft.com/office/drawing/2014/main" val="275426533"/>
+                  </a:ext>
+                </a:extLst>
+              </a:tr>
+              <a:tr h="370840">
+                <a:tc>
+                  <a:txBody>
+                    <a:bodyPr/>
+                    <a:lstStyle/>
+                    <a:p>
+                      <a:endParaRPr lang="pt-BR" dirty="0"/>
+                    </a:p>
+                  </a:txBody>
+                  <a:tcPr/>
+                </a:tc>
+                <a:tc>
+                  <a:txBody>
+                    <a:bodyPr/>
+                    <a:lstStyle/>
+                    <a:p>
+                      <a:endParaRPr lang="pt-BR" dirty="0"/>
+                    </a:p>
+                  </a:txBody>
+                  <a:tcPr/>
+                </a:tc>
+                <a:tc>
+                  <a:txBody>
+                    <a:bodyPr/>
+                    <a:lstStyle/>
+                    <a:p>
+                      <a:endParaRPr lang="pt-BR" dirty="0"/>
+                    </a:p>
+                  </a:txBody>
+                  <a:tcPr/>
+                </a:tc>
+                <a:extLst>
+                  <a:ext uri="{0D108BD9-81ED-4DB2-BD59-A6C34878D82A}">
+                    <a16:rowId xmlns:a16="http://schemas.microsoft.com/office/drawing/2014/main" val="2790910923"/>
+                  </a:ext>
+                </a:extLst>
+              </a:tr>
+              <a:tr h="370840">
+                <a:tc>
+                  <a:txBody>
+                    <a:bodyPr/>
+                    <a:lstStyle/>
+                    <a:p>
+                      <a:endParaRPr lang="pt-BR" dirty="0"/>
+                    </a:p>
+                  </a:txBody>
+                  <a:tcPr/>
+                </a:tc>
+                <a:tc>
+                  <a:txBody>
+                    <a:bodyPr/>
+                    <a:lstStyle/>
+                    <a:p>
+                      <a:endParaRPr lang="pt-BR" dirty="0"/>
+                    </a:p>
+                  </a:txBody>
+                  <a:tcPr/>
+                </a:tc>
+                <a:tc>
+                  <a:txBody>
+                    <a:bodyPr/>
+                    <a:lstStyle/>
+                    <a:p>
+                      <a:endParaRPr lang="pt-BR" dirty="0"/>
+                    </a:p>
+                  </a:txBody>
+                  <a:tcPr/>
+                </a:tc>
+                <a:extLst>
+                  <a:ext uri="{0D108BD9-81ED-4DB2-BD59-A6C34878D82A}">
+                    <a16:rowId xmlns:a16="http://schemas.microsoft.com/office/drawing/2014/main" val="1929395480"/>
+                  </a:ext>
+                </a:extLst>
+              </a:tr>
+              <a:tr h="370840">
+                <a:tc>
+                  <a:txBody>
+                    <a:bodyPr/>
+                    <a:lstStyle/>
+                    <a:p>
+                      <a:endParaRPr lang="pt-BR" dirty="0"/>
+                    </a:p>
+                  </a:txBody>
+                  <a:tcPr/>
+                </a:tc>
+                <a:tc>
+                  <a:txBody>
+                    <a:bodyPr/>
+                    <a:lstStyle/>
+                    <a:p>
+                      <a:endParaRPr lang="pt-BR" dirty="0"/>
+                    </a:p>
+                  </a:txBody>
+                  <a:tcPr/>
+                </a:tc>
+                <a:tc>
+                  <a:txBody>
+                    <a:bodyPr/>
+                    <a:lstStyle/>
+                    <a:p>
+                      <a:endParaRPr lang="pt-BR" dirty="0"/>
+                    </a:p>
+                  </a:txBody>
+                  <a:tcPr/>
+                </a:tc>
+                <a:extLst>
+                  <a:ext uri="{0D108BD9-81ED-4DB2-BD59-A6C34878D82A}">
+                    <a16:rowId xmlns:a16="http://schemas.microsoft.com/office/drawing/2014/main" val="2940149528"/>
+                  </a:ext>
+                </a:extLst>
+              </a:tr>
+              <a:tr h="370840">
+                <a:tc>
+                  <a:txBody>
+                    <a:bodyPr/>
+                    <a:lstStyle/>
+                    <a:p>
+                      <a:endParaRPr lang="pt-BR" dirty="0"/>
+                    </a:p>
+                  </a:txBody>
+                  <a:tcPr/>
+                </a:tc>
+                <a:tc>
+                  <a:txBody>
+                    <a:bodyPr/>
+                    <a:lstStyle/>
+                    <a:p>
+                      <a:endParaRPr lang="pt-BR" dirty="0"/>
+                    </a:p>
+                  </a:txBody>
+                  <a:tcPr/>
+                </a:tc>
+                <a:tc>
+                  <a:txBody>
+                    <a:bodyPr/>
+                    <a:lstStyle/>
+                    <a:p>
+                      <a:endParaRPr lang="pt-BR" dirty="0"/>
+                    </a:p>
+                  </a:txBody>
+                  <a:tcPr/>
+                </a:tc>
+                <a:extLst>
+                  <a:ext uri="{0D108BD9-81ED-4DB2-BD59-A6C34878D82A}">
+                    <a16:rowId xmlns:a16="http://schemas.microsoft.com/office/drawing/2014/main" val="1116382274"/>
+                  </a:ext>
+                </a:extLst>
+              </a:tr>
+            </a:tbl>
+          </a:graphicData>
+        </a:graphic>
+      </p:graphicFrame>
+      <p:sp>
+        <p:nvSpPr>
+          <p:cNvPr id="11" name="Título 1">
+            <a:extLst>
+              <a:ext uri="{FF2B5EF4-FFF2-40B4-BE49-F238E27FC236}">
+                <a16:creationId xmlns:a16="http://schemas.microsoft.com/office/drawing/2014/main" id="{0229AC0A-F8EF-158B-5D49-B06E1612EEDE}"/>
+              </a:ext>
+            </a:extLst>
+          </p:cNvPr>
+          <p:cNvSpPr txBox="1">
+            <a:spLocks/>
+          </p:cNvSpPr>
+          <p:nvPr/>
+        </p:nvSpPr>
+        <p:spPr>
+          <a:xfrm>
+            <a:off x="468503" y="763524"/>
+            <a:ext cx="10517176" cy="1527048"/>
+          </a:xfrm>
+          <a:prstGeom prst="rect">
+            <a:avLst/>
+          </a:prstGeom>
+        </p:spPr>
+        <p:txBody>
+          <a:bodyPr vert="horz" lIns="91440" tIns="45720" rIns="91440" bIns="45720" rtlCol="0" anchor="b">
+            <a:normAutofit/>
+          </a:bodyPr>
+          <a:lstStyle>
+            <a:lvl1pPr algn="l" defTabSz="914400" rtl="0" eaLnBrk="1" latinLnBrk="0" hangingPunct="1">
+              <a:lnSpc>
+                <a:spcPct val="90000"/>
+              </a:lnSpc>
+              <a:spcBef>
+                <a:spcPct val="0"/>
+              </a:spcBef>
+              <a:buNone/>
+              <a:defRPr sz="3600" b="1" kern="1200">
+                <a:solidFill>
+                  <a:schemeClr val="tx1"/>
+                </a:solidFill>
+                <a:latin typeface="+mj-lt"/>
+                <a:ea typeface="+mj-ea"/>
+                <a:cs typeface="+mj-cs"/>
+              </a:defRPr>
+            </a:lvl1pPr>
+          </a:lstStyle>
+          <a:p>
+            <a:pPr>
+              <a:spcBef>
+                <a:spcPts val="2500"/>
+              </a:spcBef>
+            </a:pPr>
+            <a:r>
+              <a:rPr lang="pt-BR" sz="1600" dirty="0">
+                <a:latin typeface="Arial" panose="020B0604020202020204" pitchFamily="34" charset="0"/>
+                <a:cs typeface="Arial" panose="020B0604020202020204" pitchFamily="34" charset="0"/>
+              </a:rPr>
+              <a:t>Tabela </a:t>
+            </a:r>
+            <a:r>
+              <a:rPr lang="pt-BR" sz="1600" dirty="0" smtClean="0">
+                <a:latin typeface="Arial" panose="020B0604020202020204" pitchFamily="34" charset="0"/>
+                <a:cs typeface="Arial" panose="020B0604020202020204" pitchFamily="34" charset="0"/>
+              </a:rPr>
+              <a:t>Fornecedor</a:t>
+            </a:r>
+            <a:endParaRPr lang="pt-BR" sz="1600" dirty="0">
+              <a:latin typeface="Arial" panose="020B0604020202020204" pitchFamily="34" charset="0"/>
+              <a:cs typeface="Arial" panose="020B0604020202020204" pitchFamily="34" charset="0"/>
             </a:endParaRPr>
           </a:p>
         </p:txBody>
@@ -9727,7 +11239,7 @@
     </p:spTree>
     <p:extLst>
       <p:ext uri="{BB962C8B-B14F-4D97-AF65-F5344CB8AC3E}">
-        <p14:creationId xmlns:p14="http://schemas.microsoft.com/office/powerpoint/2010/main" val="827370966"/>
+        <p14:creationId xmlns:p14="http://schemas.microsoft.com/office/powerpoint/2010/main" val="200465513"/>
       </p:ext>
     </p:extLst>
   </p:cSld>
@@ -9737,6 +11249,13 @@
   <p:transition>
     <p:fade/>
   </p:transition>
+  <p:timing>
+    <p:tnLst>
+      <p:par>
+        <p:cTn id="1" dur="indefinite" restart="never" nodeType="tmRoot"/>
+      </p:par>
+    </p:tnLst>
+  </p:timing>
 </p:sld>
 </file>
 
@@ -9753,7 +11272,13 @@
     </p:bg>
     <p:spTree>
       <p:nvGrpSpPr>
-        <p:cNvPr id="1" name=""/>
+        <p:cNvPr id="1" name="">
+          <a:extLst>
+            <a:ext uri="{FF2B5EF4-FFF2-40B4-BE49-F238E27FC236}">
+              <a16:creationId xmlns:a16="http://schemas.microsoft.com/office/drawing/2014/main" id="{ABC8E265-4279-B925-FBC6-668AF72F0DCF}"/>
+            </a:ext>
+          </a:extLst>
+        </p:cNvPr>
         <p:cNvGrpSpPr/>
         <p:nvPr/>
       </p:nvGrpSpPr>
@@ -9770,10 +11295,10 @@
           <p:cNvPr id="10" name="Rectangle 9">
             <a:extLst>
               <a:ext uri="{FF2B5EF4-FFF2-40B4-BE49-F238E27FC236}">
-                <a16:creationId xmlns:a16="http://schemas.microsoft.com/office/drawing/2014/main" id="{5E8D3B17-7638-DFD3-18E4-8A6D611749CF}"/>
+                <a16:creationId xmlns:a16="http://schemas.microsoft.com/office/drawing/2014/main" id="{8450EF29-A29A-9417-2B09-074C04064425}"/>
               </a:ext>
               <a:ext uri="{C183D7F6-B498-43B3-948B-1728B52AA6E4}">
-                <adec:decorative xmlns="" xmlns:adec="http://schemas.microsoft.com/office/drawing/2017/decorative" val="1"/>
+                <adec:decorative xmlns:adec="http://schemas.microsoft.com/office/drawing/2017/decorative" xmlns="" val="1"/>
               </a:ext>
             </a:extLst>
           </p:cNvPr>
@@ -9841,43 +11366,12 @@
           </a:p>
         </p:txBody>
       </p:sp>
-      <p:pic>
-        <p:nvPicPr>
-          <p:cNvPr id="5" name="Espaço Reservado para Conteúdo 4" descr="Formulário web de login">
-            <a:extLst>
-              <a:ext uri="{FF2B5EF4-FFF2-40B4-BE49-F238E27FC236}">
-                <a16:creationId xmlns:a16="http://schemas.microsoft.com/office/drawing/2014/main" id="{9574661C-9C71-44C7-9C38-D5812FB73B79}"/>
-              </a:ext>
-            </a:extLst>
-          </p:cNvPr>
-          <p:cNvPicPr>
-            <a:picLocks noGrp="1" noChangeAspect="1"/>
-          </p:cNvPicPr>
-          <p:nvPr>
-            <p:ph sz="half" idx="1"/>
-          </p:nvPr>
-        </p:nvPicPr>
-        <p:blipFill>
-          <a:blip r:embed="rId3"/>
-          <a:srcRect l="27263" r="22617" b="1"/>
-          <a:stretch/>
-        </p:blipFill>
-        <p:spPr>
-          <a:xfrm>
-            <a:off x="1403817" y="1133346"/>
-            <a:ext cx="3748431" cy="5235252"/>
-          </a:xfrm>
-          <a:prstGeom prst="rect">
-            <a:avLst/>
-          </a:prstGeom>
-        </p:spPr>
-      </p:pic>
       <p:sp>
         <p:nvSpPr>
           <p:cNvPr id="2" name="Título 1">
             <a:extLst>
               <a:ext uri="{FF2B5EF4-FFF2-40B4-BE49-F238E27FC236}">
-                <a16:creationId xmlns:a16="http://schemas.microsoft.com/office/drawing/2014/main" id="{52C8C7F8-6A55-1DF8-3A33-F776C9F854B3}"/>
+                <a16:creationId xmlns:a16="http://schemas.microsoft.com/office/drawing/2014/main" id="{4088EF13-93E0-2A25-DAC4-430EED1B9C18}"/>
               </a:ext>
             </a:extLst>
           </p:cNvPr>
@@ -9890,8 +11384,8 @@
         </p:nvSpPr>
         <p:spPr>
           <a:xfrm>
-            <a:off x="5209415" y="218946"/>
-            <a:ext cx="5916168" cy="1527048"/>
+            <a:off x="468503" y="0"/>
+            <a:ext cx="10517176" cy="1527048"/>
           </a:xfrm>
         </p:spPr>
         <p:txBody>
@@ -9900,26 +11394,466 @@
           </a:bodyPr>
           <a:lstStyle/>
           <a:p>
-            <a:r>
-              <a:rPr lang="en-US" b="0" kern="1200" dirty="0">
-                <a:solidFill>
-                  <a:schemeClr val="tx1"/>
-                </a:solidFill>
-                <a:latin typeface="+mj-lt"/>
-                <a:ea typeface="+mj-ea"/>
-                <a:cs typeface="+mj-cs"/>
+            <a:pPr>
+              <a:spcBef>
+                <a:spcPts val="2500"/>
+              </a:spcBef>
+            </a:pPr>
+            <a:r>
+              <a:rPr lang="pt-BR" dirty="0">
+                <a:latin typeface="Arial" panose="020B0604020202020204" pitchFamily="34" charset="0"/>
+                <a:cs typeface="Arial" panose="020B0604020202020204" pitchFamily="34" charset="0"/>
               </a:rPr>
-              <a:t>Tela de Login</a:t>
-            </a:r>
-          </a:p>
-        </p:txBody>
-      </p:sp>
-      <p:sp>
-        <p:nvSpPr>
-          <p:cNvPr id="7" name="Título 1">
+              <a:t>DICIONÁRIO DE </a:t>
+            </a:r>
+            <a:r>
+              <a:rPr lang="pt-BR" dirty="0" smtClean="0">
+                <a:latin typeface="Arial" panose="020B0604020202020204" pitchFamily="34" charset="0"/>
+                <a:cs typeface="Arial" panose="020B0604020202020204" pitchFamily="34" charset="0"/>
+              </a:rPr>
+              <a:t>DADOS </a:t>
+            </a:r>
+            <a:r>
+              <a:rPr lang="pt-BR" dirty="0">
+                <a:latin typeface="Arial" panose="020B0604020202020204" pitchFamily="34" charset="0"/>
+                <a:cs typeface="Arial" panose="020B0604020202020204" pitchFamily="34" charset="0"/>
+              </a:rPr>
+              <a:t>[</a:t>
+            </a:r>
+            <a:r>
+              <a:rPr lang="pt-BR" dirty="0" smtClean="0">
+                <a:latin typeface="Arial" panose="020B0604020202020204" pitchFamily="34" charset="0"/>
+                <a:cs typeface="Arial" panose="020B0604020202020204" pitchFamily="34" charset="0"/>
+              </a:rPr>
+              <a:t>R01]</a:t>
+            </a:r>
+            <a:endParaRPr lang="pt-BR" sz="3600" dirty="0">
+              <a:latin typeface="Arial" panose="020B0604020202020204" pitchFamily="34" charset="0"/>
+              <a:cs typeface="Arial" panose="020B0604020202020204" pitchFamily="34" charset="0"/>
+            </a:endParaRPr>
+          </a:p>
+        </p:txBody>
+      </p:sp>
+      <p:graphicFrame>
+        <p:nvGraphicFramePr>
+          <p:cNvPr id="9" name="Espaço Reservado para Conteúdo 8">
             <a:extLst>
               <a:ext uri="{FF2B5EF4-FFF2-40B4-BE49-F238E27FC236}">
-                <a16:creationId xmlns:a16="http://schemas.microsoft.com/office/drawing/2014/main" id="{F08859EF-E25E-52C0-C024-DE22738F8749}"/>
+                <a16:creationId xmlns:a16="http://schemas.microsoft.com/office/drawing/2014/main" id="{AE6A2ECC-39B2-D582-178A-3B96D8FBBBF5}"/>
+              </a:ext>
+            </a:extLst>
+          </p:cNvPr>
+          <p:cNvGraphicFramePr>
+            <a:graphicFrameLocks noGrp="1"/>
+          </p:cNvGraphicFramePr>
+          <p:nvPr>
+            <p:ph sz="half" idx="2"/>
+            <p:extLst>
+              <p:ext uri="{D42A27DB-BD31-4B8C-83A1-F6EECF244321}">
+                <p14:modId xmlns:p14="http://schemas.microsoft.com/office/powerpoint/2010/main" val="383270597"/>
+              </p:ext>
+            </p:extLst>
+          </p:nvPr>
+        </p:nvGraphicFramePr>
+        <p:xfrm>
+          <a:off x="566670" y="2250628"/>
+          <a:ext cx="10071279" cy="2966720"/>
+        </p:xfrm>
+        <a:graphic>
+          <a:graphicData uri="http://schemas.openxmlformats.org/drawingml/2006/table">
+            <a:tbl>
+              <a:tblPr firstRow="1" bandRow="1">
+                <a:tableStyleId>{5C22544A-7EE6-4342-B048-85BDC9FD1C3A}</a:tableStyleId>
+              </a:tblPr>
+              <a:tblGrid>
+                <a:gridCol w="3357093">
+                  <a:extLst>
+                    <a:ext uri="{9D8B030D-6E8A-4147-A177-3AD203B41FA5}">
+                      <a16:colId xmlns:a16="http://schemas.microsoft.com/office/drawing/2014/main" val="1759235190"/>
+                    </a:ext>
+                  </a:extLst>
+                </a:gridCol>
+                <a:gridCol w="3357093">
+                  <a:extLst>
+                    <a:ext uri="{9D8B030D-6E8A-4147-A177-3AD203B41FA5}">
+                      <a16:colId xmlns:a16="http://schemas.microsoft.com/office/drawing/2014/main" val="2611790632"/>
+                    </a:ext>
+                  </a:extLst>
+                </a:gridCol>
+                <a:gridCol w="3357093">
+                  <a:extLst>
+                    <a:ext uri="{9D8B030D-6E8A-4147-A177-3AD203B41FA5}">
+                      <a16:colId xmlns:a16="http://schemas.microsoft.com/office/drawing/2014/main" val="2783851260"/>
+                    </a:ext>
+                  </a:extLst>
+                </a:gridCol>
+              </a:tblGrid>
+              <a:tr h="370840">
+                <a:tc>
+                  <a:txBody>
+                    <a:bodyPr/>
+                    <a:lstStyle/>
+                    <a:p>
+                      <a:r>
+                        <a:rPr lang="pt-BR" dirty="0"/>
+                        <a:t>Campo</a:t>
+                      </a:r>
+                    </a:p>
+                  </a:txBody>
+                  <a:tcPr/>
+                </a:tc>
+                <a:tc>
+                  <a:txBody>
+                    <a:bodyPr/>
+                    <a:lstStyle/>
+                    <a:p>
+                      <a:r>
+                        <a:rPr lang="pt-BR" dirty="0"/>
+                        <a:t>Tipo de Dados</a:t>
+                      </a:r>
+                    </a:p>
+                  </a:txBody>
+                  <a:tcPr/>
+                </a:tc>
+                <a:tc>
+                  <a:txBody>
+                    <a:bodyPr/>
+                    <a:lstStyle/>
+                    <a:p>
+                      <a:r>
+                        <a:rPr lang="pt-BR" dirty="0"/>
+                        <a:t>OBS</a:t>
+                      </a:r>
+                    </a:p>
+                  </a:txBody>
+                  <a:tcPr/>
+                </a:tc>
+                <a:extLst>
+                  <a:ext uri="{0D108BD9-81ED-4DB2-BD59-A6C34878D82A}">
+                    <a16:rowId xmlns:a16="http://schemas.microsoft.com/office/drawing/2014/main" val="996086151"/>
+                  </a:ext>
+                </a:extLst>
+              </a:tr>
+              <a:tr h="370840">
+                <a:tc>
+                  <a:txBody>
+                    <a:bodyPr/>
+                    <a:lstStyle/>
+                    <a:p>
+                      <a:r>
+                        <a:rPr lang="pt-BR" dirty="0" err="1" smtClean="0"/>
+                        <a:t>Codigo</a:t>
+                      </a:r>
+                      <a:endParaRPr lang="pt-BR" dirty="0"/>
+                    </a:p>
+                  </a:txBody>
+                  <a:tcPr/>
+                </a:tc>
+                <a:tc>
+                  <a:txBody>
+                    <a:bodyPr/>
+                    <a:lstStyle/>
+                    <a:p>
+                      <a:r>
+                        <a:rPr lang="pt-BR" dirty="0" err="1"/>
+                        <a:t>Int</a:t>
+                      </a:r>
+                      <a:endParaRPr lang="pt-BR" dirty="0"/>
+                    </a:p>
+                  </a:txBody>
+                  <a:tcPr/>
+                </a:tc>
+                <a:tc>
+                  <a:txBody>
+                    <a:bodyPr/>
+                    <a:lstStyle/>
+                    <a:p>
+                      <a:r>
+                        <a:rPr lang="pt-BR" dirty="0"/>
+                        <a:t>Chave Primária</a:t>
+                      </a:r>
+                    </a:p>
+                  </a:txBody>
+                  <a:tcPr/>
+                </a:tc>
+                <a:extLst>
+                  <a:ext uri="{0D108BD9-81ED-4DB2-BD59-A6C34878D82A}">
+                    <a16:rowId xmlns:a16="http://schemas.microsoft.com/office/drawing/2014/main" val="1004326904"/>
+                  </a:ext>
+                </a:extLst>
+              </a:tr>
+              <a:tr h="370840">
+                <a:tc>
+                  <a:txBody>
+                    <a:bodyPr/>
+                    <a:lstStyle/>
+                    <a:p>
+                      <a:r>
+                        <a:rPr lang="pt-BR" dirty="0" err="1" smtClean="0"/>
+                        <a:t>Descricao</a:t>
+                      </a:r>
+                      <a:endParaRPr lang="pt-BR" dirty="0"/>
+                    </a:p>
+                  </a:txBody>
+                  <a:tcPr/>
+                </a:tc>
+                <a:tc>
+                  <a:txBody>
+                    <a:bodyPr/>
+                    <a:lstStyle/>
+                    <a:p>
+                      <a:r>
+                        <a:rPr lang="pt-BR" dirty="0" err="1" smtClean="0"/>
+                        <a:t>Varchar</a:t>
+                      </a:r>
+                      <a:r>
+                        <a:rPr lang="pt-BR" dirty="0" smtClean="0"/>
+                        <a:t>(100)</a:t>
+                      </a:r>
+                      <a:endParaRPr lang="pt-BR" dirty="0"/>
+                    </a:p>
+                  </a:txBody>
+                  <a:tcPr/>
+                </a:tc>
+                <a:tc>
+                  <a:txBody>
+                    <a:bodyPr/>
+                    <a:lstStyle/>
+                    <a:p>
+                      <a:endParaRPr lang="pt-BR" dirty="0"/>
+                    </a:p>
+                  </a:txBody>
+                  <a:tcPr/>
+                </a:tc>
+                <a:extLst>
+                  <a:ext uri="{0D108BD9-81ED-4DB2-BD59-A6C34878D82A}">
+                    <a16:rowId xmlns:a16="http://schemas.microsoft.com/office/drawing/2014/main" val="1354368322"/>
+                  </a:ext>
+                </a:extLst>
+              </a:tr>
+              <a:tr h="370840">
+                <a:tc>
+                  <a:txBody>
+                    <a:bodyPr/>
+                    <a:lstStyle/>
+                    <a:p>
+                      <a:r>
+                        <a:rPr lang="pt-BR" dirty="0" err="1" smtClean="0"/>
+                        <a:t>Codigofornecedor</a:t>
+                      </a:r>
+                      <a:endParaRPr lang="pt-BR" dirty="0"/>
+                    </a:p>
+                  </a:txBody>
+                  <a:tcPr/>
+                </a:tc>
+                <a:tc>
+                  <a:txBody>
+                    <a:bodyPr/>
+                    <a:lstStyle/>
+                    <a:p>
+                      <a:r>
+                        <a:rPr lang="pt-BR" dirty="0" err="1" smtClean="0"/>
+                        <a:t>Int</a:t>
+                      </a:r>
+                      <a:endParaRPr lang="pt-BR" dirty="0"/>
+                    </a:p>
+                  </a:txBody>
+                  <a:tcPr/>
+                </a:tc>
+                <a:tc>
+                  <a:txBody>
+                    <a:bodyPr/>
+                    <a:lstStyle/>
+                    <a:p>
+                      <a:r>
+                        <a:rPr lang="pt-BR" dirty="0" smtClean="0"/>
+                        <a:t>Chave estrangeira</a:t>
+                      </a:r>
+                      <a:endParaRPr lang="pt-BR" dirty="0"/>
+                    </a:p>
+                  </a:txBody>
+                  <a:tcPr/>
+                </a:tc>
+                <a:extLst>
+                  <a:ext uri="{0D108BD9-81ED-4DB2-BD59-A6C34878D82A}">
+                    <a16:rowId xmlns:a16="http://schemas.microsoft.com/office/drawing/2014/main" val="275426533"/>
+                  </a:ext>
+                </a:extLst>
+              </a:tr>
+              <a:tr h="370840">
+                <a:tc>
+                  <a:txBody>
+                    <a:bodyPr/>
+                    <a:lstStyle/>
+                    <a:p>
+                      <a:r>
+                        <a:rPr lang="pt-BR" dirty="0" err="1" smtClean="0"/>
+                        <a:t>Itensentrada</a:t>
+                      </a:r>
+                      <a:endParaRPr lang="pt-BR" dirty="0"/>
+                    </a:p>
+                  </a:txBody>
+                  <a:tcPr/>
+                </a:tc>
+                <a:tc>
+                  <a:txBody>
+                    <a:bodyPr/>
+                    <a:lstStyle/>
+                    <a:p>
+                      <a:endParaRPr lang="pt-BR" dirty="0"/>
+                    </a:p>
+                  </a:txBody>
+                  <a:tcPr/>
+                </a:tc>
+                <a:tc>
+                  <a:txBody>
+                    <a:bodyPr/>
+                    <a:lstStyle/>
+                    <a:p>
+                      <a:endParaRPr lang="pt-BR" dirty="0"/>
+                    </a:p>
+                  </a:txBody>
+                  <a:tcPr/>
+                </a:tc>
+                <a:extLst>
+                  <a:ext uri="{0D108BD9-81ED-4DB2-BD59-A6C34878D82A}">
+                    <a16:rowId xmlns:a16="http://schemas.microsoft.com/office/drawing/2014/main" val="2790910923"/>
+                  </a:ext>
+                </a:extLst>
+              </a:tr>
+              <a:tr h="370840">
+                <a:tc>
+                  <a:txBody>
+                    <a:bodyPr/>
+                    <a:lstStyle/>
+                    <a:p>
+                      <a:r>
+                        <a:rPr lang="pt-BR" dirty="0" smtClean="0"/>
+                        <a:t>data</a:t>
+                      </a:r>
+                      <a:endParaRPr lang="pt-BR" dirty="0"/>
+                    </a:p>
+                  </a:txBody>
+                  <a:tcPr/>
+                </a:tc>
+                <a:tc>
+                  <a:txBody>
+                    <a:bodyPr/>
+                    <a:lstStyle/>
+                    <a:p>
+                      <a:r>
+                        <a:rPr lang="pt-BR" dirty="0" err="1" smtClean="0"/>
+                        <a:t>database</a:t>
+                      </a:r>
+                      <a:endParaRPr lang="pt-BR" dirty="0"/>
+                    </a:p>
+                  </a:txBody>
+                  <a:tcPr/>
+                </a:tc>
+                <a:tc>
+                  <a:txBody>
+                    <a:bodyPr/>
+                    <a:lstStyle/>
+                    <a:p>
+                      <a:endParaRPr lang="pt-BR" dirty="0"/>
+                    </a:p>
+                  </a:txBody>
+                  <a:tcPr/>
+                </a:tc>
+                <a:extLst>
+                  <a:ext uri="{0D108BD9-81ED-4DB2-BD59-A6C34878D82A}">
+                    <a16:rowId xmlns:a16="http://schemas.microsoft.com/office/drawing/2014/main" val="1929395480"/>
+                  </a:ext>
+                </a:extLst>
+              </a:tr>
+              <a:tr h="370840">
+                <a:tc>
+                  <a:txBody>
+                    <a:bodyPr/>
+                    <a:lstStyle/>
+                    <a:p>
+                      <a:r>
+                        <a:rPr lang="pt-BR" dirty="0" err="1" smtClean="0"/>
+                        <a:t>horario</a:t>
+                      </a:r>
+                      <a:endParaRPr lang="pt-BR" dirty="0"/>
+                    </a:p>
+                  </a:txBody>
+                  <a:tcPr/>
+                </a:tc>
+                <a:tc>
+                  <a:txBody>
+                    <a:bodyPr/>
+                    <a:lstStyle/>
+                    <a:p>
+                      <a:endParaRPr lang="pt-BR" dirty="0"/>
+                    </a:p>
+                  </a:txBody>
+                  <a:tcPr/>
+                </a:tc>
+                <a:tc>
+                  <a:txBody>
+                    <a:bodyPr/>
+                    <a:lstStyle/>
+                    <a:p>
+                      <a:endParaRPr lang="pt-BR" dirty="0"/>
+                    </a:p>
+                  </a:txBody>
+                  <a:tcPr/>
+                </a:tc>
+                <a:extLst>
+                  <a:ext uri="{0D108BD9-81ED-4DB2-BD59-A6C34878D82A}">
+                    <a16:rowId xmlns:a16="http://schemas.microsoft.com/office/drawing/2014/main" val="2940149528"/>
+                  </a:ext>
+                </a:extLst>
+              </a:tr>
+              <a:tr h="370840">
+                <a:tc>
+                  <a:txBody>
+                    <a:bodyPr/>
+                    <a:lstStyle/>
+                    <a:p>
+                      <a:endParaRPr lang="pt-BR" dirty="0"/>
+                    </a:p>
+                  </a:txBody>
+                  <a:tcPr/>
+                </a:tc>
+                <a:tc>
+                  <a:txBody>
+                    <a:bodyPr/>
+                    <a:lstStyle/>
+                    <a:p>
+                      <a:endParaRPr lang="pt-BR" dirty="0"/>
+                    </a:p>
+                  </a:txBody>
+                  <a:tcPr/>
+                </a:tc>
+                <a:tc>
+                  <a:txBody>
+                    <a:bodyPr/>
+                    <a:lstStyle/>
+                    <a:p>
+                      <a:endParaRPr lang="pt-BR" dirty="0"/>
+                    </a:p>
+                  </a:txBody>
+                  <a:tcPr/>
+                </a:tc>
+                <a:extLst>
+                  <a:ext uri="{0D108BD9-81ED-4DB2-BD59-A6C34878D82A}">
+                    <a16:rowId xmlns:a16="http://schemas.microsoft.com/office/drawing/2014/main" val="1116382274"/>
+                  </a:ext>
+                </a:extLst>
+              </a:tr>
+            </a:tbl>
+          </a:graphicData>
+        </a:graphic>
+      </p:graphicFrame>
+      <p:sp>
+        <p:nvSpPr>
+          <p:cNvPr id="11" name="Título 1">
+            <a:extLst>
+              <a:ext uri="{FF2B5EF4-FFF2-40B4-BE49-F238E27FC236}">
+                <a16:creationId xmlns:a16="http://schemas.microsoft.com/office/drawing/2014/main" id="{0229AC0A-F8EF-158B-5D49-B06E1612EEDE}"/>
               </a:ext>
             </a:extLst>
           </p:cNvPr>
@@ -9930,8 +11864,8 @@
         </p:nvSpPr>
         <p:spPr>
           <a:xfrm>
-            <a:off x="414841" y="-695454"/>
-            <a:ext cx="5916168" cy="1527048"/>
+            <a:off x="468503" y="763524"/>
+            <a:ext cx="10517176" cy="1527048"/>
           </a:xfrm>
           <a:prstGeom prst="rect">
             <a:avLst/>
@@ -9961,17 +11895,36 @@
             </a:lvl1pPr>
           </a:lstStyle>
           <a:p>
-            <a:r>
-              <a:rPr lang="en-US" dirty="0"/>
-              <a:t>Wireframe</a:t>
-            </a:r>
+            <a:pPr>
+              <a:spcBef>
+                <a:spcPts val="2500"/>
+              </a:spcBef>
+            </a:pPr>
+            <a:r>
+              <a:rPr lang="pt-BR" sz="1600" dirty="0">
+                <a:latin typeface="Arial" panose="020B0604020202020204" pitchFamily="34" charset="0"/>
+                <a:cs typeface="Arial" panose="020B0604020202020204" pitchFamily="34" charset="0"/>
+              </a:rPr>
+              <a:t>Tabela </a:t>
+            </a:r>
+            <a:r>
+              <a:rPr lang="pt-BR" sz="1600" dirty="0" smtClean="0">
+                <a:latin typeface="Arial" panose="020B0604020202020204" pitchFamily="34" charset="0"/>
+                <a:cs typeface="Arial" panose="020B0604020202020204" pitchFamily="34" charset="0"/>
+              </a:rPr>
+              <a:t>ENTRADA</a:t>
+            </a:r>
+            <a:endParaRPr lang="pt-BR" sz="1600" dirty="0">
+              <a:latin typeface="Arial" panose="020B0604020202020204" pitchFamily="34" charset="0"/>
+              <a:cs typeface="Arial" panose="020B0604020202020204" pitchFamily="34" charset="0"/>
+            </a:endParaRPr>
           </a:p>
         </p:txBody>
       </p:sp>
     </p:spTree>
     <p:extLst>
       <p:ext uri="{BB962C8B-B14F-4D97-AF65-F5344CB8AC3E}">
-        <p14:creationId xmlns:p14="http://schemas.microsoft.com/office/powerpoint/2010/main" val="1037557683"/>
+        <p14:creationId xmlns:p14="http://schemas.microsoft.com/office/powerpoint/2010/main" val="1106775319"/>
       </p:ext>
     </p:extLst>
   </p:cSld>
@@ -9981,6 +11934,13 @@
   <p:transition>
     <p:fade/>
   </p:transition>
+  <p:timing>
+    <p:tnLst>
+      <p:par>
+        <p:cTn id="1" dur="indefinite" restart="never" nodeType="tmRoot"/>
+      </p:par>
+    </p:tnLst>
+  </p:timing>
 </p:sld>
 </file>
 
@@ -10017,7 +11977,7 @@
                 <a16:creationId xmlns:a16="http://schemas.microsoft.com/office/drawing/2014/main" id="{5E8D3B17-7638-DFD3-18E4-8A6D611749CF}"/>
               </a:ext>
               <a:ext uri="{C183D7F6-B498-43B3-948B-1728B52AA6E4}">
-                <adec:decorative xmlns="" xmlns:adec="http://schemas.microsoft.com/office/drawing/2017/decorative" val="1"/>
+                <adec:decorative xmlns:adec="http://schemas.microsoft.com/office/drawing/2017/decorative" xmlns="" val="1"/>
               </a:ext>
             </a:extLst>
           </p:cNvPr>
@@ -10090,7 +12050,7 @@
           <p:cNvPr id="2" name="Título 1">
             <a:extLst>
               <a:ext uri="{FF2B5EF4-FFF2-40B4-BE49-F238E27FC236}">
-                <a16:creationId xmlns:a16="http://schemas.microsoft.com/office/drawing/2014/main" id="{52C8C7F8-6A55-1DF8-3A33-F776C9F854B3}"/>
+                <a16:creationId xmlns:a16="http://schemas.microsoft.com/office/drawing/2014/main" id="{D4CDB794-FD66-B57C-5DB2-D14CF7301A4E}"/>
               </a:ext>
             </a:extLst>
           </p:cNvPr>
@@ -10103,8 +12063,8 @@
         </p:nvSpPr>
         <p:spPr>
           <a:xfrm>
-            <a:off x="2917771" y="-695454"/>
-            <a:ext cx="5916168" cy="1527048"/>
+            <a:off x="1022295" y="2665927"/>
+            <a:ext cx="5916168" cy="919938"/>
           </a:xfrm>
         </p:spPr>
         <p:txBody>
@@ -10114,39 +12074,10 @@
           <a:lstStyle/>
           <a:p>
             <a:r>
-              <a:rPr lang="en-US" b="0" kern="1200" dirty="0" err="1" smtClean="0">
-                <a:solidFill>
-                  <a:schemeClr val="tx1"/>
-                </a:solidFill>
-                <a:latin typeface="+mj-lt"/>
-                <a:ea typeface="+mj-ea"/>
-                <a:cs typeface="+mj-cs"/>
-              </a:rPr>
-              <a:t>Tela</a:t>
-            </a:r>
-            <a:r>
-              <a:rPr lang="en-US" b="0" kern="1200" dirty="0" smtClean="0">
-                <a:solidFill>
-                  <a:schemeClr val="tx1"/>
-                </a:solidFill>
-                <a:latin typeface="+mj-lt"/>
-                <a:ea typeface="+mj-ea"/>
-                <a:cs typeface="+mj-cs"/>
-              </a:rPr>
-              <a:t> </a:t>
-            </a:r>
-            <a:r>
-              <a:rPr lang="en-US" b="0" kern="1200" dirty="0" err="1" smtClean="0">
-                <a:solidFill>
-                  <a:schemeClr val="tx1"/>
-                </a:solidFill>
-                <a:latin typeface="+mj-lt"/>
-                <a:ea typeface="+mj-ea"/>
-                <a:cs typeface="+mj-cs"/>
-              </a:rPr>
-              <a:t>Produto</a:t>
-            </a:r>
-            <a:endParaRPr lang="en-US" b="0" kern="1200" dirty="0">
+              <a:rPr lang="en-US" dirty="0"/>
+              <a:t>Wireframe</a:t>
+            </a:r>
+            <a:endParaRPr lang="en-US" b="1" kern="1200" dirty="0">
               <a:solidFill>
                 <a:schemeClr val="tx1"/>
               </a:solidFill>
@@ -10157,688 +12088,10 @@
           </a:p>
         </p:txBody>
       </p:sp>
-      <p:sp>
-        <p:nvSpPr>
-          <p:cNvPr id="7" name="Título 1">
-            <a:extLst>
-              <a:ext uri="{FF2B5EF4-FFF2-40B4-BE49-F238E27FC236}">
-                <a16:creationId xmlns:a16="http://schemas.microsoft.com/office/drawing/2014/main" id="{F08859EF-E25E-52C0-C024-DE22738F8749}"/>
-              </a:ext>
-            </a:extLst>
-          </p:cNvPr>
-          <p:cNvSpPr txBox="1">
-            <a:spLocks/>
-          </p:cNvSpPr>
-          <p:nvPr/>
-        </p:nvSpPr>
-        <p:spPr>
-          <a:xfrm>
-            <a:off x="414841" y="-695454"/>
-            <a:ext cx="5916168" cy="1527048"/>
-          </a:xfrm>
-          <a:prstGeom prst="rect">
-            <a:avLst/>
-          </a:prstGeom>
-        </p:spPr>
-        <p:txBody>
-          <a:bodyPr vert="horz" lIns="91440" tIns="45720" rIns="91440" bIns="45720" rtlCol="0" anchor="b">
-            <a:normAutofit/>
-          </a:bodyPr>
-          <a:lstStyle>
-            <a:lvl1pPr algn="l" defTabSz="914400" rtl="0" eaLnBrk="1" latinLnBrk="0" hangingPunct="1">
-              <a:lnSpc>
-                <a:spcPct val="90000"/>
-              </a:lnSpc>
-              <a:spcBef>
-                <a:spcPct val="0"/>
-              </a:spcBef>
-              <a:buNone/>
-              <a:defRPr sz="3600" b="1" kern="1200">
-                <a:solidFill>
-                  <a:schemeClr val="tx1"/>
-                </a:solidFill>
-                <a:latin typeface="+mj-lt"/>
-                <a:ea typeface="+mj-ea"/>
-                <a:cs typeface="+mj-cs"/>
-              </a:defRPr>
-            </a:lvl1pPr>
-          </a:lstStyle>
-          <a:p>
-            <a:r>
-              <a:rPr lang="en-US" dirty="0"/>
-              <a:t>Wireframe</a:t>
-            </a:r>
-          </a:p>
-        </p:txBody>
-      </p:sp>
-      <p:sp>
-        <p:nvSpPr>
-          <p:cNvPr id="4" name="Retângulo 3"/>
-          <p:cNvSpPr/>
-          <p:nvPr/>
-        </p:nvSpPr>
-        <p:spPr>
-          <a:xfrm>
-            <a:off x="1044222" y="1224844"/>
-            <a:ext cx="10193866" cy="5317067"/>
-          </a:xfrm>
-          <a:prstGeom prst="rect">
-            <a:avLst/>
-          </a:prstGeom>
-        </p:spPr>
-        <p:style>
-          <a:lnRef idx="2">
-            <a:schemeClr val="accent1"/>
-          </a:lnRef>
-          <a:fillRef idx="1">
-            <a:schemeClr val="lt1"/>
-          </a:fillRef>
-          <a:effectRef idx="0">
-            <a:schemeClr val="accent1"/>
-          </a:effectRef>
-          <a:fontRef idx="minor">
-            <a:schemeClr val="dk1"/>
-          </a:fontRef>
-        </p:style>
-        <p:txBody>
-          <a:bodyPr rtlCol="0" anchor="ctr"/>
-          <a:lstStyle/>
-          <a:p>
-            <a:pPr algn="ctr"/>
-            <a:endParaRPr lang="pt-BR" dirty="0"/>
-          </a:p>
-        </p:txBody>
-      </p:sp>
-      <p:sp>
-        <p:nvSpPr>
-          <p:cNvPr id="8" name="Retângulo 7"/>
-          <p:cNvSpPr/>
-          <p:nvPr/>
-        </p:nvSpPr>
-        <p:spPr>
-          <a:xfrm>
-            <a:off x="1044222" y="1224844"/>
-            <a:ext cx="10193866" cy="389467"/>
-          </a:xfrm>
-          <a:prstGeom prst="rect">
-            <a:avLst/>
-          </a:prstGeom>
-        </p:spPr>
-        <p:style>
-          <a:lnRef idx="2">
-            <a:schemeClr val="accent6"/>
-          </a:lnRef>
-          <a:fillRef idx="1">
-            <a:schemeClr val="lt1"/>
-          </a:fillRef>
-          <a:effectRef idx="0">
-            <a:schemeClr val="accent6"/>
-          </a:effectRef>
-          <a:fontRef idx="minor">
-            <a:schemeClr val="dk1"/>
-          </a:fontRef>
-        </p:style>
-        <p:txBody>
-          <a:bodyPr rtlCol="0" anchor="ctr"/>
-          <a:lstStyle/>
-          <a:p>
-            <a:pPr algn="ctr"/>
-            <a:endParaRPr lang="pt-BR" dirty="0"/>
-          </a:p>
-        </p:txBody>
-      </p:sp>
-      <p:sp>
-        <p:nvSpPr>
-          <p:cNvPr id="6" name="Elipse 5"/>
-          <p:cNvSpPr/>
-          <p:nvPr/>
-        </p:nvSpPr>
-        <p:spPr>
-          <a:xfrm>
-            <a:off x="10803466" y="1255888"/>
-            <a:ext cx="293511" cy="302204"/>
-          </a:xfrm>
-          <a:prstGeom prst="ellipse">
-            <a:avLst/>
-          </a:prstGeom>
-        </p:spPr>
-        <p:style>
-          <a:lnRef idx="2">
-            <a:schemeClr val="accent3">
-              <a:shade val="50000"/>
-            </a:schemeClr>
-          </a:lnRef>
-          <a:fillRef idx="1">
-            <a:schemeClr val="accent3"/>
-          </a:fillRef>
-          <a:effectRef idx="0">
-            <a:schemeClr val="accent3"/>
-          </a:effectRef>
-          <a:fontRef idx="minor">
-            <a:schemeClr val="lt1"/>
-          </a:fontRef>
-        </p:style>
-        <p:txBody>
-          <a:bodyPr rtlCol="0" anchor="ctr"/>
-          <a:lstStyle/>
-          <a:p>
-            <a:pPr algn="ctr"/>
-            <a:r>
-              <a:rPr lang="pt-BR" dirty="0" smtClean="0"/>
-              <a:t>x</a:t>
-            </a:r>
-            <a:endParaRPr lang="pt-BR" dirty="0"/>
-          </a:p>
-        </p:txBody>
-      </p:sp>
-      <p:sp>
-        <p:nvSpPr>
-          <p:cNvPr id="11" name="Retângulo 10"/>
-          <p:cNvSpPr/>
-          <p:nvPr/>
-        </p:nvSpPr>
-        <p:spPr>
-          <a:xfrm>
-            <a:off x="2689946" y="2201558"/>
-            <a:ext cx="1735298" cy="389467"/>
-          </a:xfrm>
-          <a:prstGeom prst="rect">
-            <a:avLst/>
-          </a:prstGeom>
-          <a:solidFill>
-            <a:schemeClr val="bg1">
-              <a:lumMod val="85000"/>
-            </a:schemeClr>
-          </a:solidFill>
-        </p:spPr>
-        <p:style>
-          <a:lnRef idx="2">
-            <a:schemeClr val="accent6"/>
-          </a:lnRef>
-          <a:fillRef idx="1">
-            <a:schemeClr val="lt1"/>
-          </a:fillRef>
-          <a:effectRef idx="0">
-            <a:schemeClr val="accent6"/>
-          </a:effectRef>
-          <a:fontRef idx="minor">
-            <a:schemeClr val="dk1"/>
-          </a:fontRef>
-        </p:style>
-        <p:txBody>
-          <a:bodyPr rtlCol="0" anchor="ctr"/>
-          <a:lstStyle/>
-          <a:p>
-            <a:pPr algn="ctr"/>
-            <a:endParaRPr lang="pt-BR" dirty="0"/>
-          </a:p>
-        </p:txBody>
-      </p:sp>
-      <p:sp>
-        <p:nvSpPr>
-          <p:cNvPr id="12" name="Título 1">
-            <a:extLst>
-              <a:ext uri="{FF2B5EF4-FFF2-40B4-BE49-F238E27FC236}">
-                <a16:creationId xmlns:a16="http://schemas.microsoft.com/office/drawing/2014/main" id="{52C8C7F8-6A55-1DF8-3A33-F776C9F854B3}"/>
-              </a:ext>
-            </a:extLst>
-          </p:cNvPr>
-          <p:cNvSpPr txBox="1">
-            <a:spLocks/>
-          </p:cNvSpPr>
-          <p:nvPr/>
-        </p:nvSpPr>
-        <p:spPr>
-          <a:xfrm>
-            <a:off x="1557459" y="1063977"/>
-            <a:ext cx="5916168" cy="1527048"/>
-          </a:xfrm>
-          <a:prstGeom prst="rect">
-            <a:avLst/>
-          </a:prstGeom>
-        </p:spPr>
-        <p:txBody>
-          <a:bodyPr vert="horz" lIns="91440" tIns="45720" rIns="91440" bIns="45720" rtlCol="0" anchor="b">
-            <a:normAutofit/>
-          </a:bodyPr>
-          <a:lstStyle>
-            <a:lvl1pPr algn="l" defTabSz="914400" rtl="0" eaLnBrk="1" latinLnBrk="0" hangingPunct="1">
-              <a:lnSpc>
-                <a:spcPct val="90000"/>
-              </a:lnSpc>
-              <a:spcBef>
-                <a:spcPct val="0"/>
-              </a:spcBef>
-              <a:buNone/>
-              <a:defRPr sz="3600" b="1" kern="1200">
-                <a:solidFill>
-                  <a:schemeClr val="tx1"/>
-                </a:solidFill>
-                <a:latin typeface="+mj-lt"/>
-                <a:ea typeface="+mj-ea"/>
-                <a:cs typeface="+mj-cs"/>
-              </a:defRPr>
-            </a:lvl1pPr>
-          </a:lstStyle>
-          <a:p>
-            <a:r>
-              <a:rPr lang="en-US" sz="2000" b="0" dirty="0" err="1" smtClean="0"/>
-              <a:t>Código</a:t>
-            </a:r>
-            <a:endParaRPr lang="en-US" sz="2000" b="0" dirty="0"/>
-          </a:p>
-        </p:txBody>
-      </p:sp>
-      <p:sp>
-        <p:nvSpPr>
-          <p:cNvPr id="13" name="Título 1">
-            <a:extLst>
-              <a:ext uri="{FF2B5EF4-FFF2-40B4-BE49-F238E27FC236}">
-                <a16:creationId xmlns:a16="http://schemas.microsoft.com/office/drawing/2014/main" id="{52C8C7F8-6A55-1DF8-3A33-F776C9F854B3}"/>
-              </a:ext>
-            </a:extLst>
-          </p:cNvPr>
-          <p:cNvSpPr txBox="1">
-            <a:spLocks/>
-          </p:cNvSpPr>
-          <p:nvPr/>
-        </p:nvSpPr>
-        <p:spPr>
-          <a:xfrm>
-            <a:off x="1286538" y="2580272"/>
-            <a:ext cx="5916168" cy="550334"/>
-          </a:xfrm>
-          <a:prstGeom prst="rect">
-            <a:avLst/>
-          </a:prstGeom>
-        </p:spPr>
-        <p:txBody>
-          <a:bodyPr vert="horz" lIns="91440" tIns="45720" rIns="91440" bIns="45720" rtlCol="0" anchor="b">
-            <a:normAutofit/>
-          </a:bodyPr>
-          <a:lstStyle>
-            <a:lvl1pPr algn="l" defTabSz="914400" rtl="0" eaLnBrk="1" latinLnBrk="0" hangingPunct="1">
-              <a:lnSpc>
-                <a:spcPct val="90000"/>
-              </a:lnSpc>
-              <a:spcBef>
-                <a:spcPct val="0"/>
-              </a:spcBef>
-              <a:buNone/>
-              <a:defRPr sz="3600" b="1" kern="1200">
-                <a:solidFill>
-                  <a:schemeClr val="tx1"/>
-                </a:solidFill>
-                <a:latin typeface="+mj-lt"/>
-                <a:ea typeface="+mj-ea"/>
-                <a:cs typeface="+mj-cs"/>
-              </a:defRPr>
-            </a:lvl1pPr>
-          </a:lstStyle>
-          <a:p>
-            <a:r>
-              <a:rPr lang="en-US" sz="2000" b="0" dirty="0" err="1" smtClean="0"/>
-              <a:t>Descrição</a:t>
-            </a:r>
-            <a:endParaRPr lang="en-US" sz="2000" b="0" dirty="0"/>
-          </a:p>
-        </p:txBody>
-      </p:sp>
-      <p:sp>
-        <p:nvSpPr>
-          <p:cNvPr id="14" name="Retângulo 13"/>
-          <p:cNvSpPr/>
-          <p:nvPr/>
-        </p:nvSpPr>
-        <p:spPr>
-          <a:xfrm>
-            <a:off x="2689945" y="2730386"/>
-            <a:ext cx="5325165" cy="389467"/>
-          </a:xfrm>
-          <a:prstGeom prst="rect">
-            <a:avLst/>
-          </a:prstGeom>
-          <a:solidFill>
-            <a:srgbClr val="92D050"/>
-          </a:solidFill>
-        </p:spPr>
-        <p:style>
-          <a:lnRef idx="2">
-            <a:schemeClr val="accent1">
-              <a:shade val="50000"/>
-            </a:schemeClr>
-          </a:lnRef>
-          <a:fillRef idx="1">
-            <a:schemeClr val="accent1"/>
-          </a:fillRef>
-          <a:effectRef idx="0">
-            <a:schemeClr val="accent1"/>
-          </a:effectRef>
-          <a:fontRef idx="minor">
-            <a:schemeClr val="lt1"/>
-          </a:fontRef>
-        </p:style>
-        <p:txBody>
-          <a:bodyPr rtlCol="0" anchor="ctr"/>
-          <a:lstStyle/>
-          <a:p>
-            <a:r>
-              <a:rPr lang="pt-BR" dirty="0" smtClean="0"/>
-              <a:t>Café </a:t>
-            </a:r>
-            <a:r>
-              <a:rPr lang="pt-BR" dirty="0" err="1" smtClean="0"/>
-              <a:t>Estan</a:t>
-            </a:r>
-            <a:endParaRPr lang="pt-BR" dirty="0"/>
-          </a:p>
-        </p:txBody>
-      </p:sp>
-      <p:sp>
-        <p:nvSpPr>
-          <p:cNvPr id="15" name="Título 1">
-            <a:extLst>
-              <a:ext uri="{FF2B5EF4-FFF2-40B4-BE49-F238E27FC236}">
-                <a16:creationId xmlns:a16="http://schemas.microsoft.com/office/drawing/2014/main" id="{52C8C7F8-6A55-1DF8-3A33-F776C9F854B3}"/>
-              </a:ext>
-            </a:extLst>
-          </p:cNvPr>
-          <p:cNvSpPr txBox="1">
-            <a:spLocks/>
-          </p:cNvSpPr>
-          <p:nvPr/>
-        </p:nvSpPr>
-        <p:spPr>
-          <a:xfrm>
-            <a:off x="1467160" y="3119853"/>
-            <a:ext cx="5916168" cy="550334"/>
-          </a:xfrm>
-          <a:prstGeom prst="rect">
-            <a:avLst/>
-          </a:prstGeom>
-        </p:spPr>
-        <p:txBody>
-          <a:bodyPr vert="horz" lIns="91440" tIns="45720" rIns="91440" bIns="45720" rtlCol="0" anchor="b">
-            <a:normAutofit/>
-          </a:bodyPr>
-          <a:lstStyle>
-            <a:lvl1pPr algn="l" defTabSz="914400" rtl="0" eaLnBrk="1" latinLnBrk="0" hangingPunct="1">
-              <a:lnSpc>
-                <a:spcPct val="90000"/>
-              </a:lnSpc>
-              <a:spcBef>
-                <a:spcPct val="0"/>
-              </a:spcBef>
-              <a:buNone/>
-              <a:defRPr sz="3600" b="1" kern="1200">
-                <a:solidFill>
-                  <a:schemeClr val="tx1"/>
-                </a:solidFill>
-                <a:latin typeface="+mj-lt"/>
-                <a:ea typeface="+mj-ea"/>
-                <a:cs typeface="+mj-cs"/>
-              </a:defRPr>
-            </a:lvl1pPr>
-          </a:lstStyle>
-          <a:p>
-            <a:r>
-              <a:rPr lang="en-US" sz="2000" b="0" dirty="0" err="1" smtClean="0"/>
-              <a:t>Unidade</a:t>
-            </a:r>
-            <a:endParaRPr lang="en-US" sz="2000" b="0" dirty="0"/>
-          </a:p>
-        </p:txBody>
-      </p:sp>
-      <p:sp>
-        <p:nvSpPr>
-          <p:cNvPr id="16" name="Retângulo 15"/>
-          <p:cNvSpPr/>
-          <p:nvPr/>
-        </p:nvSpPr>
-        <p:spPr>
-          <a:xfrm>
-            <a:off x="2689946" y="3265308"/>
-            <a:ext cx="1735298" cy="389467"/>
-          </a:xfrm>
-          <a:prstGeom prst="rect">
-            <a:avLst/>
-          </a:prstGeom>
-          <a:solidFill>
-            <a:schemeClr val="bg1"/>
-          </a:solidFill>
-        </p:spPr>
-        <p:style>
-          <a:lnRef idx="2">
-            <a:schemeClr val="accent6"/>
-          </a:lnRef>
-          <a:fillRef idx="1">
-            <a:schemeClr val="lt1"/>
-          </a:fillRef>
-          <a:effectRef idx="0">
-            <a:schemeClr val="accent6"/>
-          </a:effectRef>
-          <a:fontRef idx="minor">
-            <a:schemeClr val="dk1"/>
-          </a:fontRef>
-        </p:style>
-        <p:txBody>
-          <a:bodyPr rtlCol="0" anchor="ctr"/>
-          <a:lstStyle/>
-          <a:p>
-            <a:pPr algn="ctr"/>
-            <a:endParaRPr lang="pt-BR" dirty="0"/>
-          </a:p>
-        </p:txBody>
-      </p:sp>
-      <p:sp>
-        <p:nvSpPr>
-          <p:cNvPr id="9" name="Triângulo isósceles 8"/>
-          <p:cNvSpPr/>
-          <p:nvPr/>
-        </p:nvSpPr>
-        <p:spPr>
-          <a:xfrm rot="10800000">
-            <a:off x="4188178" y="3318281"/>
-            <a:ext cx="237066" cy="283520"/>
-          </a:xfrm>
-          <a:prstGeom prst="triangle">
-            <a:avLst/>
-          </a:prstGeom>
-        </p:spPr>
-        <p:style>
-          <a:lnRef idx="2">
-            <a:schemeClr val="dk1">
-              <a:shade val="50000"/>
-            </a:schemeClr>
-          </a:lnRef>
-          <a:fillRef idx="1">
-            <a:schemeClr val="dk1"/>
-          </a:fillRef>
-          <a:effectRef idx="0">
-            <a:schemeClr val="dk1"/>
-          </a:effectRef>
-          <a:fontRef idx="minor">
-            <a:schemeClr val="lt1"/>
-          </a:fontRef>
-        </p:style>
-        <p:txBody>
-          <a:bodyPr rtlCol="0" anchor="ctr"/>
-          <a:lstStyle/>
-          <a:p>
-            <a:pPr algn="ctr"/>
-            <a:endParaRPr lang="pt-BR"/>
-          </a:p>
-        </p:txBody>
-      </p:sp>
-      <p:sp>
-        <p:nvSpPr>
-          <p:cNvPr id="17" name="Retângulo Arredondado 16"/>
-          <p:cNvSpPr/>
-          <p:nvPr/>
-        </p:nvSpPr>
-        <p:spPr>
-          <a:xfrm>
-            <a:off x="6953249" y="5048250"/>
-            <a:ext cx="1190625" cy="314325"/>
-          </a:xfrm>
-          <a:prstGeom prst="roundRect">
-            <a:avLst/>
-          </a:prstGeom>
-        </p:spPr>
-        <p:style>
-          <a:lnRef idx="2">
-            <a:schemeClr val="accent1">
-              <a:shade val="50000"/>
-            </a:schemeClr>
-          </a:lnRef>
-          <a:fillRef idx="1">
-            <a:schemeClr val="accent1"/>
-          </a:fillRef>
-          <a:effectRef idx="0">
-            <a:schemeClr val="accent1"/>
-          </a:effectRef>
-          <a:fontRef idx="minor">
-            <a:schemeClr val="lt1"/>
-          </a:fontRef>
-        </p:style>
-        <p:txBody>
-          <a:bodyPr rtlCol="0" anchor="ctr"/>
-          <a:lstStyle/>
-          <a:p>
-            <a:pPr algn="ctr"/>
-            <a:r>
-              <a:rPr lang="pt-BR" dirty="0" smtClean="0"/>
-              <a:t>Salvar</a:t>
-            </a:r>
-            <a:endParaRPr lang="pt-BR" dirty="0"/>
-          </a:p>
-        </p:txBody>
-      </p:sp>
-      <p:sp>
-        <p:nvSpPr>
-          <p:cNvPr id="18" name="Retângulo Arredondado 17"/>
-          <p:cNvSpPr/>
-          <p:nvPr/>
-        </p:nvSpPr>
-        <p:spPr>
-          <a:xfrm>
-            <a:off x="5735696" y="5048249"/>
-            <a:ext cx="1190625" cy="314325"/>
-          </a:xfrm>
-          <a:prstGeom prst="roundRect">
-            <a:avLst/>
-          </a:prstGeom>
-        </p:spPr>
-        <p:style>
-          <a:lnRef idx="2">
-            <a:schemeClr val="accent3">
-              <a:shade val="50000"/>
-            </a:schemeClr>
-          </a:lnRef>
-          <a:fillRef idx="1">
-            <a:schemeClr val="accent3"/>
-          </a:fillRef>
-          <a:effectRef idx="0">
-            <a:schemeClr val="accent3"/>
-          </a:effectRef>
-          <a:fontRef idx="minor">
-            <a:schemeClr val="lt1"/>
-          </a:fontRef>
-        </p:style>
-        <p:txBody>
-          <a:bodyPr rtlCol="0" anchor="ctr"/>
-          <a:lstStyle/>
-          <a:p>
-            <a:pPr algn="ctr"/>
-            <a:r>
-              <a:rPr lang="pt-BR" dirty="0" smtClean="0"/>
-              <a:t>Cancelar</a:t>
-            </a:r>
-            <a:endParaRPr lang="pt-BR" dirty="0"/>
-          </a:p>
-        </p:txBody>
-      </p:sp>
-      <p:sp>
-        <p:nvSpPr>
-          <p:cNvPr id="19" name="Retângulo Arredondado 18"/>
-          <p:cNvSpPr/>
-          <p:nvPr/>
-        </p:nvSpPr>
-        <p:spPr>
-          <a:xfrm>
-            <a:off x="4425244" y="5048248"/>
-            <a:ext cx="1190625" cy="314325"/>
-          </a:xfrm>
-          <a:prstGeom prst="roundRect">
-            <a:avLst/>
-          </a:prstGeom>
-          <a:solidFill>
-            <a:srgbClr val="00B0F0"/>
-          </a:solidFill>
-        </p:spPr>
-        <p:style>
-          <a:lnRef idx="2">
-            <a:schemeClr val="accent1">
-              <a:shade val="50000"/>
-            </a:schemeClr>
-          </a:lnRef>
-          <a:fillRef idx="1">
-            <a:schemeClr val="accent1"/>
-          </a:fillRef>
-          <a:effectRef idx="0">
-            <a:schemeClr val="accent1"/>
-          </a:effectRef>
-          <a:fontRef idx="minor">
-            <a:schemeClr val="lt1"/>
-          </a:fontRef>
-        </p:style>
-        <p:txBody>
-          <a:bodyPr rtlCol="0" anchor="ctr"/>
-          <a:lstStyle/>
-          <a:p>
-            <a:pPr algn="ctr"/>
-            <a:r>
-              <a:rPr lang="pt-BR" dirty="0" smtClean="0"/>
-              <a:t>Voltar</a:t>
-            </a:r>
-            <a:endParaRPr lang="pt-BR" dirty="0"/>
-          </a:p>
-        </p:txBody>
-      </p:sp>
-      <p:sp>
-        <p:nvSpPr>
-          <p:cNvPr id="21" name="CaixaDeTexto 20"/>
-          <p:cNvSpPr txBox="1"/>
-          <p:nvPr/>
-        </p:nvSpPr>
-        <p:spPr>
-          <a:xfrm>
-            <a:off x="9415640" y="3205335"/>
-            <a:ext cx="1781175" cy="1169551"/>
-          </a:xfrm>
-          <a:prstGeom prst="rect">
-            <a:avLst/>
-          </a:prstGeom>
-          <a:noFill/>
-        </p:spPr>
-        <p:txBody>
-          <a:bodyPr wrap="square" rtlCol="0">
-            <a:spAutoFit/>
-          </a:bodyPr>
-          <a:lstStyle/>
-          <a:p>
-            <a:r>
-              <a:rPr lang="pt-BR" sz="1400" dirty="0" smtClean="0"/>
-              <a:t>Quando em modo edição e o cursor estiver no campo o fundo deve ficar verde.</a:t>
-            </a:r>
-            <a:endParaRPr lang="pt-BR" sz="1400" dirty="0"/>
-          </a:p>
-        </p:txBody>
-      </p:sp>
     </p:spTree>
     <p:extLst>
       <p:ext uri="{BB962C8B-B14F-4D97-AF65-F5344CB8AC3E}">
-        <p14:creationId xmlns:p14="http://schemas.microsoft.com/office/powerpoint/2010/main" val="1636696538"/>
+        <p14:creationId xmlns:p14="http://schemas.microsoft.com/office/powerpoint/2010/main" val="827370966"/>
       </p:ext>
     </p:extLst>
   </p:cSld>
@@ -10884,7 +12137,7 @@
                 <a16:creationId xmlns:a16="http://schemas.microsoft.com/office/drawing/2014/main" id="{5E8D3B17-7638-DFD3-18E4-8A6D611749CF}"/>
               </a:ext>
               <a:ext uri="{C183D7F6-B498-43B3-948B-1728B52AA6E4}">
-                <adec:decorative xmlns="" xmlns:adec="http://schemas.microsoft.com/office/drawing/2017/decorative" val="1"/>
+                <adec:decorative xmlns:adec="http://schemas.microsoft.com/office/drawing/2017/decorative" xmlns="" val="1"/>
               </a:ext>
             </a:extLst>
           </p:cNvPr>
@@ -10952,12 +12205,43 @@
           </a:p>
         </p:txBody>
       </p:sp>
+      <p:pic>
+        <p:nvPicPr>
+          <p:cNvPr id="5" name="Espaço Reservado para Conteúdo 4" descr="Formulário web de login">
+            <a:extLst>
+              <a:ext uri="{FF2B5EF4-FFF2-40B4-BE49-F238E27FC236}">
+                <a16:creationId xmlns:a16="http://schemas.microsoft.com/office/drawing/2014/main" id="{9574661C-9C71-44C7-9C38-D5812FB73B79}"/>
+              </a:ext>
+            </a:extLst>
+          </p:cNvPr>
+          <p:cNvPicPr>
+            <a:picLocks noGrp="1" noChangeAspect="1"/>
+          </p:cNvPicPr>
+          <p:nvPr>
+            <p:ph sz="half" idx="1"/>
+          </p:nvPr>
+        </p:nvPicPr>
+        <p:blipFill>
+          <a:blip r:embed="rId3"/>
+          <a:srcRect l="27263" r="22617" b="1"/>
+          <a:stretch/>
+        </p:blipFill>
+        <p:spPr>
+          <a:xfrm>
+            <a:off x="1403817" y="1133346"/>
+            <a:ext cx="3748431" cy="5235252"/>
+          </a:xfrm>
+          <a:prstGeom prst="rect">
+            <a:avLst/>
+          </a:prstGeom>
+        </p:spPr>
+      </p:pic>
       <p:sp>
         <p:nvSpPr>
           <p:cNvPr id="2" name="Título 1">
             <a:extLst>
               <a:ext uri="{FF2B5EF4-FFF2-40B4-BE49-F238E27FC236}">
-                <a16:creationId xmlns:a16="http://schemas.microsoft.com/office/drawing/2014/main" id="{37D9284D-EDF1-4C67-C63F-C7E773F77885}"/>
+                <a16:creationId xmlns:a16="http://schemas.microsoft.com/office/drawing/2014/main" id="{52C8C7F8-6A55-1DF8-3A33-F776C9F854B3}"/>
               </a:ext>
             </a:extLst>
           </p:cNvPr>
@@ -10970,8 +12254,252 @@
         </p:nvSpPr>
         <p:spPr>
           <a:xfrm>
-            <a:off x="803353" y="138594"/>
-            <a:ext cx="10336871" cy="1527048"/>
+            <a:off x="5209415" y="218946"/>
+            <a:ext cx="5916168" cy="1527048"/>
+          </a:xfrm>
+        </p:spPr>
+        <p:txBody>
+          <a:bodyPr vert="horz" lIns="91440" tIns="45720" rIns="91440" bIns="45720" rtlCol="0" anchor="b">
+            <a:normAutofit/>
+          </a:bodyPr>
+          <a:lstStyle/>
+          <a:p>
+            <a:r>
+              <a:rPr lang="en-US" b="0" kern="1200" dirty="0">
+                <a:solidFill>
+                  <a:schemeClr val="tx1"/>
+                </a:solidFill>
+                <a:latin typeface="+mj-lt"/>
+                <a:ea typeface="+mj-ea"/>
+                <a:cs typeface="+mj-cs"/>
+              </a:rPr>
+              <a:t>Tela de Login</a:t>
+            </a:r>
+          </a:p>
+        </p:txBody>
+      </p:sp>
+      <p:sp>
+        <p:nvSpPr>
+          <p:cNvPr id="7" name="Título 1">
+            <a:extLst>
+              <a:ext uri="{FF2B5EF4-FFF2-40B4-BE49-F238E27FC236}">
+                <a16:creationId xmlns:a16="http://schemas.microsoft.com/office/drawing/2014/main" id="{F08859EF-E25E-52C0-C024-DE22738F8749}"/>
+              </a:ext>
+            </a:extLst>
+          </p:cNvPr>
+          <p:cNvSpPr txBox="1">
+            <a:spLocks/>
+          </p:cNvSpPr>
+          <p:nvPr/>
+        </p:nvSpPr>
+        <p:spPr>
+          <a:xfrm>
+            <a:off x="414841" y="-695454"/>
+            <a:ext cx="5916168" cy="1527048"/>
+          </a:xfrm>
+          <a:prstGeom prst="rect">
+            <a:avLst/>
+          </a:prstGeom>
+        </p:spPr>
+        <p:txBody>
+          <a:bodyPr vert="horz" lIns="91440" tIns="45720" rIns="91440" bIns="45720" rtlCol="0" anchor="b">
+            <a:normAutofit/>
+          </a:bodyPr>
+          <a:lstStyle>
+            <a:lvl1pPr algn="l" defTabSz="914400" rtl="0" eaLnBrk="1" latinLnBrk="0" hangingPunct="1">
+              <a:lnSpc>
+                <a:spcPct val="90000"/>
+              </a:lnSpc>
+              <a:spcBef>
+                <a:spcPct val="0"/>
+              </a:spcBef>
+              <a:buNone/>
+              <a:defRPr sz="3600" b="1" kern="1200">
+                <a:solidFill>
+                  <a:schemeClr val="tx1"/>
+                </a:solidFill>
+                <a:latin typeface="+mj-lt"/>
+                <a:ea typeface="+mj-ea"/>
+                <a:cs typeface="+mj-cs"/>
+              </a:defRPr>
+            </a:lvl1pPr>
+          </a:lstStyle>
+          <a:p>
+            <a:r>
+              <a:rPr lang="en-US" dirty="0"/>
+              <a:t>Wireframe</a:t>
+            </a:r>
+          </a:p>
+        </p:txBody>
+      </p:sp>
+    </p:spTree>
+    <p:extLst>
+      <p:ext uri="{BB962C8B-B14F-4D97-AF65-F5344CB8AC3E}">
+        <p14:creationId xmlns:p14="http://schemas.microsoft.com/office/powerpoint/2010/main" val="1037557683"/>
+      </p:ext>
+    </p:extLst>
+  </p:cSld>
+  <p:clrMapOvr>
+    <a:masterClrMapping/>
+  </p:clrMapOvr>
+  <p:transition>
+    <p:fade/>
+  </p:transition>
+</p:sld>
+</file>
+
+<file path=ppt/slides/slide2.xml><?xml version="1.0" encoding="utf-8"?>
+<p:sld xmlns:a="http://schemas.openxmlformats.org/drawingml/2006/main" xmlns:r="http://schemas.openxmlformats.org/officeDocument/2006/relationships" xmlns:p="http://schemas.openxmlformats.org/presentationml/2006/main">
+  <p:cSld>
+    <p:bg>
+      <p:bgPr>
+        <a:solidFill>
+          <a:schemeClr val="bg1"/>
+        </a:solidFill>
+        <a:effectLst/>
+      </p:bgPr>
+    </p:bg>
+    <p:spTree>
+      <p:nvGrpSpPr>
+        <p:cNvPr id="1" name=""/>
+        <p:cNvGrpSpPr/>
+        <p:nvPr/>
+      </p:nvGrpSpPr>
+      <p:grpSpPr>
+        <a:xfrm>
+          <a:off x="0" y="0"/>
+          <a:ext cx="0" cy="0"/>
+          <a:chOff x="0" y="0"/>
+          <a:chExt cx="0" cy="0"/>
+        </a:xfrm>
+      </p:grpSpPr>
+      <p:sp useBgFill="1">
+        <p:nvSpPr>
+          <p:cNvPr id="10" name="Rectangle 9">
+            <a:extLst>
+              <a:ext uri="{FF2B5EF4-FFF2-40B4-BE49-F238E27FC236}">
+                <a16:creationId xmlns:a16="http://schemas.microsoft.com/office/drawing/2014/main" id="{5E8D3B17-7638-DFD3-18E4-8A6D611749CF}"/>
+              </a:ext>
+              <a:ext uri="{C183D7F6-B498-43B3-948B-1728B52AA6E4}">
+                <adec:decorative xmlns:adec="http://schemas.microsoft.com/office/drawing/2017/decorative" xmlns="" val="1"/>
+              </a:ext>
+            </a:extLst>
+          </p:cNvPr>
+          <p:cNvSpPr>
+            <a:spLocks noGrp="1" noRot="1" noChangeAspect="1" noMove="1" noResize="1" noEditPoints="1" noAdjustHandles="1" noChangeArrowheads="1" noChangeShapeType="1" noTextEdit="1"/>
+          </p:cNvSpPr>
+          <p:nvPr>
+            <p:extLst>
+              <p:ext uri="{386F3935-93C4-4BCD-93E2-E3B085C9AB24}">
+                <p16:designElem xmlns:p16="http://schemas.microsoft.com/office/powerpoint/2015/main" val="1"/>
+              </p:ext>
+            </p:extLst>
+          </p:nvPr>
+        </p:nvSpPr>
+        <p:spPr>
+          <a:xfrm>
+            <a:off x="0" y="0"/>
+            <a:ext cx="12192000" cy="6858000"/>
+          </a:xfrm>
+          <a:prstGeom prst="rect">
+            <a:avLst/>
+          </a:prstGeom>
+          <a:ln w="12700" cap="flat" cmpd="sng" algn="ctr">
+            <a:noFill/>
+            <a:prstDash val="solid"/>
+            <a:miter lim="800000"/>
+          </a:ln>
+          <a:effectLst/>
+          <a:extLst>
+            <a:ext uri="{91240B29-F687-4F45-9708-019B960494DF}">
+              <a14:hiddenLine xmlns:a14="http://schemas.microsoft.com/office/drawing/2010/main" w="12700" cap="flat" cmpd="sng" algn="ctr">
+                <a:solidFill>
+                  <a:schemeClr val="accent1">
+                    <a:shade val="15000"/>
+                  </a:schemeClr>
+                </a:solidFill>
+                <a:prstDash val="solid"/>
+                <a:miter lim="800000"/>
+              </a14:hiddenLine>
+            </a:ext>
+          </a:extLst>
+        </p:spPr>
+        <p:style>
+          <a:lnRef idx="2">
+            <a:schemeClr val="accent1">
+              <a:shade val="15000"/>
+            </a:schemeClr>
+          </a:lnRef>
+          <a:fillRef idx="1">
+            <a:schemeClr val="accent1"/>
+          </a:fillRef>
+          <a:effectRef idx="0">
+            <a:schemeClr val="accent1"/>
+          </a:effectRef>
+          <a:fontRef idx="minor">
+            <a:schemeClr val="lt1"/>
+          </a:fontRef>
+        </p:style>
+        <p:txBody>
+          <a:bodyPr rtlCol="0" anchor="ctr"/>
+          <a:lstStyle/>
+          <a:p>
+            <a:pPr algn="ctr"/>
+            <a:endParaRPr lang="en-US"/>
+          </a:p>
+        </p:txBody>
+      </p:sp>
+      <p:pic>
+        <p:nvPicPr>
+          <p:cNvPr id="5" name="Espaço Reservado para Conteúdo 4" descr="Ilustração 3D.">
+            <a:extLst>
+              <a:ext uri="{FF2B5EF4-FFF2-40B4-BE49-F238E27FC236}">
+                <a16:creationId xmlns:a16="http://schemas.microsoft.com/office/drawing/2014/main" id="{5AE52070-2197-4C47-AD66-664AE4BABC6B}"/>
+              </a:ext>
+            </a:extLst>
+          </p:cNvPr>
+          <p:cNvPicPr>
+            <a:picLocks noGrp="1" noChangeAspect="1"/>
+          </p:cNvPicPr>
+          <p:nvPr>
+            <p:ph sz="half" idx="1"/>
+          </p:nvPr>
+        </p:nvPicPr>
+        <p:blipFill>
+          <a:blip r:embed="rId3"/>
+          <a:srcRect r="46300"/>
+          <a:stretch/>
+        </p:blipFill>
+        <p:spPr>
+          <a:xfrm>
+            <a:off x="20" y="10"/>
+            <a:ext cx="4910308" cy="6857990"/>
+          </a:xfrm>
+          <a:prstGeom prst="rect">
+            <a:avLst/>
+          </a:prstGeom>
+        </p:spPr>
+      </p:pic>
+      <p:sp>
+        <p:nvSpPr>
+          <p:cNvPr id="2" name="Título 1">
+            <a:extLst>
+              <a:ext uri="{FF2B5EF4-FFF2-40B4-BE49-F238E27FC236}">
+                <a16:creationId xmlns:a16="http://schemas.microsoft.com/office/drawing/2014/main" id="{9804F46E-89A6-0254-3C0B-A8EFB0256F1C}"/>
+              </a:ext>
+            </a:extLst>
+          </p:cNvPr>
+          <p:cNvSpPr>
+            <a:spLocks noGrp="1"/>
+          </p:cNvSpPr>
+          <p:nvPr>
+            <p:ph type="title"/>
+          </p:nvPr>
+        </p:nvSpPr>
+        <p:spPr>
+          <a:xfrm>
+            <a:off x="5568537" y="-419907"/>
+            <a:ext cx="5916168" cy="1527048"/>
           </a:xfrm>
         </p:spPr>
         <p:txBody>
@@ -10989,7 +12517,7 @@
                 <a:ea typeface="+mj-ea"/>
                 <a:cs typeface="+mj-cs"/>
               </a:rPr>
-              <a:t>Diagrama</a:t>
+              <a:t>Introdução</a:t>
             </a:r>
             <a:r>
               <a:rPr lang="en-US" b="1" kern="1200" dirty="0">
@@ -11000,8 +12528,49 @@
                 <a:ea typeface="+mj-ea"/>
                 <a:cs typeface="+mj-cs"/>
               </a:rPr>
-              <a:t> UML</a:t>
-            </a:r>
+              <a:t> </a:t>
+            </a:r>
+            <a:r>
+              <a:rPr lang="en-US" b="1" kern="1200" dirty="0" err="1">
+                <a:solidFill>
+                  <a:schemeClr val="tx1"/>
+                </a:solidFill>
+                <a:latin typeface="+mj-lt"/>
+                <a:ea typeface="+mj-ea"/>
+                <a:cs typeface="+mj-cs"/>
+              </a:rPr>
+              <a:t>ao</a:t>
+            </a:r>
+            <a:r>
+              <a:rPr lang="en-US" b="1" kern="1200" dirty="0">
+                <a:solidFill>
+                  <a:schemeClr val="tx1"/>
+                </a:solidFill>
+                <a:latin typeface="+mj-lt"/>
+                <a:ea typeface="+mj-ea"/>
+                <a:cs typeface="+mj-cs"/>
+              </a:rPr>
+              <a:t> </a:t>
+            </a:r>
+            <a:r>
+              <a:rPr lang="en-US" b="1" kern="1200" dirty="0" err="1">
+                <a:solidFill>
+                  <a:schemeClr val="tx1"/>
+                </a:solidFill>
+                <a:latin typeface="+mj-lt"/>
+                <a:ea typeface="+mj-ea"/>
+                <a:cs typeface="+mj-cs"/>
+              </a:rPr>
+              <a:t>projeto</a:t>
+            </a:r>
+            <a:endParaRPr lang="en-US" b="1" kern="1200" dirty="0">
+              <a:solidFill>
+                <a:schemeClr val="tx1"/>
+              </a:solidFill>
+              <a:latin typeface="+mj-lt"/>
+              <a:ea typeface="+mj-ea"/>
+              <a:cs typeface="+mj-cs"/>
+            </a:endParaRPr>
           </a:p>
         </p:txBody>
       </p:sp>
@@ -11010,7 +12579,7 @@
           <p:cNvPr id="4" name="Espaço Reservado para Conteúdo 3">
             <a:extLst>
               <a:ext uri="{FF2B5EF4-FFF2-40B4-BE49-F238E27FC236}">
-                <a16:creationId xmlns:a16="http://schemas.microsoft.com/office/drawing/2014/main" id="{14470043-6B1C-57FC-4F15-0FAD899F9E73}"/>
+                <a16:creationId xmlns:a16="http://schemas.microsoft.com/office/drawing/2014/main" id="{A2724719-90E6-28A0-6F62-77C265C4C375}"/>
               </a:ext>
             </a:extLst>
           </p:cNvPr>
@@ -11021,7 +12590,7 @@
             <p:ph sz="half" idx="2"/>
             <p:extLst>
               <p:ext uri="{E7BDC344-281C-4309-B0C6-D0EE65EED2A8}">
-                <p202:designPr xmlns="" xmlns:p202="http://schemas.microsoft.com/office/powerpoint/2020/02/main">
+                <p202:designPr xmlns:p202="http://schemas.microsoft.com/office/powerpoint/2020/02/main" xmlns="">
                   <p202:designTagLst>
                     <p202:designTag name="ARCH:1:CLS" val="InformationBlock"/>
                     <p202:designTag name="ARCH:1:VSVAR" val="TitledTextBox"/>
@@ -11033,8 +12602,8 @@
         </p:nvSpPr>
         <p:spPr>
           <a:xfrm>
-            <a:off x="919262" y="1905189"/>
-            <a:ext cx="11032331" cy="4095078"/>
+            <a:off x="5568537" y="2214282"/>
+            <a:ext cx="5916168" cy="4095078"/>
           </a:xfrm>
         </p:spPr>
         <p:txBody>
@@ -11051,11 +12620,37 @@
             </a:pPr>
             <a:r>
               <a:rPr lang="pt-BR" sz="1400" b="1" dirty="0"/>
-              <a:t>Usar um diagrama UML: pode ser de atividade,</a:t>
-            </a:r>
+              <a:t>Objetivo do Projeto</a:t>
+            </a:r>
+          </a:p>
+          <a:p>
+            <a:pPr marL="0" lvl="1" indent="0">
+              <a:buNone/>
+            </a:pPr>
             <a:r>
               <a:rPr lang="pt-BR" sz="1400" dirty="0"/>
-              <a:t> estado</a:t>
+              <a:t>O objetivo principal do projeto é desenvolver um sistema que atenda de forma eficaz às necessidades dos usuários de um sistema de Almoxarifado</a:t>
+            </a:r>
+          </a:p>
+          <a:p>
+            <a:pPr marL="0" indent="0">
+              <a:spcBef>
+                <a:spcPts val="2500"/>
+              </a:spcBef>
+              <a:buNone/>
+            </a:pPr>
+            <a:r>
+              <a:rPr lang="pt-BR" sz="1400" b="1" dirty="0"/>
+              <a:t>Escopo do Projeto</a:t>
+            </a:r>
+          </a:p>
+          <a:p>
+            <a:pPr marL="0" lvl="1" indent="0">
+              <a:buNone/>
+            </a:pPr>
+            <a:r>
+              <a:rPr lang="pt-BR" sz="1400" dirty="0"/>
+              <a:t>O escopo do projeto abrange todas as funcionalidades e requisitos que o sistema deve atender, garantindo uma entrega completa e eficiente.</a:t>
             </a:r>
           </a:p>
         </p:txBody>
@@ -11063,7 +12658,7 @@
     </p:spTree>
     <p:extLst>
       <p:ext uri="{BB962C8B-B14F-4D97-AF65-F5344CB8AC3E}">
-        <p14:creationId xmlns:p14="http://schemas.microsoft.com/office/powerpoint/2010/main" val="3395640204"/>
+        <p14:creationId xmlns:p14="http://schemas.microsoft.com/office/powerpoint/2010/main" val="1739451752"/>
       </p:ext>
     </p:extLst>
   </p:cSld>
@@ -11214,7 +12809,7 @@
 </p:sld>
 </file>
 
-<file path=ppt/slides/slide2.xml><?xml version="1.0" encoding="utf-8"?>
+<file path=ppt/slides/slide20.xml><?xml version="1.0" encoding="utf-8"?>
 <p:sld xmlns:a="http://schemas.openxmlformats.org/drawingml/2006/main" xmlns:r="http://schemas.openxmlformats.org/officeDocument/2006/relationships" xmlns:p="http://schemas.openxmlformats.org/presentationml/2006/main">
   <p:cSld>
     <p:bg>
@@ -11247,7 +12842,7 @@
                 <a16:creationId xmlns:a16="http://schemas.microsoft.com/office/drawing/2014/main" id="{5E8D3B17-7638-DFD3-18E4-8A6D611749CF}"/>
               </a:ext>
               <a:ext uri="{C183D7F6-B498-43B3-948B-1728B52AA6E4}">
-                <adec:decorative xmlns="" xmlns:adec="http://schemas.microsoft.com/office/drawing/2017/decorative" val="1"/>
+                <adec:decorative xmlns:adec="http://schemas.microsoft.com/office/drawing/2017/decorative" xmlns="" val="1"/>
               </a:ext>
             </a:extLst>
           </p:cNvPr>
@@ -11315,43 +12910,879 @@
           </a:p>
         </p:txBody>
       </p:sp>
-      <p:pic>
-        <p:nvPicPr>
-          <p:cNvPr id="5" name="Espaço Reservado para Conteúdo 4" descr="Ilustração 3D.">
+      <p:sp>
+        <p:nvSpPr>
+          <p:cNvPr id="2" name="Título 1">
             <a:extLst>
               <a:ext uri="{FF2B5EF4-FFF2-40B4-BE49-F238E27FC236}">
-                <a16:creationId xmlns:a16="http://schemas.microsoft.com/office/drawing/2014/main" id="{5AE52070-2197-4C47-AD66-664AE4BABC6B}"/>
+                <a16:creationId xmlns:a16="http://schemas.microsoft.com/office/drawing/2014/main" id="{52C8C7F8-6A55-1DF8-3A33-F776C9F854B3}"/>
               </a:ext>
             </a:extLst>
           </p:cNvPr>
-          <p:cNvPicPr>
-            <a:picLocks noGrp="1" noChangeAspect="1"/>
-          </p:cNvPicPr>
-          <p:nvPr>
-            <p:ph sz="half" idx="1"/>
-          </p:nvPr>
-        </p:nvPicPr>
-        <p:blipFill>
-          <a:blip r:embed="rId3"/>
-          <a:srcRect r="46300"/>
-          <a:stretch/>
-        </p:blipFill>
+          <p:cNvSpPr>
+            <a:spLocks noGrp="1"/>
+          </p:cNvSpPr>
+          <p:nvPr>
+            <p:ph type="title"/>
+          </p:nvPr>
+        </p:nvSpPr>
         <p:spPr>
           <a:xfrm>
-            <a:off x="20" y="10"/>
-            <a:ext cx="4910308" cy="6857990"/>
+            <a:off x="2917771" y="-695454"/>
+            <a:ext cx="5916168" cy="1527048"/>
+          </a:xfrm>
+        </p:spPr>
+        <p:txBody>
+          <a:bodyPr vert="horz" lIns="91440" tIns="45720" rIns="91440" bIns="45720" rtlCol="0" anchor="b">
+            <a:normAutofit/>
+          </a:bodyPr>
+          <a:lstStyle/>
+          <a:p>
+            <a:r>
+              <a:rPr lang="en-US" b="0" kern="1200" dirty="0" err="1" smtClean="0">
+                <a:solidFill>
+                  <a:schemeClr val="tx1"/>
+                </a:solidFill>
+                <a:latin typeface="+mj-lt"/>
+                <a:ea typeface="+mj-ea"/>
+                <a:cs typeface="+mj-cs"/>
+              </a:rPr>
+              <a:t>Tela</a:t>
+            </a:r>
+            <a:r>
+              <a:rPr lang="en-US" b="0" kern="1200" dirty="0" smtClean="0">
+                <a:solidFill>
+                  <a:schemeClr val="tx1"/>
+                </a:solidFill>
+                <a:latin typeface="+mj-lt"/>
+                <a:ea typeface="+mj-ea"/>
+                <a:cs typeface="+mj-cs"/>
+              </a:rPr>
+              <a:t> </a:t>
+            </a:r>
+            <a:r>
+              <a:rPr lang="en-US" b="0" kern="1200" dirty="0" err="1" smtClean="0">
+                <a:solidFill>
+                  <a:schemeClr val="tx1"/>
+                </a:solidFill>
+                <a:latin typeface="+mj-lt"/>
+                <a:ea typeface="+mj-ea"/>
+                <a:cs typeface="+mj-cs"/>
+              </a:rPr>
+              <a:t>Produto</a:t>
+            </a:r>
+            <a:endParaRPr lang="en-US" b="0" kern="1200" dirty="0">
+              <a:solidFill>
+                <a:schemeClr val="tx1"/>
+              </a:solidFill>
+              <a:latin typeface="+mj-lt"/>
+              <a:ea typeface="+mj-ea"/>
+              <a:cs typeface="+mj-cs"/>
+            </a:endParaRPr>
+          </a:p>
+        </p:txBody>
+      </p:sp>
+      <p:sp>
+        <p:nvSpPr>
+          <p:cNvPr id="7" name="Título 1">
+            <a:extLst>
+              <a:ext uri="{FF2B5EF4-FFF2-40B4-BE49-F238E27FC236}">
+                <a16:creationId xmlns:a16="http://schemas.microsoft.com/office/drawing/2014/main" id="{F08859EF-E25E-52C0-C024-DE22738F8749}"/>
+              </a:ext>
+            </a:extLst>
+          </p:cNvPr>
+          <p:cNvSpPr txBox="1">
+            <a:spLocks/>
+          </p:cNvSpPr>
+          <p:nvPr/>
+        </p:nvSpPr>
+        <p:spPr>
+          <a:xfrm>
+            <a:off x="414841" y="-695454"/>
+            <a:ext cx="5916168" cy="1527048"/>
           </a:xfrm>
           <a:prstGeom prst="rect">
             <a:avLst/>
           </a:prstGeom>
         </p:spPr>
-      </p:pic>
+        <p:txBody>
+          <a:bodyPr vert="horz" lIns="91440" tIns="45720" rIns="91440" bIns="45720" rtlCol="0" anchor="b">
+            <a:normAutofit/>
+          </a:bodyPr>
+          <a:lstStyle>
+            <a:lvl1pPr algn="l" defTabSz="914400" rtl="0" eaLnBrk="1" latinLnBrk="0" hangingPunct="1">
+              <a:lnSpc>
+                <a:spcPct val="90000"/>
+              </a:lnSpc>
+              <a:spcBef>
+                <a:spcPct val="0"/>
+              </a:spcBef>
+              <a:buNone/>
+              <a:defRPr sz="3600" b="1" kern="1200">
+                <a:solidFill>
+                  <a:schemeClr val="tx1"/>
+                </a:solidFill>
+                <a:latin typeface="+mj-lt"/>
+                <a:ea typeface="+mj-ea"/>
+                <a:cs typeface="+mj-cs"/>
+              </a:defRPr>
+            </a:lvl1pPr>
+          </a:lstStyle>
+          <a:p>
+            <a:r>
+              <a:rPr lang="en-US" dirty="0"/>
+              <a:t>Wireframe</a:t>
+            </a:r>
+          </a:p>
+        </p:txBody>
+      </p:sp>
+      <p:sp>
+        <p:nvSpPr>
+          <p:cNvPr id="4" name="Retângulo 3"/>
+          <p:cNvSpPr/>
+          <p:nvPr/>
+        </p:nvSpPr>
+        <p:spPr>
+          <a:xfrm>
+            <a:off x="1044222" y="1224844"/>
+            <a:ext cx="10193866" cy="5317067"/>
+          </a:xfrm>
+          <a:prstGeom prst="rect">
+            <a:avLst/>
+          </a:prstGeom>
+        </p:spPr>
+        <p:style>
+          <a:lnRef idx="2">
+            <a:schemeClr val="accent1"/>
+          </a:lnRef>
+          <a:fillRef idx="1">
+            <a:schemeClr val="lt1"/>
+          </a:fillRef>
+          <a:effectRef idx="0">
+            <a:schemeClr val="accent1"/>
+          </a:effectRef>
+          <a:fontRef idx="minor">
+            <a:schemeClr val="dk1"/>
+          </a:fontRef>
+        </p:style>
+        <p:txBody>
+          <a:bodyPr rtlCol="0" anchor="ctr"/>
+          <a:lstStyle/>
+          <a:p>
+            <a:pPr algn="ctr"/>
+            <a:endParaRPr lang="pt-BR" dirty="0"/>
+          </a:p>
+        </p:txBody>
+      </p:sp>
+      <p:sp>
+        <p:nvSpPr>
+          <p:cNvPr id="8" name="Retângulo 7"/>
+          <p:cNvSpPr/>
+          <p:nvPr/>
+        </p:nvSpPr>
+        <p:spPr>
+          <a:xfrm>
+            <a:off x="1044222" y="1224844"/>
+            <a:ext cx="10193866" cy="389467"/>
+          </a:xfrm>
+          <a:prstGeom prst="rect">
+            <a:avLst/>
+          </a:prstGeom>
+        </p:spPr>
+        <p:style>
+          <a:lnRef idx="2">
+            <a:schemeClr val="accent6"/>
+          </a:lnRef>
+          <a:fillRef idx="1">
+            <a:schemeClr val="lt1"/>
+          </a:fillRef>
+          <a:effectRef idx="0">
+            <a:schemeClr val="accent6"/>
+          </a:effectRef>
+          <a:fontRef idx="minor">
+            <a:schemeClr val="dk1"/>
+          </a:fontRef>
+        </p:style>
+        <p:txBody>
+          <a:bodyPr rtlCol="0" anchor="ctr"/>
+          <a:lstStyle/>
+          <a:p>
+            <a:pPr algn="ctr"/>
+            <a:endParaRPr lang="pt-BR" dirty="0"/>
+          </a:p>
+        </p:txBody>
+      </p:sp>
+      <p:sp>
+        <p:nvSpPr>
+          <p:cNvPr id="6" name="Elipse 5"/>
+          <p:cNvSpPr/>
+          <p:nvPr/>
+        </p:nvSpPr>
+        <p:spPr>
+          <a:xfrm>
+            <a:off x="10803466" y="1255888"/>
+            <a:ext cx="293511" cy="302204"/>
+          </a:xfrm>
+          <a:prstGeom prst="ellipse">
+            <a:avLst/>
+          </a:prstGeom>
+        </p:spPr>
+        <p:style>
+          <a:lnRef idx="2">
+            <a:schemeClr val="accent3">
+              <a:shade val="50000"/>
+            </a:schemeClr>
+          </a:lnRef>
+          <a:fillRef idx="1">
+            <a:schemeClr val="accent3"/>
+          </a:fillRef>
+          <a:effectRef idx="0">
+            <a:schemeClr val="accent3"/>
+          </a:effectRef>
+          <a:fontRef idx="minor">
+            <a:schemeClr val="lt1"/>
+          </a:fontRef>
+        </p:style>
+        <p:txBody>
+          <a:bodyPr rtlCol="0" anchor="ctr"/>
+          <a:lstStyle/>
+          <a:p>
+            <a:pPr algn="ctr"/>
+            <a:r>
+              <a:rPr lang="pt-BR" dirty="0" smtClean="0"/>
+              <a:t>x</a:t>
+            </a:r>
+            <a:endParaRPr lang="pt-BR" dirty="0"/>
+          </a:p>
+        </p:txBody>
+      </p:sp>
+      <p:sp>
+        <p:nvSpPr>
+          <p:cNvPr id="11" name="Retângulo 10"/>
+          <p:cNvSpPr/>
+          <p:nvPr/>
+        </p:nvSpPr>
+        <p:spPr>
+          <a:xfrm>
+            <a:off x="2689946" y="2201558"/>
+            <a:ext cx="1735298" cy="389467"/>
+          </a:xfrm>
+          <a:prstGeom prst="rect">
+            <a:avLst/>
+          </a:prstGeom>
+          <a:solidFill>
+            <a:schemeClr val="bg1">
+              <a:lumMod val="85000"/>
+            </a:schemeClr>
+          </a:solidFill>
+        </p:spPr>
+        <p:style>
+          <a:lnRef idx="2">
+            <a:schemeClr val="accent6"/>
+          </a:lnRef>
+          <a:fillRef idx="1">
+            <a:schemeClr val="lt1"/>
+          </a:fillRef>
+          <a:effectRef idx="0">
+            <a:schemeClr val="accent6"/>
+          </a:effectRef>
+          <a:fontRef idx="minor">
+            <a:schemeClr val="dk1"/>
+          </a:fontRef>
+        </p:style>
+        <p:txBody>
+          <a:bodyPr rtlCol="0" anchor="ctr"/>
+          <a:lstStyle/>
+          <a:p>
+            <a:pPr algn="ctr"/>
+            <a:endParaRPr lang="pt-BR" dirty="0"/>
+          </a:p>
+        </p:txBody>
+      </p:sp>
+      <p:sp>
+        <p:nvSpPr>
+          <p:cNvPr id="12" name="Título 1">
+            <a:extLst>
+              <a:ext uri="{FF2B5EF4-FFF2-40B4-BE49-F238E27FC236}">
+                <a16:creationId xmlns:a16="http://schemas.microsoft.com/office/drawing/2014/main" id="{52C8C7F8-6A55-1DF8-3A33-F776C9F854B3}"/>
+              </a:ext>
+            </a:extLst>
+          </p:cNvPr>
+          <p:cNvSpPr txBox="1">
+            <a:spLocks/>
+          </p:cNvSpPr>
+          <p:nvPr/>
+        </p:nvSpPr>
+        <p:spPr>
+          <a:xfrm>
+            <a:off x="1557459" y="1063977"/>
+            <a:ext cx="5916168" cy="1527048"/>
+          </a:xfrm>
+          <a:prstGeom prst="rect">
+            <a:avLst/>
+          </a:prstGeom>
+        </p:spPr>
+        <p:txBody>
+          <a:bodyPr vert="horz" lIns="91440" tIns="45720" rIns="91440" bIns="45720" rtlCol="0" anchor="b">
+            <a:normAutofit/>
+          </a:bodyPr>
+          <a:lstStyle>
+            <a:lvl1pPr algn="l" defTabSz="914400" rtl="0" eaLnBrk="1" latinLnBrk="0" hangingPunct="1">
+              <a:lnSpc>
+                <a:spcPct val="90000"/>
+              </a:lnSpc>
+              <a:spcBef>
+                <a:spcPct val="0"/>
+              </a:spcBef>
+              <a:buNone/>
+              <a:defRPr sz="3600" b="1" kern="1200">
+                <a:solidFill>
+                  <a:schemeClr val="tx1"/>
+                </a:solidFill>
+                <a:latin typeface="+mj-lt"/>
+                <a:ea typeface="+mj-ea"/>
+                <a:cs typeface="+mj-cs"/>
+              </a:defRPr>
+            </a:lvl1pPr>
+          </a:lstStyle>
+          <a:p>
+            <a:r>
+              <a:rPr lang="en-US" sz="2000" b="0" dirty="0" err="1" smtClean="0"/>
+              <a:t>Código</a:t>
+            </a:r>
+            <a:endParaRPr lang="en-US" sz="2000" b="0" dirty="0"/>
+          </a:p>
+        </p:txBody>
+      </p:sp>
+      <p:sp>
+        <p:nvSpPr>
+          <p:cNvPr id="13" name="Título 1">
+            <a:extLst>
+              <a:ext uri="{FF2B5EF4-FFF2-40B4-BE49-F238E27FC236}">
+                <a16:creationId xmlns:a16="http://schemas.microsoft.com/office/drawing/2014/main" id="{52C8C7F8-6A55-1DF8-3A33-F776C9F854B3}"/>
+              </a:ext>
+            </a:extLst>
+          </p:cNvPr>
+          <p:cNvSpPr txBox="1">
+            <a:spLocks/>
+          </p:cNvSpPr>
+          <p:nvPr/>
+        </p:nvSpPr>
+        <p:spPr>
+          <a:xfrm>
+            <a:off x="1286538" y="2580272"/>
+            <a:ext cx="5916168" cy="550334"/>
+          </a:xfrm>
+          <a:prstGeom prst="rect">
+            <a:avLst/>
+          </a:prstGeom>
+        </p:spPr>
+        <p:txBody>
+          <a:bodyPr vert="horz" lIns="91440" tIns="45720" rIns="91440" bIns="45720" rtlCol="0" anchor="b">
+            <a:normAutofit/>
+          </a:bodyPr>
+          <a:lstStyle>
+            <a:lvl1pPr algn="l" defTabSz="914400" rtl="0" eaLnBrk="1" latinLnBrk="0" hangingPunct="1">
+              <a:lnSpc>
+                <a:spcPct val="90000"/>
+              </a:lnSpc>
+              <a:spcBef>
+                <a:spcPct val="0"/>
+              </a:spcBef>
+              <a:buNone/>
+              <a:defRPr sz="3600" b="1" kern="1200">
+                <a:solidFill>
+                  <a:schemeClr val="tx1"/>
+                </a:solidFill>
+                <a:latin typeface="+mj-lt"/>
+                <a:ea typeface="+mj-ea"/>
+                <a:cs typeface="+mj-cs"/>
+              </a:defRPr>
+            </a:lvl1pPr>
+          </a:lstStyle>
+          <a:p>
+            <a:r>
+              <a:rPr lang="en-US" sz="2000" b="0" dirty="0" err="1" smtClean="0"/>
+              <a:t>Descrição</a:t>
+            </a:r>
+            <a:endParaRPr lang="en-US" sz="2000" b="0" dirty="0"/>
+          </a:p>
+        </p:txBody>
+      </p:sp>
+      <p:sp>
+        <p:nvSpPr>
+          <p:cNvPr id="14" name="Retângulo 13"/>
+          <p:cNvSpPr/>
+          <p:nvPr/>
+        </p:nvSpPr>
+        <p:spPr>
+          <a:xfrm>
+            <a:off x="2689945" y="2730386"/>
+            <a:ext cx="5325165" cy="389467"/>
+          </a:xfrm>
+          <a:prstGeom prst="rect">
+            <a:avLst/>
+          </a:prstGeom>
+          <a:solidFill>
+            <a:srgbClr val="92D050"/>
+          </a:solidFill>
+        </p:spPr>
+        <p:style>
+          <a:lnRef idx="2">
+            <a:schemeClr val="accent1">
+              <a:shade val="50000"/>
+            </a:schemeClr>
+          </a:lnRef>
+          <a:fillRef idx="1">
+            <a:schemeClr val="accent1"/>
+          </a:fillRef>
+          <a:effectRef idx="0">
+            <a:schemeClr val="accent1"/>
+          </a:effectRef>
+          <a:fontRef idx="minor">
+            <a:schemeClr val="lt1"/>
+          </a:fontRef>
+        </p:style>
+        <p:txBody>
+          <a:bodyPr rtlCol="0" anchor="ctr"/>
+          <a:lstStyle/>
+          <a:p>
+            <a:r>
+              <a:rPr lang="pt-BR" dirty="0" smtClean="0"/>
+              <a:t>Café </a:t>
+            </a:r>
+            <a:r>
+              <a:rPr lang="pt-BR" dirty="0" err="1" smtClean="0"/>
+              <a:t>Estan</a:t>
+            </a:r>
+            <a:endParaRPr lang="pt-BR" dirty="0"/>
+          </a:p>
+        </p:txBody>
+      </p:sp>
+      <p:sp>
+        <p:nvSpPr>
+          <p:cNvPr id="15" name="Título 1">
+            <a:extLst>
+              <a:ext uri="{FF2B5EF4-FFF2-40B4-BE49-F238E27FC236}">
+                <a16:creationId xmlns:a16="http://schemas.microsoft.com/office/drawing/2014/main" id="{52C8C7F8-6A55-1DF8-3A33-F776C9F854B3}"/>
+              </a:ext>
+            </a:extLst>
+          </p:cNvPr>
+          <p:cNvSpPr txBox="1">
+            <a:spLocks/>
+          </p:cNvSpPr>
+          <p:nvPr/>
+        </p:nvSpPr>
+        <p:spPr>
+          <a:xfrm>
+            <a:off x="1467160" y="3119853"/>
+            <a:ext cx="5916168" cy="550334"/>
+          </a:xfrm>
+          <a:prstGeom prst="rect">
+            <a:avLst/>
+          </a:prstGeom>
+        </p:spPr>
+        <p:txBody>
+          <a:bodyPr vert="horz" lIns="91440" tIns="45720" rIns="91440" bIns="45720" rtlCol="0" anchor="b">
+            <a:normAutofit/>
+          </a:bodyPr>
+          <a:lstStyle>
+            <a:lvl1pPr algn="l" defTabSz="914400" rtl="0" eaLnBrk="1" latinLnBrk="0" hangingPunct="1">
+              <a:lnSpc>
+                <a:spcPct val="90000"/>
+              </a:lnSpc>
+              <a:spcBef>
+                <a:spcPct val="0"/>
+              </a:spcBef>
+              <a:buNone/>
+              <a:defRPr sz="3600" b="1" kern="1200">
+                <a:solidFill>
+                  <a:schemeClr val="tx1"/>
+                </a:solidFill>
+                <a:latin typeface="+mj-lt"/>
+                <a:ea typeface="+mj-ea"/>
+                <a:cs typeface="+mj-cs"/>
+              </a:defRPr>
+            </a:lvl1pPr>
+          </a:lstStyle>
+          <a:p>
+            <a:r>
+              <a:rPr lang="en-US" sz="2000" b="0" dirty="0" err="1" smtClean="0"/>
+              <a:t>Unidade</a:t>
+            </a:r>
+            <a:endParaRPr lang="en-US" sz="2000" b="0" dirty="0"/>
+          </a:p>
+        </p:txBody>
+      </p:sp>
+      <p:sp>
+        <p:nvSpPr>
+          <p:cNvPr id="16" name="Retângulo 15"/>
+          <p:cNvSpPr/>
+          <p:nvPr/>
+        </p:nvSpPr>
+        <p:spPr>
+          <a:xfrm>
+            <a:off x="2689946" y="3265308"/>
+            <a:ext cx="1735298" cy="389467"/>
+          </a:xfrm>
+          <a:prstGeom prst="rect">
+            <a:avLst/>
+          </a:prstGeom>
+          <a:solidFill>
+            <a:schemeClr val="bg1"/>
+          </a:solidFill>
+        </p:spPr>
+        <p:style>
+          <a:lnRef idx="2">
+            <a:schemeClr val="accent6"/>
+          </a:lnRef>
+          <a:fillRef idx="1">
+            <a:schemeClr val="lt1"/>
+          </a:fillRef>
+          <a:effectRef idx="0">
+            <a:schemeClr val="accent6"/>
+          </a:effectRef>
+          <a:fontRef idx="minor">
+            <a:schemeClr val="dk1"/>
+          </a:fontRef>
+        </p:style>
+        <p:txBody>
+          <a:bodyPr rtlCol="0" anchor="ctr"/>
+          <a:lstStyle/>
+          <a:p>
+            <a:pPr algn="ctr"/>
+            <a:endParaRPr lang="pt-BR" dirty="0"/>
+          </a:p>
+        </p:txBody>
+      </p:sp>
+      <p:sp>
+        <p:nvSpPr>
+          <p:cNvPr id="9" name="Triângulo isósceles 8"/>
+          <p:cNvSpPr/>
+          <p:nvPr/>
+        </p:nvSpPr>
+        <p:spPr>
+          <a:xfrm rot="10800000">
+            <a:off x="4188178" y="3318281"/>
+            <a:ext cx="237066" cy="283520"/>
+          </a:xfrm>
+          <a:prstGeom prst="triangle">
+            <a:avLst/>
+          </a:prstGeom>
+        </p:spPr>
+        <p:style>
+          <a:lnRef idx="2">
+            <a:schemeClr val="dk1">
+              <a:shade val="50000"/>
+            </a:schemeClr>
+          </a:lnRef>
+          <a:fillRef idx="1">
+            <a:schemeClr val="dk1"/>
+          </a:fillRef>
+          <a:effectRef idx="0">
+            <a:schemeClr val="dk1"/>
+          </a:effectRef>
+          <a:fontRef idx="minor">
+            <a:schemeClr val="lt1"/>
+          </a:fontRef>
+        </p:style>
+        <p:txBody>
+          <a:bodyPr rtlCol="0" anchor="ctr"/>
+          <a:lstStyle/>
+          <a:p>
+            <a:pPr algn="ctr"/>
+            <a:endParaRPr lang="pt-BR"/>
+          </a:p>
+        </p:txBody>
+      </p:sp>
+      <p:sp>
+        <p:nvSpPr>
+          <p:cNvPr id="17" name="Retângulo Arredondado 16"/>
+          <p:cNvSpPr/>
+          <p:nvPr/>
+        </p:nvSpPr>
+        <p:spPr>
+          <a:xfrm>
+            <a:off x="6953249" y="5048250"/>
+            <a:ext cx="1190625" cy="314325"/>
+          </a:xfrm>
+          <a:prstGeom prst="roundRect">
+            <a:avLst/>
+          </a:prstGeom>
+        </p:spPr>
+        <p:style>
+          <a:lnRef idx="2">
+            <a:schemeClr val="accent1">
+              <a:shade val="50000"/>
+            </a:schemeClr>
+          </a:lnRef>
+          <a:fillRef idx="1">
+            <a:schemeClr val="accent1"/>
+          </a:fillRef>
+          <a:effectRef idx="0">
+            <a:schemeClr val="accent1"/>
+          </a:effectRef>
+          <a:fontRef idx="minor">
+            <a:schemeClr val="lt1"/>
+          </a:fontRef>
+        </p:style>
+        <p:txBody>
+          <a:bodyPr rtlCol="0" anchor="ctr"/>
+          <a:lstStyle/>
+          <a:p>
+            <a:pPr algn="ctr"/>
+            <a:r>
+              <a:rPr lang="pt-BR" dirty="0" smtClean="0"/>
+              <a:t>Salvar</a:t>
+            </a:r>
+            <a:endParaRPr lang="pt-BR" dirty="0"/>
+          </a:p>
+        </p:txBody>
+      </p:sp>
+      <p:sp>
+        <p:nvSpPr>
+          <p:cNvPr id="18" name="Retângulo Arredondado 17"/>
+          <p:cNvSpPr/>
+          <p:nvPr/>
+        </p:nvSpPr>
+        <p:spPr>
+          <a:xfrm>
+            <a:off x="5735696" y="5048249"/>
+            <a:ext cx="1190625" cy="314325"/>
+          </a:xfrm>
+          <a:prstGeom prst="roundRect">
+            <a:avLst/>
+          </a:prstGeom>
+        </p:spPr>
+        <p:style>
+          <a:lnRef idx="2">
+            <a:schemeClr val="accent3">
+              <a:shade val="50000"/>
+            </a:schemeClr>
+          </a:lnRef>
+          <a:fillRef idx="1">
+            <a:schemeClr val="accent3"/>
+          </a:fillRef>
+          <a:effectRef idx="0">
+            <a:schemeClr val="accent3"/>
+          </a:effectRef>
+          <a:fontRef idx="minor">
+            <a:schemeClr val="lt1"/>
+          </a:fontRef>
+        </p:style>
+        <p:txBody>
+          <a:bodyPr rtlCol="0" anchor="ctr"/>
+          <a:lstStyle/>
+          <a:p>
+            <a:pPr algn="ctr"/>
+            <a:r>
+              <a:rPr lang="pt-BR" dirty="0" smtClean="0"/>
+              <a:t>Cancelar</a:t>
+            </a:r>
+            <a:endParaRPr lang="pt-BR" dirty="0"/>
+          </a:p>
+        </p:txBody>
+      </p:sp>
+      <p:sp>
+        <p:nvSpPr>
+          <p:cNvPr id="19" name="Retângulo Arredondado 18"/>
+          <p:cNvSpPr/>
+          <p:nvPr/>
+        </p:nvSpPr>
+        <p:spPr>
+          <a:xfrm>
+            <a:off x="4425244" y="5048248"/>
+            <a:ext cx="1190625" cy="314325"/>
+          </a:xfrm>
+          <a:prstGeom prst="roundRect">
+            <a:avLst/>
+          </a:prstGeom>
+          <a:solidFill>
+            <a:srgbClr val="00B0F0"/>
+          </a:solidFill>
+        </p:spPr>
+        <p:style>
+          <a:lnRef idx="2">
+            <a:schemeClr val="accent1">
+              <a:shade val="50000"/>
+            </a:schemeClr>
+          </a:lnRef>
+          <a:fillRef idx="1">
+            <a:schemeClr val="accent1"/>
+          </a:fillRef>
+          <a:effectRef idx="0">
+            <a:schemeClr val="accent1"/>
+          </a:effectRef>
+          <a:fontRef idx="minor">
+            <a:schemeClr val="lt1"/>
+          </a:fontRef>
+        </p:style>
+        <p:txBody>
+          <a:bodyPr rtlCol="0" anchor="ctr"/>
+          <a:lstStyle/>
+          <a:p>
+            <a:pPr algn="ctr"/>
+            <a:r>
+              <a:rPr lang="pt-BR" dirty="0" smtClean="0"/>
+              <a:t>Voltar</a:t>
+            </a:r>
+            <a:endParaRPr lang="pt-BR" dirty="0"/>
+          </a:p>
+        </p:txBody>
+      </p:sp>
+      <p:sp>
+        <p:nvSpPr>
+          <p:cNvPr id="21" name="CaixaDeTexto 20"/>
+          <p:cNvSpPr txBox="1"/>
+          <p:nvPr/>
+        </p:nvSpPr>
+        <p:spPr>
+          <a:xfrm>
+            <a:off x="9415640" y="3205335"/>
+            <a:ext cx="1781175" cy="1169551"/>
+          </a:xfrm>
+          <a:prstGeom prst="rect">
+            <a:avLst/>
+          </a:prstGeom>
+          <a:noFill/>
+        </p:spPr>
+        <p:txBody>
+          <a:bodyPr wrap="square" rtlCol="0">
+            <a:spAutoFit/>
+          </a:bodyPr>
+          <a:lstStyle/>
+          <a:p>
+            <a:r>
+              <a:rPr lang="pt-BR" sz="1400" dirty="0" smtClean="0"/>
+              <a:t>Quando em modo edição e o cursor estiver no campo o fundo deve ficar verde.</a:t>
+            </a:r>
+            <a:endParaRPr lang="pt-BR" sz="1400" dirty="0"/>
+          </a:p>
+        </p:txBody>
+      </p:sp>
+    </p:spTree>
+    <p:extLst>
+      <p:ext uri="{BB962C8B-B14F-4D97-AF65-F5344CB8AC3E}">
+        <p14:creationId xmlns:p14="http://schemas.microsoft.com/office/powerpoint/2010/main" val="1636696538"/>
+      </p:ext>
+    </p:extLst>
+  </p:cSld>
+  <p:clrMapOvr>
+    <a:masterClrMapping/>
+  </p:clrMapOvr>
+  <p:transition>
+    <p:fade/>
+  </p:transition>
+</p:sld>
+</file>
+
+<file path=ppt/slides/slide21.xml><?xml version="1.0" encoding="utf-8"?>
+<p:sld xmlns:a="http://schemas.openxmlformats.org/drawingml/2006/main" xmlns:r="http://schemas.openxmlformats.org/officeDocument/2006/relationships" xmlns:p="http://schemas.openxmlformats.org/presentationml/2006/main">
+  <p:cSld>
+    <p:bg>
+      <p:bgPr>
+        <a:solidFill>
+          <a:schemeClr val="bg1"/>
+        </a:solidFill>
+        <a:effectLst/>
+      </p:bgPr>
+    </p:bg>
+    <p:spTree>
+      <p:nvGrpSpPr>
+        <p:cNvPr id="1" name=""/>
+        <p:cNvGrpSpPr/>
+        <p:nvPr/>
+      </p:nvGrpSpPr>
+      <p:grpSpPr>
+        <a:xfrm>
+          <a:off x="0" y="0"/>
+          <a:ext cx="0" cy="0"/>
+          <a:chOff x="0" y="0"/>
+          <a:chExt cx="0" cy="0"/>
+        </a:xfrm>
+      </p:grpSpPr>
+      <p:sp useBgFill="1">
+        <p:nvSpPr>
+          <p:cNvPr id="10" name="Rectangle 9">
+            <a:extLst>
+              <a:ext uri="{FF2B5EF4-FFF2-40B4-BE49-F238E27FC236}">
+                <a16:creationId xmlns:a16="http://schemas.microsoft.com/office/drawing/2014/main" id="{5E8D3B17-7638-DFD3-18E4-8A6D611749CF}"/>
+              </a:ext>
+              <a:ext uri="{C183D7F6-B498-43B3-948B-1728B52AA6E4}">
+                <adec:decorative xmlns:adec="http://schemas.microsoft.com/office/drawing/2017/decorative" xmlns="" val="1"/>
+              </a:ext>
+            </a:extLst>
+          </p:cNvPr>
+          <p:cNvSpPr>
+            <a:spLocks noGrp="1" noRot="1" noChangeAspect="1" noMove="1" noResize="1" noEditPoints="1" noAdjustHandles="1" noChangeArrowheads="1" noChangeShapeType="1" noTextEdit="1"/>
+          </p:cNvSpPr>
+          <p:nvPr>
+            <p:extLst>
+              <p:ext uri="{386F3935-93C4-4BCD-93E2-E3B085C9AB24}">
+                <p16:designElem xmlns:p16="http://schemas.microsoft.com/office/powerpoint/2015/main" val="1"/>
+              </p:ext>
+            </p:extLst>
+          </p:nvPr>
+        </p:nvSpPr>
+        <p:spPr>
+          <a:xfrm>
+            <a:off x="0" y="0"/>
+            <a:ext cx="12192000" cy="6858000"/>
+          </a:xfrm>
+          <a:prstGeom prst="rect">
+            <a:avLst/>
+          </a:prstGeom>
+          <a:ln w="12700" cap="flat" cmpd="sng" algn="ctr">
+            <a:noFill/>
+            <a:prstDash val="solid"/>
+            <a:miter lim="800000"/>
+          </a:ln>
+          <a:effectLst/>
+          <a:extLst>
+            <a:ext uri="{91240B29-F687-4F45-9708-019B960494DF}">
+              <a14:hiddenLine xmlns:a14="http://schemas.microsoft.com/office/drawing/2010/main" w="12700" cap="flat" cmpd="sng" algn="ctr">
+                <a:solidFill>
+                  <a:schemeClr val="accent1">
+                    <a:shade val="15000"/>
+                  </a:schemeClr>
+                </a:solidFill>
+                <a:prstDash val="solid"/>
+                <a:miter lim="800000"/>
+              </a14:hiddenLine>
+            </a:ext>
+          </a:extLst>
+        </p:spPr>
+        <p:style>
+          <a:lnRef idx="2">
+            <a:schemeClr val="accent1">
+              <a:shade val="15000"/>
+            </a:schemeClr>
+          </a:lnRef>
+          <a:fillRef idx="1">
+            <a:schemeClr val="accent1"/>
+          </a:fillRef>
+          <a:effectRef idx="0">
+            <a:schemeClr val="accent1"/>
+          </a:effectRef>
+          <a:fontRef idx="minor">
+            <a:schemeClr val="lt1"/>
+          </a:fontRef>
+        </p:style>
+        <p:txBody>
+          <a:bodyPr rtlCol="0" anchor="ctr"/>
+          <a:lstStyle/>
+          <a:p>
+            <a:pPr algn="ctr"/>
+            <a:endParaRPr lang="en-US"/>
+          </a:p>
+        </p:txBody>
+      </p:sp>
       <p:sp>
         <p:nvSpPr>
           <p:cNvPr id="2" name="Título 1">
             <a:extLst>
               <a:ext uri="{FF2B5EF4-FFF2-40B4-BE49-F238E27FC236}">
-                <a16:creationId xmlns:a16="http://schemas.microsoft.com/office/drawing/2014/main" id="{9804F46E-89A6-0254-3C0B-A8EFB0256F1C}"/>
+                <a16:creationId xmlns:a16="http://schemas.microsoft.com/office/drawing/2014/main" id="{37D9284D-EDF1-4C67-C63F-C7E773F77885}"/>
               </a:ext>
             </a:extLst>
           </p:cNvPr>
@@ -11364,8 +13795,8 @@
         </p:nvSpPr>
         <p:spPr>
           <a:xfrm>
-            <a:off x="5568537" y="-419907"/>
-            <a:ext cx="5916168" cy="1527048"/>
+            <a:off x="803353" y="138594"/>
+            <a:ext cx="10336871" cy="1527048"/>
           </a:xfrm>
         </p:spPr>
         <p:txBody>
@@ -11383,7 +13814,7 @@
                 <a:ea typeface="+mj-ea"/>
                 <a:cs typeface="+mj-cs"/>
               </a:rPr>
-              <a:t>Introdução</a:t>
+              <a:t>Diagrama</a:t>
             </a:r>
             <a:r>
               <a:rPr lang="en-US" b="1" kern="1200" dirty="0">
@@ -11394,49 +13825,8 @@
                 <a:ea typeface="+mj-ea"/>
                 <a:cs typeface="+mj-cs"/>
               </a:rPr>
-              <a:t> </a:t>
-            </a:r>
-            <a:r>
-              <a:rPr lang="en-US" b="1" kern="1200" dirty="0" err="1">
-                <a:solidFill>
-                  <a:schemeClr val="tx1"/>
-                </a:solidFill>
-                <a:latin typeface="+mj-lt"/>
-                <a:ea typeface="+mj-ea"/>
-                <a:cs typeface="+mj-cs"/>
-              </a:rPr>
-              <a:t>ao</a:t>
-            </a:r>
-            <a:r>
-              <a:rPr lang="en-US" b="1" kern="1200" dirty="0">
-                <a:solidFill>
-                  <a:schemeClr val="tx1"/>
-                </a:solidFill>
-                <a:latin typeface="+mj-lt"/>
-                <a:ea typeface="+mj-ea"/>
-                <a:cs typeface="+mj-cs"/>
-              </a:rPr>
-              <a:t> </a:t>
-            </a:r>
-            <a:r>
-              <a:rPr lang="en-US" b="1" kern="1200" dirty="0" err="1">
-                <a:solidFill>
-                  <a:schemeClr val="tx1"/>
-                </a:solidFill>
-                <a:latin typeface="+mj-lt"/>
-                <a:ea typeface="+mj-ea"/>
-                <a:cs typeface="+mj-cs"/>
-              </a:rPr>
-              <a:t>projeto</a:t>
-            </a:r>
-            <a:endParaRPr lang="en-US" b="1" kern="1200" dirty="0">
-              <a:solidFill>
-                <a:schemeClr val="tx1"/>
-              </a:solidFill>
-              <a:latin typeface="+mj-lt"/>
-              <a:ea typeface="+mj-ea"/>
-              <a:cs typeface="+mj-cs"/>
-            </a:endParaRPr>
+              <a:t> UML</a:t>
+            </a:r>
           </a:p>
         </p:txBody>
       </p:sp>
@@ -11445,7 +13835,7 @@
           <p:cNvPr id="4" name="Espaço Reservado para Conteúdo 3">
             <a:extLst>
               <a:ext uri="{FF2B5EF4-FFF2-40B4-BE49-F238E27FC236}">
-                <a16:creationId xmlns:a16="http://schemas.microsoft.com/office/drawing/2014/main" id="{A2724719-90E6-28A0-6F62-77C265C4C375}"/>
+                <a16:creationId xmlns:a16="http://schemas.microsoft.com/office/drawing/2014/main" id="{14470043-6B1C-57FC-4F15-0FAD899F9E73}"/>
               </a:ext>
             </a:extLst>
           </p:cNvPr>
@@ -11456,7 +13846,7 @@
             <p:ph sz="half" idx="2"/>
             <p:extLst>
               <p:ext uri="{E7BDC344-281C-4309-B0C6-D0EE65EED2A8}">
-                <p202:designPr xmlns="" xmlns:p202="http://schemas.microsoft.com/office/powerpoint/2020/02/main">
+                <p202:designPr xmlns:p202="http://schemas.microsoft.com/office/powerpoint/2020/02/main" xmlns="">
                   <p202:designTagLst>
                     <p202:designTag name="ARCH:1:CLS" val="InformationBlock"/>
                     <p202:designTag name="ARCH:1:VSVAR" val="TitledTextBox"/>
@@ -11468,8 +13858,8 @@
         </p:nvSpPr>
         <p:spPr>
           <a:xfrm>
-            <a:off x="5568537" y="2214282"/>
-            <a:ext cx="5916168" cy="4095078"/>
+            <a:off x="919262" y="1905189"/>
+            <a:ext cx="11032331" cy="4095078"/>
           </a:xfrm>
         </p:spPr>
         <p:txBody>
@@ -11486,37 +13876,11 @@
             </a:pPr>
             <a:r>
               <a:rPr lang="pt-BR" sz="1400" b="1" dirty="0"/>
-              <a:t>Objetivo do Projeto</a:t>
-            </a:r>
-          </a:p>
-          <a:p>
-            <a:pPr marL="0" lvl="1" indent="0">
-              <a:buNone/>
-            </a:pPr>
+              <a:t>Usar um diagrama UML: pode ser de atividade,</a:t>
+            </a:r>
             <a:r>
               <a:rPr lang="pt-BR" sz="1400" dirty="0"/>
-              <a:t>O objetivo principal do projeto é desenvolver um sistema que atenda de forma eficaz às necessidades dos usuários de um sistema de Almoxarifado</a:t>
-            </a:r>
-          </a:p>
-          <a:p>
-            <a:pPr marL="0" indent="0">
-              <a:spcBef>
-                <a:spcPts val="2500"/>
-              </a:spcBef>
-              <a:buNone/>
-            </a:pPr>
-            <a:r>
-              <a:rPr lang="pt-BR" sz="1400" b="1" dirty="0"/>
-              <a:t>Escopo do Projeto</a:t>
-            </a:r>
-          </a:p>
-          <a:p>
-            <a:pPr marL="0" lvl="1" indent="0">
-              <a:buNone/>
-            </a:pPr>
-            <a:r>
-              <a:rPr lang="pt-BR" sz="1400" dirty="0"/>
-              <a:t>O escopo do projeto abrange todas as funcionalidades e requisitos que o sistema deve atender, garantindo uma entrega completa e eficiente.</a:t>
+              <a:t> estado</a:t>
             </a:r>
           </a:p>
         </p:txBody>
@@ -11524,7 +13888,7 @@
     </p:spTree>
     <p:extLst>
       <p:ext uri="{BB962C8B-B14F-4D97-AF65-F5344CB8AC3E}">
-        <p14:creationId xmlns:p14="http://schemas.microsoft.com/office/powerpoint/2010/main" val="1739451752"/>
+        <p14:creationId xmlns:p14="http://schemas.microsoft.com/office/powerpoint/2010/main" val="3395640204"/>
       </p:ext>
     </p:extLst>
   </p:cSld>
@@ -11708,7 +14072,7 @@
                 <a16:creationId xmlns:a16="http://schemas.microsoft.com/office/drawing/2014/main" id="{5E8D3B17-7638-DFD3-18E4-8A6D611749CF}"/>
               </a:ext>
               <a:ext uri="{C183D7F6-B498-43B3-948B-1728B52AA6E4}">
-                <adec:decorative xmlns="" xmlns:adec="http://schemas.microsoft.com/office/drawing/2017/decorative" val="1"/>
+                <adec:decorative xmlns:adec="http://schemas.microsoft.com/office/drawing/2017/decorative" xmlns="" val="1"/>
               </a:ext>
             </a:extLst>
           </p:cNvPr>
@@ -11835,7 +14199,7 @@
             <p:ph sz="half" idx="2"/>
             <p:extLst>
               <p:ext uri="{E7BDC344-281C-4309-B0C6-D0EE65EED2A8}">
-                <p202:designPr xmlns="" xmlns:p202="http://schemas.microsoft.com/office/powerpoint/2020/02/main">
+                <p202:designPr xmlns:p202="http://schemas.microsoft.com/office/powerpoint/2020/02/main" xmlns="">
                   <p202:designTagLst>
                     <p202:designTag name="ARCH:1:CLS" val="InformationBlock"/>
                     <p202:designTag name="ARCH:1:VSVAR" val="TitledTextBox"/>
@@ -12152,7 +14516,7 @@
                 <a16:creationId xmlns:a16="http://schemas.microsoft.com/office/drawing/2014/main" id="{E1D40FB4-97DC-F5FF-9E7A-C10E078A1532}"/>
               </a:ext>
               <a:ext uri="{C183D7F6-B498-43B3-948B-1728B52AA6E4}">
-                <adec:decorative xmlns="" xmlns:adec="http://schemas.microsoft.com/office/drawing/2017/decorative" val="1"/>
+                <adec:decorative xmlns:adec="http://schemas.microsoft.com/office/drawing/2017/decorative" xmlns="" val="1"/>
               </a:ext>
             </a:extLst>
           </p:cNvPr>
@@ -12282,7 +14646,7 @@
             <p:ph sz="half" idx="2"/>
             <p:extLst>
               <p:ext uri="{E7BDC344-281C-4309-B0C6-D0EE65EED2A8}">
-                <p202:designPr xmlns="" xmlns:p202="http://schemas.microsoft.com/office/powerpoint/2020/02/main">
+                <p202:designPr xmlns:p202="http://schemas.microsoft.com/office/powerpoint/2020/02/main" xmlns="">
                   <p202:designTagLst>
                     <p202:designTag name="ARCH:1:CLS" val="InformationBlock"/>
                     <p202:designTag name="ARCH:1:VSVAR" val="TitledTextBox"/>
@@ -12540,7 +14904,7 @@
                 <a16:creationId xmlns:a16="http://schemas.microsoft.com/office/drawing/2014/main" id="{A51D6A68-C3BD-3399-CCA8-A7290FC8E09C}"/>
               </a:ext>
               <a:ext uri="{C183D7F6-B498-43B3-948B-1728B52AA6E4}">
-                <adec:decorative xmlns="" xmlns:adec="http://schemas.microsoft.com/office/drawing/2017/decorative" val="1"/>
+                <adec:decorative xmlns:adec="http://schemas.microsoft.com/office/drawing/2017/decorative" xmlns="" val="1"/>
               </a:ext>
             </a:extLst>
           </p:cNvPr>
@@ -12668,7 +15032,7 @@
             <p:ph sz="half" idx="2"/>
             <p:extLst>
               <p:ext uri="{E7BDC344-281C-4309-B0C6-D0EE65EED2A8}">
-                <p202:designPr xmlns="" xmlns:p202="http://schemas.microsoft.com/office/powerpoint/2020/02/main">
+                <p202:designPr xmlns:p202="http://schemas.microsoft.com/office/powerpoint/2020/02/main" xmlns="">
                   <p202:designTagLst>
                     <p202:designTag name="ARCH:1:CLS" val="InformationBlock"/>
                     <p202:designTag name="ARCH:1:VSVAR" val="TitledTextBox"/>
@@ -12926,7 +15290,7 @@
                 <a16:creationId xmlns:a16="http://schemas.microsoft.com/office/drawing/2014/main" id="{7F39A533-5E9C-439F-5CF1-06FFAB778C1F}"/>
               </a:ext>
               <a:ext uri="{C183D7F6-B498-43B3-948B-1728B52AA6E4}">
-                <adec:decorative xmlns="" xmlns:adec="http://schemas.microsoft.com/office/drawing/2017/decorative" val="1"/>
+                <adec:decorative xmlns:adec="http://schemas.microsoft.com/office/drawing/2017/decorative" xmlns="" val="1"/>
               </a:ext>
             </a:extLst>
           </p:cNvPr>
@@ -13054,7 +15418,7 @@
             <p:ph sz="half" idx="2"/>
             <p:extLst>
               <p:ext uri="{E7BDC344-281C-4309-B0C6-D0EE65EED2A8}">
-                <p202:designPr xmlns="" xmlns:p202="http://schemas.microsoft.com/office/powerpoint/2020/02/main">
+                <p202:designPr xmlns:p202="http://schemas.microsoft.com/office/powerpoint/2020/02/main" xmlns="">
                   <p202:designTagLst>
                     <p202:designTag name="ARCH:1:CLS" val="InformationBlock"/>
                     <p202:designTag name="ARCH:1:VSVAR" val="TitledTextBox"/>
@@ -13327,7 +15691,7 @@
                 <a16:creationId xmlns:a16="http://schemas.microsoft.com/office/drawing/2014/main" id="{A82A2D76-411A-C189-4AD9-642686996848}"/>
               </a:ext>
               <a:ext uri="{C183D7F6-B498-43B3-948B-1728B52AA6E4}">
-                <adec:decorative xmlns="" xmlns:adec="http://schemas.microsoft.com/office/drawing/2017/decorative" val="1"/>
+                <adec:decorative xmlns:adec="http://schemas.microsoft.com/office/drawing/2017/decorative" xmlns="" val="1"/>
               </a:ext>
             </a:extLst>
           </p:cNvPr>
@@ -13455,7 +15819,7 @@
             <p:ph sz="half" idx="2"/>
             <p:extLst>
               <p:ext uri="{E7BDC344-281C-4309-B0C6-D0EE65EED2A8}">
-                <p202:designPr xmlns="" xmlns:p202="http://schemas.microsoft.com/office/powerpoint/2020/02/main">
+                <p202:designPr xmlns:p202="http://schemas.microsoft.com/office/powerpoint/2020/02/main" xmlns="">
                   <p202:designTagLst>
                     <p202:designTag name="ARCH:1:CLS" val="InformationBlock"/>
                     <p202:designTag name="ARCH:1:VSVAR" val="TitledTextBox"/>
@@ -13716,7 +16080,7 @@
                 <a16:creationId xmlns:a16="http://schemas.microsoft.com/office/drawing/2014/main" id="{E482AA53-DA69-E258-8B64-8F8CE86FCDD4}"/>
               </a:ext>
               <a:ext uri="{C183D7F6-B498-43B3-948B-1728B52AA6E4}">
-                <adec:decorative xmlns="" xmlns:adec="http://schemas.microsoft.com/office/drawing/2017/decorative" val="1"/>
+                <adec:decorative xmlns:adec="http://schemas.microsoft.com/office/drawing/2017/decorative" xmlns="" val="1"/>
               </a:ext>
             </a:extLst>
           </p:cNvPr>
@@ -13844,7 +16208,7 @@
             <p:ph sz="half" idx="2"/>
             <p:extLst>
               <p:ext uri="{E7BDC344-281C-4309-B0C6-D0EE65EED2A8}">
-                <p202:designPr xmlns="" xmlns:p202="http://schemas.microsoft.com/office/powerpoint/2020/02/main">
+                <p202:designPr xmlns:p202="http://schemas.microsoft.com/office/powerpoint/2020/02/main" xmlns="">
                   <p202:designTagLst>
                     <p202:designTag name="ARCH:1:CLS" val="InformationBlock"/>
                     <p202:designTag name="ARCH:1:VSVAR" val="TitledTextBox"/>
@@ -14120,7 +16484,7 @@
                 <a16:creationId xmlns:a16="http://schemas.microsoft.com/office/drawing/2014/main" id="{5C27E16A-554C-D4AC-900E-AA69DDAEDE03}"/>
               </a:ext>
               <a:ext uri="{C183D7F6-B498-43B3-948B-1728B52AA6E4}">
-                <adec:decorative xmlns="" xmlns:adec="http://schemas.microsoft.com/office/drawing/2017/decorative" val="1"/>
+                <adec:decorative xmlns:adec="http://schemas.microsoft.com/office/drawing/2017/decorative" xmlns="" val="1"/>
               </a:ext>
             </a:extLst>
           </p:cNvPr>
@@ -14248,7 +16612,7 @@
             <p:ph sz="half" idx="2"/>
             <p:extLst>
               <p:ext uri="{E7BDC344-281C-4309-B0C6-D0EE65EED2A8}">
-                <p202:designPr xmlns="" xmlns:p202="http://schemas.microsoft.com/office/powerpoint/2020/02/main">
+                <p202:designPr xmlns:p202="http://schemas.microsoft.com/office/powerpoint/2020/02/main" xmlns="">
                   <p202:designTagLst>
                     <p202:designTag name="ARCH:1:CLS" val="InformationBlock"/>
                     <p202:designTag name="ARCH:1:VSVAR" val="TitledTextBox"/>
